--- a/documentation/Презентація.pptx
+++ b/documentation/Презентація.pptx
@@ -5,7 +5,7 @@
     <p:sldMasterId id="2147483648" r:id="rId1"/>
   </p:sldMasterIdLst>
   <p:notesMasterIdLst>
-    <p:notesMasterId r:id="rId14"/>
+    <p:notesMasterId r:id="rId15"/>
   </p:notesMasterIdLst>
   <p:sldIdLst>
     <p:sldId id="256" r:id="rId3"/>
@@ -14,15 +14,16 @@
     <p:sldId id="259" r:id="rId6"/>
     <p:sldId id="260" r:id="rId7"/>
     <p:sldId id="261" r:id="rId8"/>
-    <p:sldId id="262" r:id="rId9"/>
-    <p:sldId id="263" r:id="rId10"/>
-    <p:sldId id="264" r:id="rId11"/>
-    <p:sldId id="265" r:id="rId12"/>
-    <p:sldId id="266" r:id="rId13"/>
-    <p:sldId id="267" r:id="rId15"/>
-    <p:sldId id="270" r:id="rId16"/>
-    <p:sldId id="268" r:id="rId17"/>
-    <p:sldId id="269" r:id="rId18"/>
+    <p:sldId id="271" r:id="rId9"/>
+    <p:sldId id="262" r:id="rId10"/>
+    <p:sldId id="263" r:id="rId11"/>
+    <p:sldId id="264" r:id="rId12"/>
+    <p:sldId id="265" r:id="rId13"/>
+    <p:sldId id="266" r:id="rId14"/>
+    <p:sldId id="267" r:id="rId16"/>
+    <p:sldId id="270" r:id="rId17"/>
+    <p:sldId id="268" r:id="rId18"/>
+    <p:sldId id="269" r:id="rId19"/>
   </p:sldIdLst>
   <p:sldSz cx="9144000" cy="6858000" type="screen4x3"/>
   <p:notesSz cx="6858000" cy="9144000"/>
@@ -3786,6 +3787,142 @@
       </p:grpSpPr>
       <p:sp>
         <p:nvSpPr>
+          <p:cNvPr id="2" name="Заголовок 1"/>
+          <p:cNvSpPr>
+            <a:spLocks noGrp="1"/>
+          </p:cNvSpPr>
+          <p:nvPr>
+            <p:ph type="title"/>
+          </p:nvPr>
+        </p:nvSpPr>
+        <p:spPr>
+          <a:xfrm>
+            <a:off x="395536" y="692696"/>
+            <a:ext cx="8229600" cy="1143000"/>
+          </a:xfrm>
+        </p:spPr>
+        <p:txBody>
+          <a:bodyPr>
+            <a:normAutofit fontScale="90000"/>
+          </a:bodyPr>
+          <a:lstStyle/>
+          <a:p>
+            <a:r>
+              <a:rPr lang="ru-RU" b="1" dirty="0" err="1"/>
+              <a:t>Опис</a:t>
+            </a:r>
+            <a:r>
+              <a:rPr lang="ru-RU" b="1" dirty="0"/>
+              <a:t> </a:t>
+            </a:r>
+            <a:r>
+              <a:rPr lang="ru-RU" b="1" dirty="0" err="1"/>
+              <a:t>користувацького</a:t>
+            </a:r>
+            <a:r>
+              <a:rPr lang="ru-RU" b="1" dirty="0"/>
+              <a:t> </a:t>
+            </a:r>
+            <a:r>
+              <a:rPr lang="ru-RU" b="1" dirty="0" err="1"/>
+              <a:t>інтерфейсу</a:t>
+            </a:r>
+            <a:br>
+              <a:rPr lang="ru-RU" dirty="0"/>
+            </a:br>
+            <a:br>
+              <a:rPr lang="ru-RU" dirty="0"/>
+            </a:br>
+            <a:endParaRPr lang="ru-RU" dirty="0"/>
+          </a:p>
+        </p:txBody>
+      </p:sp>
+      <p:sp>
+        <p:nvSpPr>
+          <p:cNvPr id="6" name="TextBox 5"/>
+          <p:cNvSpPr txBox="1"/>
+          <p:nvPr/>
+        </p:nvSpPr>
+        <p:spPr>
+          <a:xfrm>
+            <a:off x="2843599" y="4077335"/>
+            <a:ext cx="4038600" cy="645160"/>
+          </a:xfrm>
+          <a:prstGeom prst="rect">
+            <a:avLst/>
+          </a:prstGeom>
+          <a:noFill/>
+        </p:spPr>
+        <p:txBody>
+          <a:bodyPr wrap="square" rtlCol="0">
+            <a:spAutoFit/>
+          </a:bodyPr>
+          <a:lstStyle/>
+          <a:p>
+            <a:endParaRPr lang="uk-UA" dirty="0"/>
+          </a:p>
+          <a:p>
+            <a:r>
+              <a:rPr lang="uk-UA" dirty="0"/>
+              <a:t>Рисунок 5 – меню адміністратора</a:t>
+            </a:r>
+            <a:endParaRPr lang="uk-UA" dirty="0"/>
+          </a:p>
+        </p:txBody>
+      </p:sp>
+      <p:pic>
+        <p:nvPicPr>
+          <p:cNvPr id="4" name="Content Placeholder 3"/>
+          <p:cNvPicPr>
+            <a:picLocks noChangeAspect="1"/>
+          </p:cNvPicPr>
+          <p:nvPr>
+            <p:ph sz="half" idx="1"/>
+          </p:nvPr>
+        </p:nvPicPr>
+        <p:blipFill>
+          <a:blip r:embed="rId1"/>
+          <a:stretch>
+            <a:fillRect/>
+          </a:stretch>
+        </p:blipFill>
+        <p:spPr>
+          <a:xfrm>
+            <a:off x="3134995" y="1268730"/>
+            <a:ext cx="2880360" cy="2644140"/>
+          </a:xfrm>
+          <a:prstGeom prst="rect">
+            <a:avLst/>
+          </a:prstGeom>
+        </p:spPr>
+      </p:pic>
+    </p:spTree>
+  </p:cSld>
+  <p:clrMapOvr>
+    <a:masterClrMapping/>
+  </p:clrMapOvr>
+</p:sld>
+</file>
+
+<file path=ppt/slides/slide11.xml><?xml version="1.0" encoding="utf-8"?>
+<p:sld xmlns:a="http://schemas.openxmlformats.org/drawingml/2006/main" xmlns:r="http://schemas.openxmlformats.org/officeDocument/2006/relationships" xmlns:p="http://schemas.openxmlformats.org/presentationml/2006/main">
+  <p:cSld>
+    <p:spTree>
+      <p:nvGrpSpPr>
+        <p:cNvPr id="1" name=""/>
+        <p:cNvGrpSpPr/>
+        <p:nvPr/>
+      </p:nvGrpSpPr>
+      <p:grpSpPr>
+        <a:xfrm>
+          <a:off x="0" y="0"/>
+          <a:ext cx="0" cy="0"/>
+          <a:chOff x="0" y="0"/>
+          <a:chExt cx="0" cy="0"/>
+        </a:xfrm>
+      </p:grpSpPr>
+      <p:sp>
+        <p:nvSpPr>
           <p:cNvPr id="4" name="TextBox 3"/>
           <p:cNvSpPr txBox="1"/>
           <p:nvPr/>
@@ -3846,7 +3983,7 @@
 </p:sld>
 </file>
 
-<file path=ppt/slides/slide11.xml><?xml version="1.0" encoding="utf-8"?>
+<file path=ppt/slides/slide12.xml><?xml version="1.0" encoding="utf-8"?>
 <p:sld xmlns:a="http://schemas.openxmlformats.org/drawingml/2006/main" xmlns:r="http://schemas.openxmlformats.org/officeDocument/2006/relationships" xmlns:p="http://schemas.openxmlformats.org/presentationml/2006/main">
   <p:cSld>
     <p:spTree>
@@ -4062,7 +4199,7 @@
 </p:sld>
 </file>
 
-<file path=ppt/slides/slide12.xml><?xml version="1.0" encoding="utf-8"?>
+<file path=ppt/slides/slide13.xml><?xml version="1.0" encoding="utf-8"?>
 <p:sld xmlns:a="http://schemas.openxmlformats.org/drawingml/2006/main" xmlns:r="http://schemas.openxmlformats.org/officeDocument/2006/relationships" xmlns:p="http://schemas.openxmlformats.org/presentationml/2006/main">
   <p:cSld>
     <p:spTree>
@@ -4252,7 +4389,7 @@
 </p:sld>
 </file>
 
-<file path=ppt/slides/slide13.xml><?xml version="1.0" encoding="utf-8"?>
+<file path=ppt/slides/slide14.xml><?xml version="1.0" encoding="utf-8"?>
 <p:sld xmlns:a="http://schemas.openxmlformats.org/drawingml/2006/main" xmlns:r="http://schemas.openxmlformats.org/officeDocument/2006/relationships" xmlns:p="http://schemas.openxmlformats.org/presentationml/2006/main">
   <p:cSld>
     <p:spTree>
@@ -4331,7 +4468,7 @@
 </p:sld>
 </file>
 
-<file path=ppt/slides/slide14.xml><?xml version="1.0" encoding="utf-8"?>
+<file path=ppt/slides/slide15.xml><?xml version="1.0" encoding="utf-8"?>
 <p:sld xmlns:a="http://schemas.openxmlformats.org/drawingml/2006/main" xmlns:r="http://schemas.openxmlformats.org/officeDocument/2006/relationships" xmlns:p="http://schemas.openxmlformats.org/presentationml/2006/main">
   <p:cSld>
     <p:spTree>
@@ -4418,7 +4555,7 @@
 </p:sld>
 </file>
 
-<file path=ppt/slides/slide15.xml><?xml version="1.0" encoding="utf-8"?>
+<file path=ppt/slides/slide16.xml><?xml version="1.0" encoding="utf-8"?>
 <p:sld xmlns:a="http://schemas.openxmlformats.org/drawingml/2006/main" xmlns:r="http://schemas.openxmlformats.org/officeDocument/2006/relationships" xmlns:p="http://schemas.openxmlformats.org/presentationml/2006/main">
   <p:cSld>
     <p:spTree>
@@ -6409,29 +6546,22 @@
       </p:sp>
       <p:pic>
         <p:nvPicPr>
-          <p:cNvPr id="1026" name="Picture 2"/>
+          <p:cNvPr id="12" name="Picture 4"/>
           <p:cNvPicPr>
-            <a:picLocks noChangeAspect="1" noChangeArrowheads="1"/>
+            <a:picLocks noChangeAspect="1"/>
           </p:cNvPicPr>
           <p:nvPr/>
         </p:nvPicPr>
         <p:blipFill>
-          <a:blip r:embed="rId1">
-            <a:extLst>
-              <a:ext uri="{28A0092B-C50C-407E-A947-70E740481C1C}">
-                <a14:useLocalDpi xmlns:a14="http://schemas.microsoft.com/office/drawing/2010/main" val="0"/>
-              </a:ext>
-            </a:extLst>
-          </a:blip>
-          <a:srcRect/>
+          <a:blip r:embed="rId1"/>
           <a:stretch>
             <a:fillRect/>
           </a:stretch>
         </p:blipFill>
-        <p:spPr bwMode="auto">
+        <p:spPr>
           <a:xfrm>
-            <a:off x="539552" y="1628800"/>
-            <a:ext cx="2808312" cy="4919957"/>
+            <a:off x="1188085" y="1772285"/>
+            <a:ext cx="1814830" cy="4204970"/>
           </a:xfrm>
           <a:prstGeom prst="rect">
             <a:avLst/>
@@ -6440,62 +6570,26 @@
           <a:ln>
             <a:noFill/>
           </a:ln>
-          <a:effectLst/>
-          <a:extLst>
-            <a:ext uri="{909E8E84-426E-40DD-AFC4-6F175D3DCCD1}">
-              <a14:hiddenFill xmlns:a14="http://schemas.microsoft.com/office/drawing/2010/main">
-                <a:solidFill>
-                  <a:schemeClr val="accent1"/>
-                </a:solidFill>
-              </a14:hiddenFill>
-            </a:ext>
-            <a:ext uri="{91240B29-F687-4F45-9708-019B960494DF}">
-              <a14:hiddenLine xmlns:a14="http://schemas.microsoft.com/office/drawing/2010/main" w="9525">
-                <a:solidFill>
-                  <a:schemeClr val="tx1"/>
-                </a:solidFill>
-                <a:miter lim="800000"/>
-                <a:headEnd/>
-                <a:tailEnd/>
-              </a14:hiddenLine>
-            </a:ext>
-            <a:ext uri="{AF507438-7753-43E0-B8FC-AC1667EBCBE1}">
-              <a14:hiddenEffects xmlns:a14="http://schemas.microsoft.com/office/drawing/2010/main">
-                <a:effectLst>
-                  <a:outerShdw dist="35921" dir="2700000" algn="ctr" rotWithShape="0">
-                    <a:schemeClr val="bg2"/>
-                  </a:outerShdw>
-                </a:effectLst>
-              </a14:hiddenEffects>
-            </a:ext>
-          </a:extLst>
         </p:spPr>
       </p:pic>
       <p:pic>
         <p:nvPicPr>
-          <p:cNvPr id="1027" name="Picture 3"/>
+          <p:cNvPr id="7" name="Picture 1"/>
           <p:cNvPicPr>
-            <a:picLocks noChangeAspect="1" noChangeArrowheads="1"/>
+            <a:picLocks noChangeAspect="1"/>
           </p:cNvPicPr>
           <p:nvPr/>
         </p:nvPicPr>
         <p:blipFill>
-          <a:blip r:embed="rId2">
-            <a:extLst>
-              <a:ext uri="{28A0092B-C50C-407E-A947-70E740481C1C}">
-                <a14:useLocalDpi xmlns:a14="http://schemas.microsoft.com/office/drawing/2010/main" val="0"/>
-              </a:ext>
-            </a:extLst>
-          </a:blip>
-          <a:srcRect/>
+          <a:blip r:embed="rId2"/>
           <a:stretch>
             <a:fillRect/>
           </a:stretch>
         </p:blipFill>
-        <p:spPr bwMode="auto">
+        <p:spPr>
           <a:xfrm>
-            <a:off x="5436096" y="1628800"/>
-            <a:ext cx="1686297" cy="4650209"/>
+            <a:off x="5507990" y="1916430"/>
+            <a:ext cx="1898015" cy="4339590"/>
           </a:xfrm>
           <a:prstGeom prst="rect">
             <a:avLst/>
@@ -6504,35 +6598,6 @@
           <a:ln>
             <a:noFill/>
           </a:ln>
-          <a:effectLst/>
-          <a:extLst>
-            <a:ext uri="{909E8E84-426E-40DD-AFC4-6F175D3DCCD1}">
-              <a14:hiddenFill xmlns:a14="http://schemas.microsoft.com/office/drawing/2010/main">
-                <a:solidFill>
-                  <a:schemeClr val="accent1"/>
-                </a:solidFill>
-              </a14:hiddenFill>
-            </a:ext>
-            <a:ext uri="{91240B29-F687-4F45-9708-019B960494DF}">
-              <a14:hiddenLine xmlns:a14="http://schemas.microsoft.com/office/drawing/2010/main" w="9525">
-                <a:solidFill>
-                  <a:schemeClr val="tx1"/>
-                </a:solidFill>
-                <a:miter lim="800000"/>
-                <a:headEnd/>
-                <a:tailEnd/>
-              </a14:hiddenLine>
-            </a:ext>
-            <a:ext uri="{AF507438-7753-43E0-B8FC-AC1667EBCBE1}">
-              <a14:hiddenEffects xmlns:a14="http://schemas.microsoft.com/office/drawing/2010/main">
-                <a:effectLst>
-                  <a:outerShdw dist="35921" dir="2700000" algn="ctr" rotWithShape="0">
-                    <a:schemeClr val="bg2"/>
-                  </a:outerShdw>
-                </a:effectLst>
-              </a14:hiddenEffects>
-            </a:ext>
-          </a:extLst>
         </p:spPr>
       </p:pic>
     </p:spTree>
@@ -6562,36 +6627,6 @@
       </p:grpSpPr>
       <p:sp>
         <p:nvSpPr>
-          <p:cNvPr id="2" name="Заголовок 1"/>
-          <p:cNvSpPr>
-            <a:spLocks noGrp="1"/>
-          </p:cNvSpPr>
-          <p:nvPr>
-            <p:ph type="title"/>
-          </p:nvPr>
-        </p:nvSpPr>
-        <p:spPr>
-          <a:xfrm flipH="1" flipV="1">
-            <a:off x="251520" y="188640"/>
-            <a:ext cx="205680" cy="85998"/>
-          </a:xfrm>
-        </p:spPr>
-        <p:txBody>
-          <a:bodyPr>
-            <a:normAutofit fontScale="90000"/>
-          </a:bodyPr>
-          <a:lstStyle/>
-          <a:p>
-            <a:r>
-              <a:rPr lang="uk-UA" dirty="0"/>
-              <a:t>.</a:t>
-            </a:r>
-            <a:endParaRPr lang="ru-RU" dirty="0"/>
-          </a:p>
-        </p:txBody>
-      </p:sp>
-      <p:sp>
-        <p:nvSpPr>
           <p:cNvPr id="3" name="Объект 2"/>
           <p:cNvSpPr>
             <a:spLocks noGrp="1"/>
@@ -6602,8 +6637,8 @@
         </p:nvSpPr>
         <p:spPr>
           <a:xfrm>
-            <a:off x="323528" y="404664"/>
-            <a:ext cx="4038600" cy="4525963"/>
+            <a:off x="530860" y="404495"/>
+            <a:ext cx="3830955" cy="673100"/>
           </a:xfrm>
         </p:spPr>
         <p:txBody>
@@ -6636,8 +6671,8 @@
         </p:nvSpPr>
         <p:spPr>
           <a:xfrm>
-            <a:off x="4572000" y="332656"/>
-            <a:ext cx="4038600" cy="4525963"/>
+            <a:off x="4572000" y="404495"/>
+            <a:ext cx="4038600" cy="826135"/>
           </a:xfrm>
         </p:spPr>
         <p:txBody>
@@ -6660,29 +6695,22 @@
       </p:sp>
       <p:pic>
         <p:nvPicPr>
-          <p:cNvPr id="2050" name="Picture 2"/>
+          <p:cNvPr id="18" name="Picture 2"/>
           <p:cNvPicPr>
-            <a:picLocks noChangeAspect="1" noChangeArrowheads="1"/>
+            <a:picLocks noChangeAspect="1"/>
           </p:cNvPicPr>
           <p:nvPr/>
         </p:nvPicPr>
         <p:blipFill>
-          <a:blip r:embed="rId1">
-            <a:extLst>
-              <a:ext uri="{28A0092B-C50C-407E-A947-70E740481C1C}">
-                <a14:useLocalDpi xmlns:a14="http://schemas.microsoft.com/office/drawing/2010/main" val="0"/>
-              </a:ext>
-            </a:extLst>
-          </a:blip>
-          <a:srcRect/>
+          <a:blip r:embed="rId1"/>
           <a:stretch>
             <a:fillRect/>
           </a:stretch>
         </p:blipFill>
-        <p:spPr bwMode="auto">
+        <p:spPr>
           <a:xfrm>
-            <a:off x="395536" y="1124744"/>
-            <a:ext cx="2971800" cy="5086350"/>
+            <a:off x="1184275" y="1484630"/>
+            <a:ext cx="2523490" cy="4320540"/>
           </a:xfrm>
           <a:prstGeom prst="rect">
             <a:avLst/>
@@ -6691,62 +6719,26 @@
           <a:ln>
             <a:noFill/>
           </a:ln>
-          <a:effectLst/>
-          <a:extLst>
-            <a:ext uri="{909E8E84-426E-40DD-AFC4-6F175D3DCCD1}">
-              <a14:hiddenFill xmlns:a14="http://schemas.microsoft.com/office/drawing/2010/main">
-                <a:solidFill>
-                  <a:schemeClr val="accent1"/>
-                </a:solidFill>
-              </a14:hiddenFill>
-            </a:ext>
-            <a:ext uri="{91240B29-F687-4F45-9708-019B960494DF}">
-              <a14:hiddenLine xmlns:a14="http://schemas.microsoft.com/office/drawing/2010/main" w="9525">
-                <a:solidFill>
-                  <a:schemeClr val="tx1"/>
-                </a:solidFill>
-                <a:miter lim="800000"/>
-                <a:headEnd/>
-                <a:tailEnd/>
-              </a14:hiddenLine>
-            </a:ext>
-            <a:ext uri="{AF507438-7753-43E0-B8FC-AC1667EBCBE1}">
-              <a14:hiddenEffects xmlns:a14="http://schemas.microsoft.com/office/drawing/2010/main">
-                <a:effectLst>
-                  <a:outerShdw dist="35921" dir="2700000" algn="ctr" rotWithShape="0">
-                    <a:schemeClr val="bg2"/>
-                  </a:outerShdw>
-                </a:effectLst>
-              </a14:hiddenEffects>
-            </a:ext>
-          </a:extLst>
         </p:spPr>
       </p:pic>
       <p:pic>
         <p:nvPicPr>
-          <p:cNvPr id="2051" name="Picture 3"/>
+          <p:cNvPr id="21" name="Picture 3"/>
           <p:cNvPicPr>
-            <a:picLocks noChangeAspect="1" noChangeArrowheads="1"/>
+            <a:picLocks noChangeAspect="1"/>
           </p:cNvPicPr>
           <p:nvPr/>
         </p:nvPicPr>
         <p:blipFill>
-          <a:blip r:embed="rId2">
-            <a:extLst>
-              <a:ext uri="{28A0092B-C50C-407E-A947-70E740481C1C}">
-                <a14:useLocalDpi xmlns:a14="http://schemas.microsoft.com/office/drawing/2010/main" val="0"/>
-              </a:ext>
-            </a:extLst>
-          </a:blip>
-          <a:srcRect/>
+          <a:blip r:embed="rId2"/>
           <a:stretch>
             <a:fillRect/>
           </a:stretch>
         </p:blipFill>
-        <p:spPr bwMode="auto">
+        <p:spPr>
           <a:xfrm>
-            <a:off x="5364088" y="1196752"/>
-            <a:ext cx="2276475" cy="5314950"/>
+            <a:off x="5175885" y="1340485"/>
+            <a:ext cx="2831465" cy="4744720"/>
           </a:xfrm>
           <a:prstGeom prst="rect">
             <a:avLst/>
@@ -6755,35 +6747,6 @@
           <a:ln>
             <a:noFill/>
           </a:ln>
-          <a:effectLst/>
-          <a:extLst>
-            <a:ext uri="{909E8E84-426E-40DD-AFC4-6F175D3DCCD1}">
-              <a14:hiddenFill xmlns:a14="http://schemas.microsoft.com/office/drawing/2010/main">
-                <a:solidFill>
-                  <a:schemeClr val="accent1"/>
-                </a:solidFill>
-              </a14:hiddenFill>
-            </a:ext>
-            <a:ext uri="{91240B29-F687-4F45-9708-019B960494DF}">
-              <a14:hiddenLine xmlns:a14="http://schemas.microsoft.com/office/drawing/2010/main" w="9525">
-                <a:solidFill>
-                  <a:schemeClr val="tx1"/>
-                </a:solidFill>
-                <a:miter lim="800000"/>
-                <a:headEnd/>
-                <a:tailEnd/>
-              </a14:hiddenLine>
-            </a:ext>
-            <a:ext uri="{AF507438-7753-43E0-B8FC-AC1667EBCBE1}">
-              <a14:hiddenEffects xmlns:a14="http://schemas.microsoft.com/office/drawing/2010/main">
-                <a:effectLst>
-                  <a:outerShdw dist="35921" dir="2700000" algn="ctr" rotWithShape="0">
-                    <a:schemeClr val="bg2"/>
-                  </a:outerShdw>
-                </a:effectLst>
-              </a14:hiddenEffects>
-            </a:ext>
-          </a:extLst>
         </p:spPr>
       </p:pic>
     </p:spTree>
@@ -6803,194 +6766,88 @@
         <p:cNvGrpSpPr/>
         <p:nvPr/>
       </p:nvGrpSpPr>
-      <p:grpSpPr>
-        <a:xfrm>
-          <a:off x="0" y="0"/>
-          <a:ext cx="0" cy="0"/>
-          <a:chOff x="0" y="0"/>
-          <a:chExt cx="0" cy="0"/>
-        </a:xfrm>
-      </p:grpSpPr>
-      <p:sp>
-        <p:nvSpPr>
-          <p:cNvPr id="2" name="Заголовок 1"/>
-          <p:cNvSpPr>
-            <a:spLocks noGrp="1"/>
-          </p:cNvSpPr>
-          <p:nvPr>
-            <p:ph type="ctrTitle"/>
+      <p:grpSpPr/>
+      <p:sp>
+        <p:nvSpPr>
+          <p:cNvPr id="3" name="Content Placeholder 2"/>
+          <p:cNvSpPr>
+            <a:spLocks noGrp="1"/>
+          </p:cNvSpPr>
+          <p:nvPr>
+            <p:ph sz="half" idx="1"/>
           </p:nvPr>
         </p:nvSpPr>
         <p:spPr>
           <a:xfrm>
-            <a:off x="107504" y="116633"/>
-            <a:ext cx="8856984" cy="1368151"/>
+            <a:off x="2287270" y="332740"/>
+            <a:ext cx="3991610" cy="812800"/>
           </a:xfrm>
         </p:spPr>
         <p:txBody>
           <a:bodyPr>
-            <a:normAutofit fontScale="90000"/>
+            <a:normAutofit lnSpcReduction="10000"/>
           </a:bodyPr>
-          <a:lstStyle/>
-          <a:p>
-            <a:r>
-              <a:rPr lang="uk-UA" b="1" dirty="0"/>
-              <a:t>Вимоги до консольного інтерфейсу користувача</a:t>
-            </a:r>
-            <a:endParaRPr lang="ru-RU" b="1" dirty="0"/>
-          </a:p>
-        </p:txBody>
-      </p:sp>
-      <p:sp>
-        <p:nvSpPr>
-          <p:cNvPr id="3" name="Подзаголовок 2"/>
-          <p:cNvSpPr>
-            <a:spLocks noGrp="1"/>
-          </p:cNvSpPr>
-          <p:nvPr>
-            <p:ph type="subTitle" idx="1"/>
-          </p:nvPr>
-        </p:nvSpPr>
+          <a:p>
+            <a:r>
+              <a:rPr lang="en-US" altLang="en-US" sz="1600"/>
+              <a:t>Рисунок</a:t>
+            </a:r>
+            <a:r>
+              <a:rPr lang="" altLang="en-US" sz="1600"/>
+              <a:t> </a:t>
+            </a:r>
+            <a:r>
+              <a:rPr lang="en-US" altLang="en-US" sz="1600"/>
+              <a:t>5</a:t>
+            </a:r>
+            <a:r>
+              <a:rPr lang="" altLang="en-US" sz="1600"/>
+              <a:t> </a:t>
+            </a:r>
+            <a:r>
+              <a:rPr lang="en-US" altLang="en-US" sz="1600"/>
+              <a:t>– Узагальнена блок-схема алгоритму перегляду доданих об’єктів та їх</a:t>
+            </a:r>
+            <a:r>
+              <a:rPr lang="" altLang="en-US" sz="1600"/>
+              <a:t> </a:t>
+            </a:r>
+            <a:r>
+              <a:rPr lang="en-US" altLang="en-US" sz="1600"/>
+              <a:t>пошуку</a:t>
+            </a:r>
+            <a:endParaRPr lang="en-US" altLang="en-US" sz="1600"/>
+          </a:p>
+        </p:txBody>
+      </p:sp>
+      <p:pic>
+        <p:nvPicPr>
+          <p:cNvPr id="5" name="Picture 1"/>
+          <p:cNvPicPr>
+            <a:picLocks noChangeAspect="1"/>
+          </p:cNvPicPr>
+          <p:nvPr/>
+        </p:nvPicPr>
+        <p:blipFill>
+          <a:blip r:embed="rId1"/>
+          <a:stretch>
+            <a:fillRect/>
+          </a:stretch>
+        </p:blipFill>
         <p:spPr>
           <a:xfrm>
-            <a:off x="251520" y="1412776"/>
-            <a:ext cx="8568952" cy="5184576"/>
+            <a:off x="2915920" y="1145540"/>
+            <a:ext cx="3024505" cy="5497830"/>
           </a:xfrm>
+          <a:prstGeom prst="rect">
+            <a:avLst/>
+          </a:prstGeom>
+          <a:noFill/>
+          <a:ln>
+            <a:noFill/>
+          </a:ln>
         </p:spPr>
-        <p:txBody>
-          <a:bodyPr>
-            <a:normAutofit/>
-          </a:bodyPr>
-          <a:lstStyle/>
-          <a:p>
-            <a:pPr marL="342900" lvl="0" indent="-342900" algn="l">
-              <a:buFont typeface="Arial" panose="020B0604020202020204" pitchFamily="34" charset="0"/>
-              <a:buChar char="•"/>
-            </a:pPr>
-            <a:r>
-              <a:rPr lang="uk-UA" sz="2000" dirty="0">
-                <a:solidFill>
-                  <a:schemeClr val="tx1"/>
-                </a:solidFill>
-              </a:rPr>
-              <a:t>Робоча мова інтерфейсу – українська.</a:t>
-            </a:r>
-            <a:endParaRPr lang="uk-UA" sz="2000" dirty="0">
-              <a:solidFill>
-                <a:schemeClr val="tx1"/>
-              </a:solidFill>
-            </a:endParaRPr>
-          </a:p>
-          <a:p>
-            <a:pPr lvl="0" algn="l"/>
-            <a:endParaRPr lang="ru-RU" sz="2000" dirty="0">
-              <a:solidFill>
-                <a:schemeClr val="tx1"/>
-              </a:solidFill>
-            </a:endParaRPr>
-          </a:p>
-          <a:p>
-            <a:pPr marL="342900" lvl="0" indent="-342900" algn="l">
-              <a:buFont typeface="Arial" panose="020B0604020202020204" pitchFamily="34" charset="0"/>
-              <a:buChar char="•"/>
-            </a:pPr>
-            <a:r>
-              <a:rPr lang="uk-UA" sz="2000" dirty="0">
-                <a:solidFill>
-                  <a:schemeClr val="tx1"/>
-                </a:solidFill>
-              </a:rPr>
-              <a:t>Використання термінів, зрозумілих користувачеві. </a:t>
-            </a:r>
-            <a:endParaRPr lang="uk-UA" sz="2000" dirty="0">
-              <a:solidFill>
-                <a:schemeClr val="tx1"/>
-              </a:solidFill>
-            </a:endParaRPr>
-          </a:p>
-          <a:p>
-            <a:pPr lvl="0" algn="l"/>
-            <a:endParaRPr lang="ru-RU" sz="2000" dirty="0">
-              <a:solidFill>
-                <a:schemeClr val="tx1"/>
-              </a:solidFill>
-            </a:endParaRPr>
-          </a:p>
-          <a:p>
-            <a:pPr marL="342900" lvl="0" indent="-342900" algn="l">
-              <a:buFont typeface="Arial" panose="020B0604020202020204" pitchFamily="34" charset="0"/>
-              <a:buChar char="•"/>
-            </a:pPr>
-            <a:r>
-              <a:rPr lang="uk-UA" sz="2000" dirty="0">
-                <a:solidFill>
-                  <a:schemeClr val="tx1"/>
-                </a:solidFill>
-              </a:rPr>
-              <a:t>Навігаційна панель (меню), яка забезпечує перегляд, редагування, додавання та зчитування даних.</a:t>
-            </a:r>
-            <a:endParaRPr lang="uk-UA" sz="2000" dirty="0">
-              <a:solidFill>
-                <a:schemeClr val="tx1"/>
-              </a:solidFill>
-            </a:endParaRPr>
-          </a:p>
-          <a:p>
-            <a:pPr lvl="0" algn="l"/>
-            <a:endParaRPr lang="ru-RU" sz="2000" dirty="0">
-              <a:solidFill>
-                <a:schemeClr val="tx1"/>
-              </a:solidFill>
-            </a:endParaRPr>
-          </a:p>
-          <a:p>
-            <a:pPr marL="342900" lvl="0" indent="-342900" algn="l">
-              <a:buFont typeface="Arial" panose="020B0604020202020204" pitchFamily="34" charset="0"/>
-              <a:buChar char="•"/>
-            </a:pPr>
-            <a:r>
-              <a:rPr lang="uk-UA" sz="2000" dirty="0">
-                <a:solidFill>
-                  <a:schemeClr val="tx1"/>
-                </a:solidFill>
-              </a:rPr>
-              <a:t>«Посібник користувача», що містить інструкції з використання програми.</a:t>
-            </a:r>
-            <a:endParaRPr lang="uk-UA" sz="2000" dirty="0">
-              <a:solidFill>
-                <a:schemeClr val="tx1"/>
-              </a:solidFill>
-            </a:endParaRPr>
-          </a:p>
-          <a:p>
-            <a:pPr lvl="0" algn="l"/>
-            <a:endParaRPr lang="ru-RU" sz="2000" dirty="0">
-              <a:solidFill>
-                <a:schemeClr val="tx1"/>
-              </a:solidFill>
-            </a:endParaRPr>
-          </a:p>
-          <a:p>
-            <a:pPr marL="342900" indent="-342900" algn="l">
-              <a:buFont typeface="Arial" panose="020B0604020202020204" pitchFamily="34" charset="0"/>
-              <a:buChar char="•"/>
-            </a:pPr>
-            <a:r>
-              <a:rPr lang="uk-UA" sz="2000" dirty="0">
-                <a:solidFill>
-                  <a:schemeClr val="tx1"/>
-                </a:solidFill>
-              </a:rPr>
-              <a:t>Повідомлення про некоректно введені дані</a:t>
-            </a:r>
-            <a:endParaRPr lang="ru-RU" sz="2000" dirty="0">
-              <a:solidFill>
-                <a:schemeClr val="tx1"/>
-              </a:solidFill>
-            </a:endParaRPr>
-          </a:p>
-        </p:txBody>
-      </p:sp>
+      </p:pic>
     </p:spTree>
   </p:cSld>
   <p:clrMapOvr>
@@ -7028,8 +6885,8 @@
         </p:nvSpPr>
         <p:spPr>
           <a:xfrm>
-            <a:off x="755576" y="260648"/>
-            <a:ext cx="7772400" cy="1470025"/>
+            <a:off x="107504" y="116633"/>
+            <a:ext cx="8856984" cy="1368151"/>
           </a:xfrm>
         </p:spPr>
         <p:txBody>
@@ -7039,32 +6896,10 @@
           <a:lstStyle/>
           <a:p>
             <a:r>
-              <a:rPr lang="ru-RU" b="1" dirty="0" err="1"/>
-              <a:t>Опис</a:t>
-            </a:r>
-            <a:r>
-              <a:rPr lang="ru-RU" b="1" dirty="0"/>
-              <a:t> </a:t>
-            </a:r>
-            <a:r>
-              <a:rPr lang="ru-RU" b="1" dirty="0" err="1"/>
-              <a:t>користувацького</a:t>
-            </a:r>
-            <a:r>
-              <a:rPr lang="ru-RU" b="1" dirty="0"/>
-              <a:t> </a:t>
-            </a:r>
-            <a:r>
-              <a:rPr lang="ru-RU" b="1" dirty="0" err="1"/>
-              <a:t>інтерфейсу</a:t>
-            </a:r>
-            <a:br>
-              <a:rPr lang="ru-RU" dirty="0"/>
-            </a:br>
-            <a:br>
-              <a:rPr lang="ru-RU" dirty="0"/>
-            </a:br>
-            <a:endParaRPr lang="ru-RU" dirty="0"/>
+              <a:rPr lang="uk-UA" b="1" dirty="0"/>
+              <a:t>Вимоги до консольного інтерфейсу користувача</a:t>
+            </a:r>
+            <a:endParaRPr lang="ru-RU" b="1" dirty="0"/>
           </a:p>
         </p:txBody>
       </p:sp>
@@ -7080,8 +6915,8 @@
         </p:nvSpPr>
         <p:spPr>
           <a:xfrm>
-            <a:off x="323528" y="764704"/>
-            <a:ext cx="8568952" cy="5904656"/>
+            <a:off x="251520" y="1412776"/>
+            <a:ext cx="8568952" cy="5184576"/>
           </a:xfrm>
         </p:spPr>
         <p:txBody>
@@ -7090,96 +6925,131 @@
           </a:bodyPr>
           <a:lstStyle/>
           <a:p>
-            <a:pPr algn="l"/>
-            <a:r>
-              <a:rPr lang="uk-UA" sz="2400" dirty="0">
-                <a:solidFill>
-                  <a:schemeClr val="tx1"/>
-                </a:solidFill>
-              </a:rPr>
-              <a:t>Після авторизації як адміністратор, в консоль виводитися меню, що складається з 10 пунктів. В якому адміністратор може додавати, редагувати, видаляти, переглядати, шукати, сортувати, фільтрувати товар, керувати обліковими записами, вийти з облікового запису.</a:t>
-            </a:r>
-            <a:endParaRPr lang="uk-UA" sz="2400" dirty="0">
+            <a:pPr marL="342900" lvl="0" indent="-342900" algn="l">
+              <a:buFont typeface="Arial" panose="020B0604020202020204" pitchFamily="34" charset="0"/>
+              <a:buChar char="•"/>
+            </a:pPr>
+            <a:r>
+              <a:rPr lang="uk-UA" sz="2000" dirty="0">
+                <a:solidFill>
+                  <a:schemeClr val="tx1"/>
+                </a:solidFill>
+              </a:rPr>
+              <a:t>Робоча мова інтерфейсу – українська.</a:t>
+            </a:r>
+            <a:endParaRPr lang="uk-UA" sz="2000" dirty="0">
               <a:solidFill>
                 <a:schemeClr val="tx1"/>
               </a:solidFill>
             </a:endParaRPr>
           </a:p>
           <a:p>
-            <a:pPr algn="l"/>
-            <a:r>
-              <a:rPr lang="uk-UA" sz="2400" dirty="0">
-                <a:solidFill>
-                  <a:schemeClr val="tx1"/>
-                </a:solidFill>
-              </a:rPr>
-              <a:t>Після виборо пункту 9 адміністратора перекидую у меню керування обліковими записами. В якому адміністратор може переглянути, створити, видалити коростувача.</a:t>
-            </a:r>
-            <a:endParaRPr lang="uk-UA" sz="2400" dirty="0">
+            <a:pPr lvl="0" algn="l"/>
+            <a:endParaRPr lang="ru-RU" sz="2000" dirty="0">
               <a:solidFill>
                 <a:schemeClr val="tx1"/>
               </a:solidFill>
             </a:endParaRPr>
           </a:p>
           <a:p>
-            <a:pPr algn="l"/>
-            <a:r>
-              <a:rPr lang="uk-UA" sz="2400" dirty="0">
-                <a:solidFill>
-                  <a:schemeClr val="tx1"/>
-                </a:solidFill>
-              </a:rPr>
-              <a:t>Якщо ми авторизуємось як користувач</a:t>
-            </a:r>
-            <a:r>
-              <a:rPr lang="en-US" sz="2400" dirty="0">
-                <a:solidFill>
-                  <a:schemeClr val="tx1"/>
-                </a:solidFill>
-              </a:rPr>
-              <a:t> </a:t>
-            </a:r>
-            <a:r>
-              <a:rPr lang="uk-UA" altLang="en-US" sz="2400" dirty="0">
-                <a:solidFill>
-                  <a:schemeClr val="tx1"/>
-                </a:solidFill>
-              </a:rPr>
-              <a:t>консоль нам виведить меню касира у якому користувач може оформити покупку, переглянути всі товари і пошук товарів.</a:t>
-            </a:r>
-            <a:r>
-              <a:rPr lang="uk-UA" sz="2400" dirty="0">
-                <a:solidFill>
-                  <a:schemeClr val="tx1"/>
-                </a:solidFill>
-              </a:rPr>
-              <a:t> Також у користувача є окремий пункт з описом як працювати з програмаю.</a:t>
-            </a:r>
-            <a:endParaRPr lang="uk-UA" sz="2400" dirty="0">
+            <a:pPr marL="342900" lvl="0" indent="-342900" algn="l">
+              <a:buFont typeface="Arial" panose="020B0604020202020204" pitchFamily="34" charset="0"/>
+              <a:buChar char="•"/>
+            </a:pPr>
+            <a:r>
+              <a:rPr lang="uk-UA" sz="2000" dirty="0">
+                <a:solidFill>
+                  <a:schemeClr val="tx1"/>
+                </a:solidFill>
+              </a:rPr>
+              <a:t>Використання термінів, зрозумілих користувачеві. </a:t>
+            </a:r>
+            <a:endParaRPr lang="uk-UA" sz="2000" dirty="0">
               <a:solidFill>
                 <a:schemeClr val="tx1"/>
               </a:solidFill>
             </a:endParaRPr>
           </a:p>
           <a:p>
-            <a:pPr algn="l"/>
-            <a:endParaRPr lang="uk-UA" sz="2400" dirty="0">
+            <a:pPr lvl="0" algn="l"/>
+            <a:endParaRPr lang="ru-RU" sz="2000" dirty="0">
               <a:solidFill>
                 <a:schemeClr val="tx1"/>
               </a:solidFill>
             </a:endParaRPr>
           </a:p>
           <a:p>
-            <a:pPr algn="l"/>
-            <a:r>
-              <a:rPr lang="uk-UA" sz="2400" dirty="0">
-                <a:solidFill>
-                  <a:schemeClr val="tx1"/>
-                </a:solidFill>
-              </a:rPr>
-              <a:t>  </a:t>
-            </a:r>
-            <a:endParaRPr lang="ru-RU" dirty="0"/>
+            <a:pPr marL="342900" lvl="0" indent="-342900" algn="l">
+              <a:buFont typeface="Arial" panose="020B0604020202020204" pitchFamily="34" charset="0"/>
+              <a:buChar char="•"/>
+            </a:pPr>
+            <a:r>
+              <a:rPr lang="uk-UA" sz="2000" dirty="0">
+                <a:solidFill>
+                  <a:schemeClr val="tx1"/>
+                </a:solidFill>
+              </a:rPr>
+              <a:t>Навігаційна панель (меню), яка забезпечує перегляд, редагування, додавання та зчитування даних.</a:t>
+            </a:r>
+            <a:endParaRPr lang="uk-UA" sz="2000" dirty="0">
+              <a:solidFill>
+                <a:schemeClr val="tx1"/>
+              </a:solidFill>
+            </a:endParaRPr>
+          </a:p>
+          <a:p>
+            <a:pPr lvl="0" algn="l"/>
+            <a:endParaRPr lang="ru-RU" sz="2000" dirty="0">
+              <a:solidFill>
+                <a:schemeClr val="tx1"/>
+              </a:solidFill>
+            </a:endParaRPr>
+          </a:p>
+          <a:p>
+            <a:pPr marL="342900" lvl="0" indent="-342900" algn="l">
+              <a:buFont typeface="Arial" panose="020B0604020202020204" pitchFamily="34" charset="0"/>
+              <a:buChar char="•"/>
+            </a:pPr>
+            <a:r>
+              <a:rPr lang="uk-UA" sz="2000" dirty="0">
+                <a:solidFill>
+                  <a:schemeClr val="tx1"/>
+                </a:solidFill>
+              </a:rPr>
+              <a:t>«Посібник користувача», що містить інструкції з використання програми.</a:t>
+            </a:r>
+            <a:endParaRPr lang="uk-UA" sz="2000" dirty="0">
+              <a:solidFill>
+                <a:schemeClr val="tx1"/>
+              </a:solidFill>
+            </a:endParaRPr>
+          </a:p>
+          <a:p>
+            <a:pPr lvl="0" algn="l"/>
+            <a:endParaRPr lang="ru-RU" sz="2000" dirty="0">
+              <a:solidFill>
+                <a:schemeClr val="tx1"/>
+              </a:solidFill>
+            </a:endParaRPr>
+          </a:p>
+          <a:p>
+            <a:pPr marL="342900" indent="-342900" algn="l">
+              <a:buFont typeface="Arial" panose="020B0604020202020204" pitchFamily="34" charset="0"/>
+              <a:buChar char="•"/>
+            </a:pPr>
+            <a:r>
+              <a:rPr lang="uk-UA" sz="2000" dirty="0">
+                <a:solidFill>
+                  <a:schemeClr val="tx1"/>
+                </a:solidFill>
+              </a:rPr>
+              <a:t>Повідомлення про некоректно введені дані</a:t>
+            </a:r>
+            <a:endParaRPr lang="ru-RU" sz="2000" dirty="0">
+              <a:solidFill>
+                <a:schemeClr val="tx1"/>
+              </a:solidFill>
+            </a:endParaRPr>
           </a:p>
         </p:txBody>
       </p:sp>
@@ -7215,13 +7085,13 @@
             <a:spLocks noGrp="1"/>
           </p:cNvSpPr>
           <p:nvPr>
-            <p:ph type="title"/>
+            <p:ph type="ctrTitle"/>
           </p:nvPr>
         </p:nvSpPr>
         <p:spPr>
           <a:xfrm>
-            <a:off x="395536" y="692696"/>
-            <a:ext cx="8229600" cy="1143000"/>
+            <a:off x="755576" y="260648"/>
+            <a:ext cx="7772400" cy="1470025"/>
           </a:xfrm>
         </p:spPr>
         <p:txBody>
@@ -7262,63 +7132,119 @@
       </p:sp>
       <p:sp>
         <p:nvSpPr>
-          <p:cNvPr id="6" name="TextBox 5"/>
-          <p:cNvSpPr txBox="1"/>
-          <p:nvPr/>
+          <p:cNvPr id="3" name="Подзаголовок 2"/>
+          <p:cNvSpPr>
+            <a:spLocks noGrp="1"/>
+          </p:cNvSpPr>
+          <p:nvPr>
+            <p:ph type="subTitle" idx="1"/>
+          </p:nvPr>
         </p:nvSpPr>
         <p:spPr>
           <a:xfrm>
-            <a:off x="2843599" y="4077335"/>
-            <a:ext cx="4038600" cy="645160"/>
+            <a:off x="323528" y="764704"/>
+            <a:ext cx="8568952" cy="5904656"/>
           </a:xfrm>
-          <a:prstGeom prst="rect">
-            <a:avLst/>
-          </a:prstGeom>
-          <a:noFill/>
         </p:spPr>
         <p:txBody>
-          <a:bodyPr wrap="square" rtlCol="0">
-            <a:spAutoFit/>
+          <a:bodyPr>
+            <a:normAutofit/>
           </a:bodyPr>
           <a:lstStyle/>
           <a:p>
-            <a:endParaRPr lang="uk-UA" dirty="0"/>
-          </a:p>
-          <a:p>
-            <a:r>
-              <a:rPr lang="uk-UA" dirty="0"/>
-              <a:t>Рисунок 5 – меню адміністратора</a:t>
-            </a:r>
-            <a:endParaRPr lang="uk-UA" dirty="0"/>
-          </a:p>
-        </p:txBody>
-      </p:sp>
-      <p:pic>
-        <p:nvPicPr>
-          <p:cNvPr id="4" name="Content Placeholder 3"/>
-          <p:cNvPicPr>
-            <a:picLocks noChangeAspect="1"/>
-          </p:cNvPicPr>
-          <p:nvPr>
-            <p:ph sz="half" idx="1"/>
-          </p:nvPr>
-        </p:nvPicPr>
-        <p:blipFill>
-          <a:blip r:embed="rId1"/>
-          <a:stretch>
-            <a:fillRect/>
-          </a:stretch>
-        </p:blipFill>
-        <p:spPr>
-          <a:xfrm>
-            <a:off x="3134995" y="1268730"/>
-            <a:ext cx="2880360" cy="2644140"/>
-          </a:xfrm>
-          <a:prstGeom prst="rect">
-            <a:avLst/>
-          </a:prstGeom>
-        </p:spPr>
-      </p:pic>
+            <a:pPr algn="l"/>
+            <a:r>
+              <a:rPr lang="uk-UA" sz="2400" dirty="0">
+                <a:solidFill>
+                  <a:schemeClr val="tx1"/>
+                </a:solidFill>
+              </a:rPr>
+              <a:t>Після авторизації як адміністратор, в консоль виводитися меню, що складається з 10 пунктів. В якому адміністратор може додавати, редагувати, видаляти, переглядати, шукати, сортувати, фільтрувати товар, керувати обліковими записами, вийти з облікового запису.</a:t>
+            </a:r>
+            <a:endParaRPr lang="uk-UA" sz="2400" dirty="0">
+              <a:solidFill>
+                <a:schemeClr val="tx1"/>
+              </a:solidFill>
+            </a:endParaRPr>
+          </a:p>
+          <a:p>
+            <a:pPr algn="l"/>
+            <a:r>
+              <a:rPr lang="uk-UA" sz="2400" dirty="0">
+                <a:solidFill>
+                  <a:schemeClr val="tx1"/>
+                </a:solidFill>
+              </a:rPr>
+              <a:t>Після виборо пункту 9 адміністратора перекидую у меню керування обліковими записами. В якому адміністратор може переглянути, створити, видалити коростувача.</a:t>
+            </a:r>
+            <a:endParaRPr lang="uk-UA" sz="2400" dirty="0">
+              <a:solidFill>
+                <a:schemeClr val="tx1"/>
+              </a:solidFill>
+            </a:endParaRPr>
+          </a:p>
+          <a:p>
+            <a:pPr algn="l"/>
+            <a:r>
+              <a:rPr lang="uk-UA" sz="2400" dirty="0">
+                <a:solidFill>
+                  <a:schemeClr val="tx1"/>
+                </a:solidFill>
+              </a:rPr>
+              <a:t>Якщо ми авторизуємось як користувач</a:t>
+            </a:r>
+            <a:r>
+              <a:rPr lang="en-US" sz="2400" dirty="0">
+                <a:solidFill>
+                  <a:schemeClr val="tx1"/>
+                </a:solidFill>
+              </a:rPr>
+              <a:t> </a:t>
+            </a:r>
+            <a:r>
+              <a:rPr lang="uk-UA" altLang="en-US" sz="2400" dirty="0">
+                <a:solidFill>
+                  <a:schemeClr val="tx1"/>
+                </a:solidFill>
+              </a:rPr>
+              <a:t>консоль нам виведить меню касира у якому користувач може оформити покупку, переглянути всі товари і пошук товарів.</a:t>
+            </a:r>
+            <a:r>
+              <a:rPr lang="uk-UA" sz="2400" dirty="0">
+                <a:solidFill>
+                  <a:schemeClr val="tx1"/>
+                </a:solidFill>
+              </a:rPr>
+              <a:t> Також у користувача є окремий пункт з описом як працювати з програмаю.</a:t>
+            </a:r>
+            <a:endParaRPr lang="uk-UA" sz="2400" dirty="0">
+              <a:solidFill>
+                <a:schemeClr val="tx1"/>
+              </a:solidFill>
+            </a:endParaRPr>
+          </a:p>
+          <a:p>
+            <a:pPr algn="l"/>
+            <a:endParaRPr lang="uk-UA" sz="2400" dirty="0">
+              <a:solidFill>
+                <a:schemeClr val="tx1"/>
+              </a:solidFill>
+            </a:endParaRPr>
+          </a:p>
+          <a:p>
+            <a:pPr algn="l"/>
+            <a:r>
+              <a:rPr lang="uk-UA" sz="2400" dirty="0">
+                <a:solidFill>
+                  <a:schemeClr val="tx1"/>
+                </a:solidFill>
+              </a:rPr>
+              <a:t>  </a:t>
+            </a:r>
+            <a:endParaRPr lang="ru-RU" dirty="0"/>
+          </a:p>
+        </p:txBody>
+      </p:sp>
     </p:spTree>
   </p:cSld>
   <p:clrMapOvr>

--- a/documentation/Презентація.pptx
+++ b/documentation/Презентація.pptx
@@ -5,25 +5,28 @@
     <p:sldMasterId id="2147483648" r:id="rId1"/>
   </p:sldMasterIdLst>
   <p:notesMasterIdLst>
-    <p:notesMasterId r:id="rId15"/>
+    <p:notesMasterId r:id="rId18"/>
   </p:notesMasterIdLst>
   <p:sldIdLst>
     <p:sldId id="256" r:id="rId3"/>
     <p:sldId id="257" r:id="rId4"/>
-    <p:sldId id="258" r:id="rId5"/>
-    <p:sldId id="259" r:id="rId6"/>
-    <p:sldId id="260" r:id="rId7"/>
-    <p:sldId id="261" r:id="rId8"/>
-    <p:sldId id="271" r:id="rId9"/>
-    <p:sldId id="262" r:id="rId10"/>
-    <p:sldId id="263" r:id="rId11"/>
-    <p:sldId id="264" r:id="rId12"/>
-    <p:sldId id="265" r:id="rId13"/>
-    <p:sldId id="266" r:id="rId14"/>
-    <p:sldId id="267" r:id="rId16"/>
-    <p:sldId id="270" r:id="rId17"/>
-    <p:sldId id="268" r:id="rId18"/>
-    <p:sldId id="269" r:id="rId19"/>
+    <p:sldId id="272" r:id="rId5"/>
+    <p:sldId id="273" r:id="rId6"/>
+    <p:sldId id="274" r:id="rId7"/>
+    <p:sldId id="275" r:id="rId8"/>
+    <p:sldId id="276" r:id="rId9"/>
+    <p:sldId id="260" r:id="rId10"/>
+    <p:sldId id="261" r:id="rId11"/>
+    <p:sldId id="271" r:id="rId12"/>
+    <p:sldId id="259" r:id="rId13"/>
+    <p:sldId id="258" r:id="rId14"/>
+    <p:sldId id="264" r:id="rId15"/>
+    <p:sldId id="265" r:id="rId16"/>
+    <p:sldId id="266" r:id="rId17"/>
+    <p:sldId id="267" r:id="rId19"/>
+    <p:sldId id="270" r:id="rId20"/>
+    <p:sldId id="268" r:id="rId21"/>
+    <p:sldId id="269" r:id="rId22"/>
   </p:sldIdLst>
   <p:sldSz cx="9144000" cy="6858000" type="screen4x3"/>
   <p:notesSz cx="6858000" cy="9144000"/>
@@ -3730,7 +3733,7 @@
                   <a:schemeClr val="tx1"/>
                 </a:solidFill>
               </a:rPr>
-              <a:t>вець</a:t>
+              <a:t>в</a:t>
             </a:r>
             <a:r>
               <a:rPr lang="en-US" sz="4400" dirty="0">
@@ -3777,108 +3780,67 @@
         <p:cNvGrpSpPr/>
         <p:nvPr/>
       </p:nvGrpSpPr>
-      <p:grpSpPr>
-        <a:xfrm>
-          <a:off x="0" y="0"/>
-          <a:ext cx="0" cy="0"/>
-          <a:chOff x="0" y="0"/>
-          <a:chExt cx="0" cy="0"/>
-        </a:xfrm>
-      </p:grpSpPr>
-      <p:sp>
-        <p:nvSpPr>
-          <p:cNvPr id="2" name="Заголовок 1"/>
-          <p:cNvSpPr>
-            <a:spLocks noGrp="1"/>
-          </p:cNvSpPr>
-          <p:nvPr>
-            <p:ph type="title"/>
-          </p:nvPr>
-        </p:nvSpPr>
-        <p:spPr>
-          <a:xfrm>
-            <a:off x="395536" y="692696"/>
-            <a:ext cx="8229600" cy="1143000"/>
+      <p:grpSpPr/>
+      <p:sp>
+        <p:nvSpPr>
+          <p:cNvPr id="3" name="Content Placeholder 2"/>
+          <p:cNvSpPr>
+            <a:spLocks noGrp="1"/>
+          </p:cNvSpPr>
+          <p:nvPr>
+            <p:ph sz="half" idx="1"/>
+          </p:nvPr>
+        </p:nvSpPr>
+        <p:spPr>
+          <a:xfrm>
+            <a:off x="2287270" y="332740"/>
+            <a:ext cx="3991610" cy="812800"/>
           </a:xfrm>
         </p:spPr>
         <p:txBody>
           <a:bodyPr>
-            <a:normAutofit fontScale="90000"/>
+            <a:normAutofit lnSpcReduction="10000"/>
           </a:bodyPr>
-          <a:lstStyle/>
-          <a:p>
-            <a:r>
-              <a:rPr lang="ru-RU" b="1" dirty="0" err="1"/>
-              <a:t>Опис</a:t>
-            </a:r>
-            <a:r>
-              <a:rPr lang="ru-RU" b="1" dirty="0"/>
-              <a:t> </a:t>
-            </a:r>
-            <a:r>
-              <a:rPr lang="ru-RU" b="1" dirty="0" err="1"/>
-              <a:t>користувацького</a:t>
-            </a:r>
-            <a:r>
-              <a:rPr lang="ru-RU" b="1" dirty="0"/>
-              <a:t> </a:t>
-            </a:r>
-            <a:r>
-              <a:rPr lang="ru-RU" b="1" dirty="0" err="1"/>
-              <a:t>інтерфейсу</a:t>
-            </a:r>
-            <a:br>
-              <a:rPr lang="ru-RU" dirty="0"/>
-            </a:br>
-            <a:br>
-              <a:rPr lang="ru-RU" dirty="0"/>
-            </a:br>
-            <a:endParaRPr lang="ru-RU" dirty="0"/>
-          </a:p>
-        </p:txBody>
-      </p:sp>
-      <p:sp>
-        <p:nvSpPr>
-          <p:cNvPr id="6" name="TextBox 5"/>
-          <p:cNvSpPr txBox="1"/>
-          <p:nvPr/>
-        </p:nvSpPr>
-        <p:spPr>
-          <a:xfrm>
-            <a:off x="2843599" y="4077335"/>
-            <a:ext cx="4038600" cy="645160"/>
-          </a:xfrm>
-          <a:prstGeom prst="rect">
-            <a:avLst/>
-          </a:prstGeom>
-          <a:noFill/>
-        </p:spPr>
-        <p:txBody>
-          <a:bodyPr wrap="square" rtlCol="0">
-            <a:spAutoFit/>
-          </a:bodyPr>
-          <a:lstStyle/>
-          <a:p>
-            <a:endParaRPr lang="uk-UA" dirty="0"/>
-          </a:p>
-          <a:p>
-            <a:r>
-              <a:rPr lang="uk-UA" dirty="0"/>
-              <a:t>Рисунок 5 – меню адміністратора</a:t>
-            </a:r>
-            <a:endParaRPr lang="uk-UA" dirty="0"/>
+          <a:p>
+            <a:r>
+              <a:rPr lang="en-US" altLang="en-US" sz="1600"/>
+              <a:t>Рисунок</a:t>
+            </a:r>
+            <a:r>
+              <a:rPr lang="en-US" altLang="en-US" sz="1600"/>
+              <a:t> </a:t>
+            </a:r>
+            <a:r>
+              <a:rPr lang="en-US" altLang="en-US" sz="1600"/>
+              <a:t>5</a:t>
+            </a:r>
+            <a:r>
+              <a:rPr lang="en-US" altLang="en-US" sz="1600"/>
+              <a:t> </a:t>
+            </a:r>
+            <a:r>
+              <a:rPr lang="en-US" altLang="en-US" sz="1600"/>
+              <a:t>– Узагальнена блок-схема алгоритму перегляду доданих об’єктів та їх</a:t>
+            </a:r>
+            <a:r>
+              <a:rPr lang="en-US" altLang="en-US" sz="1600"/>
+              <a:t> </a:t>
+            </a:r>
+            <a:r>
+              <a:rPr lang="en-US" altLang="en-US" sz="1600"/>
+              <a:t>пошуку</a:t>
+            </a:r>
+            <a:endParaRPr lang="en-US" altLang="en-US" sz="1600"/>
           </a:p>
         </p:txBody>
       </p:sp>
       <p:pic>
         <p:nvPicPr>
-          <p:cNvPr id="4" name="Content Placeholder 3"/>
+          <p:cNvPr id="5" name="Picture 1"/>
           <p:cNvPicPr>
             <a:picLocks noChangeAspect="1"/>
           </p:cNvPicPr>
-          <p:nvPr>
-            <p:ph sz="half" idx="1"/>
-          </p:nvPr>
+          <p:nvPr/>
         </p:nvPicPr>
         <p:blipFill>
           <a:blip r:embed="rId1"/>
@@ -3888,12 +3850,16 @@
         </p:blipFill>
         <p:spPr>
           <a:xfrm>
-            <a:off x="3134995" y="1268730"/>
-            <a:ext cx="2880360" cy="2644140"/>
+            <a:off x="2915920" y="1145540"/>
+            <a:ext cx="3024505" cy="5497830"/>
           </a:xfrm>
           <a:prstGeom prst="rect">
             <a:avLst/>
           </a:prstGeom>
+          <a:noFill/>
+          <a:ln>
+            <a:noFill/>
+          </a:ln>
         </p:spPr>
       </p:pic>
     </p:spTree>
@@ -3923,6 +3889,1483 @@
       </p:grpSpPr>
       <p:sp>
         <p:nvSpPr>
+          <p:cNvPr id="2" name="Заголовок 1"/>
+          <p:cNvSpPr>
+            <a:spLocks noGrp="1"/>
+          </p:cNvSpPr>
+          <p:nvPr>
+            <p:ph type="ctrTitle"/>
+          </p:nvPr>
+        </p:nvSpPr>
+        <p:spPr>
+          <a:xfrm>
+            <a:off x="683568" y="476672"/>
+            <a:ext cx="7772400" cy="1470025"/>
+          </a:xfrm>
+        </p:spPr>
+        <p:txBody>
+          <a:bodyPr>
+            <a:normAutofit fontScale="90000"/>
+          </a:bodyPr>
+          <a:lstStyle/>
+          <a:p>
+            <a:r>
+              <a:rPr sz="4000" b="1">
+                <a:latin typeface="Calibri" panose="020F0502020204030204"/>
+                <a:sym typeface="+mn-ea"/>
+              </a:rPr>
+              <a:t>Класи бізнес-логіки</a:t>
+            </a:r>
+            <a:br>
+              <a:rPr lang="ru-RU" dirty="0"/>
+            </a:br>
+            <a:br>
+              <a:rPr lang="ru-RU" dirty="0"/>
+            </a:br>
+            <a:endParaRPr lang="ru-RU" dirty="0"/>
+          </a:p>
+        </p:txBody>
+      </p:sp>
+      <p:sp>
+        <p:nvSpPr>
+          <p:cNvPr id="3" name="Подзаголовок 2"/>
+          <p:cNvSpPr>
+            <a:spLocks noGrp="1"/>
+          </p:cNvSpPr>
+          <p:nvPr>
+            <p:ph type="subTitle" idx="1"/>
+          </p:nvPr>
+        </p:nvSpPr>
+        <p:spPr>
+          <a:xfrm>
+            <a:off x="323528" y="980728"/>
+            <a:ext cx="8568952" cy="5688632"/>
+          </a:xfrm>
+        </p:spPr>
+        <p:txBody>
+          <a:bodyPr>
+            <a:normAutofit fontScale="50000"/>
+          </a:bodyPr>
+          <a:lstStyle/>
+          <a:p>
+            <a:pPr marL="457200" lvl="0" indent="-457200" algn="l">
+              <a:buFont typeface="Arial" panose="020B0604020202020204" pitchFamily="34" charset="0"/>
+              <a:buChar char="•"/>
+            </a:pPr>
+            <a:r>
+              <a:rPr lang="en-US" dirty="0">
+                <a:solidFill>
+                  <a:schemeClr val="tx1"/>
+                </a:solidFill>
+              </a:rPr>
+              <a:t>	</a:t>
+            </a:r>
+            <a:r>
+              <a:rPr lang="en-US" altLang="en-US" dirty="0">
+                <a:solidFill>
+                  <a:schemeClr val="tx1"/>
+                </a:solidFill>
+              </a:rPr>
+              <a:t>Product / StoreItem</a:t>
+            </a:r>
+            <a:r>
+              <a:rPr lang="uk-UA" altLang="en-US" dirty="0">
+                <a:solidFill>
+                  <a:schemeClr val="tx1"/>
+                </a:solidFill>
+              </a:rPr>
+              <a:t> </a:t>
+            </a:r>
+            <a:r>
+              <a:rPr lang="en-US" dirty="0">
+                <a:solidFill>
+                  <a:schemeClr val="tx1"/>
+                </a:solidFill>
+                <a:sym typeface="+mn-ea"/>
+              </a:rPr>
+              <a:t>–</a:t>
+            </a:r>
+            <a:r>
+              <a:rPr lang="uk-UA" altLang="en-US" dirty="0">
+                <a:solidFill>
+                  <a:schemeClr val="tx1"/>
+                </a:solidFill>
+                <a:sym typeface="+mn-ea"/>
+              </a:rPr>
+              <a:t> б</a:t>
+            </a:r>
+            <a:r>
+              <a:rPr lang="en-US" altLang="en-US" dirty="0">
+                <a:solidFill>
+                  <a:schemeClr val="tx1"/>
+                </a:solidFill>
+              </a:rPr>
+              <a:t>азова сутність. Моделює одиничний товар на складі</a:t>
+            </a:r>
+            <a:r>
+              <a:rPr lang="uk-UA" dirty="0">
+                <a:solidFill>
+                  <a:schemeClr val="tx1"/>
+                </a:solidFill>
+              </a:rPr>
+              <a:t>.</a:t>
+            </a:r>
+            <a:endParaRPr lang="uk-UA" dirty="0">
+              <a:solidFill>
+                <a:schemeClr val="tx1"/>
+              </a:solidFill>
+            </a:endParaRPr>
+          </a:p>
+          <a:p>
+            <a:pPr marL="457200" lvl="0" indent="-457200" algn="l">
+              <a:buFont typeface="Arial" panose="020B0604020202020204" pitchFamily="34" charset="0"/>
+              <a:buChar char="•"/>
+            </a:pPr>
+            <a:r>
+              <a:rPr lang="uk-UA" dirty="0">
+                <a:solidFill>
+                  <a:schemeClr val="tx1"/>
+                </a:solidFill>
+              </a:rPr>
+              <a:t>	</a:t>
+            </a:r>
+            <a:r>
+              <a:rPr lang="en-US" altLang="en-US" dirty="0">
+                <a:solidFill>
+                  <a:schemeClr val="tx1"/>
+                </a:solidFill>
+              </a:rPr>
+              <a:t>StoreManager</a:t>
+            </a:r>
+            <a:r>
+              <a:rPr lang="en-US" dirty="0">
+                <a:solidFill>
+                  <a:schemeClr val="tx1"/>
+                </a:solidFill>
+              </a:rPr>
+              <a:t> – </a:t>
+            </a:r>
+            <a:r>
+              <a:rPr lang="en-US" altLang="en-US" dirty="0">
+                <a:solidFill>
+                  <a:schemeClr val="tx1"/>
+                </a:solidFill>
+              </a:rPr>
+              <a:t>Керування колекцією товарів. Реалізує бізнес-логіку: CRUD-операції, завантаження/збереження, пошук, сортування та фільтрація.</a:t>
+            </a:r>
+            <a:endParaRPr lang="uk-UA" dirty="0">
+              <a:solidFill>
+                <a:schemeClr val="tx1"/>
+              </a:solidFill>
+            </a:endParaRPr>
+          </a:p>
+          <a:p>
+            <a:pPr marL="457200" lvl="0" indent="-457200" algn="l">
+              <a:buFont typeface="Arial" panose="020B0604020202020204" pitchFamily="34" charset="0"/>
+              <a:buChar char="•"/>
+            </a:pPr>
+            <a:r>
+              <a:rPr lang="uk-UA" dirty="0">
+                <a:solidFill>
+                  <a:schemeClr val="tx1"/>
+                </a:solidFill>
+              </a:rPr>
+              <a:t>	</a:t>
+            </a:r>
+            <a:r>
+              <a:rPr lang="en-US" altLang="en-US" dirty="0">
+                <a:solidFill>
+                  <a:schemeClr val="tx1"/>
+                </a:solidFill>
+              </a:rPr>
+              <a:t>IPrintable</a:t>
+            </a:r>
+            <a:r>
+              <a:rPr lang="en-US" dirty="0">
+                <a:solidFill>
+                  <a:schemeClr val="tx1"/>
+                </a:solidFill>
+              </a:rPr>
+              <a:t> – </a:t>
+            </a:r>
+            <a:r>
+              <a:rPr lang="uk-UA" altLang="en-US" dirty="0">
+                <a:solidFill>
+                  <a:schemeClr val="tx1"/>
+                </a:solidFill>
+              </a:rPr>
+              <a:t>і</a:t>
+            </a:r>
+            <a:r>
+              <a:rPr lang="en-US" altLang="en-US" dirty="0">
+                <a:solidFill>
+                  <a:schemeClr val="tx1"/>
+                </a:solidFill>
+              </a:rPr>
+              <a:t>нтерфейс</a:t>
+            </a:r>
+            <a:r>
+              <a:rPr lang="uk-UA" altLang="en-US" dirty="0">
+                <a:solidFill>
+                  <a:schemeClr val="tx1"/>
+                </a:solidFill>
+              </a:rPr>
+              <a:t>, в</a:t>
+            </a:r>
+            <a:r>
+              <a:rPr lang="en-US" altLang="en-US" dirty="0">
+                <a:solidFill>
+                  <a:schemeClr val="tx1"/>
+                </a:solidFill>
+              </a:rPr>
+              <a:t>изначає контракт для поліморфного виводу та запису в БД.</a:t>
+            </a:r>
+            <a:endParaRPr lang="en-US" altLang="en-US" dirty="0">
+              <a:solidFill>
+                <a:schemeClr val="tx1"/>
+              </a:solidFill>
+            </a:endParaRPr>
+          </a:p>
+          <a:p>
+            <a:pPr marL="457200" lvl="0" indent="-457200" algn="l">
+              <a:buFont typeface="Arial" panose="020B0604020202020204" pitchFamily="34" charset="0"/>
+              <a:buChar char="•"/>
+            </a:pPr>
+            <a:r>
+              <a:rPr lang="uk-UA" dirty="0">
+                <a:solidFill>
+                  <a:schemeClr val="tx1"/>
+                </a:solidFill>
+              </a:rPr>
+              <a:t>	</a:t>
+            </a:r>
+            <a:r>
+              <a:rPr lang="en-US" altLang="en-US" dirty="0">
+                <a:solidFill>
+                  <a:schemeClr val="tx1"/>
+                </a:solidFill>
+              </a:rPr>
+              <a:t>User</a:t>
+            </a:r>
+            <a:r>
+              <a:rPr lang="en-US" dirty="0">
+                <a:solidFill>
+                  <a:schemeClr val="tx1"/>
+                </a:solidFill>
+              </a:rPr>
+              <a:t> – </a:t>
+            </a:r>
+            <a:r>
+              <a:rPr lang="uk-UA" altLang="en-US" dirty="0">
+                <a:solidFill>
+                  <a:schemeClr val="tx1"/>
+                </a:solidFill>
+              </a:rPr>
+              <a:t>б</a:t>
+            </a:r>
+            <a:r>
+              <a:rPr lang="en-US" altLang="en-US" dirty="0">
+                <a:solidFill>
+                  <a:schemeClr val="tx1"/>
+                </a:solidFill>
+              </a:rPr>
+              <a:t>азовий клас користувача</a:t>
+            </a:r>
+            <a:r>
+              <a:rPr lang="uk-UA" altLang="en-US" dirty="0">
+                <a:solidFill>
+                  <a:schemeClr val="tx1"/>
+                </a:solidFill>
+              </a:rPr>
+              <a:t>,</a:t>
+            </a:r>
+            <a:r>
+              <a:rPr lang="en-US" altLang="en-US" dirty="0">
+                <a:solidFill>
+                  <a:schemeClr val="tx1"/>
+                </a:solidFill>
+              </a:rPr>
+              <a:t> </a:t>
+            </a:r>
+            <a:r>
+              <a:rPr lang="uk-UA" altLang="en-US" dirty="0">
+                <a:solidFill>
+                  <a:schemeClr val="tx1"/>
+                </a:solidFill>
+              </a:rPr>
+              <a:t>м</a:t>
+            </a:r>
+            <a:r>
+              <a:rPr lang="en-US" altLang="en-US" dirty="0">
+                <a:solidFill>
+                  <a:schemeClr val="tx1"/>
+                </a:solidFill>
+              </a:rPr>
+              <a:t>істить загальні атрибути та, ймовірно, методи авторизації.</a:t>
+            </a:r>
+            <a:endParaRPr lang="en-US" altLang="en-US" dirty="0">
+              <a:solidFill>
+                <a:schemeClr val="tx1"/>
+              </a:solidFill>
+            </a:endParaRPr>
+          </a:p>
+          <a:p>
+            <a:pPr marL="457200" lvl="0" indent="-457200" algn="l">
+              <a:buFont typeface="Arial" panose="020B0604020202020204" pitchFamily="34" charset="0"/>
+              <a:buChar char="•"/>
+            </a:pPr>
+            <a:r>
+              <a:rPr lang="uk-UA" dirty="0">
+                <a:solidFill>
+                  <a:schemeClr val="tx1"/>
+                </a:solidFill>
+              </a:rPr>
+              <a:t>	</a:t>
+            </a:r>
+            <a:r>
+              <a:rPr lang="en-US" altLang="en-US" dirty="0">
+                <a:solidFill>
+                  <a:schemeClr val="tx1"/>
+                </a:solidFill>
+              </a:rPr>
+              <a:t>Admin / BasicUser</a:t>
+            </a:r>
+            <a:r>
+              <a:rPr lang="en-US" dirty="0">
+                <a:solidFill>
+                  <a:schemeClr val="tx1"/>
+                </a:solidFill>
+              </a:rPr>
+              <a:t> – </a:t>
+            </a:r>
+            <a:r>
+              <a:rPr lang="uk-UA" altLang="en-US" dirty="0">
+                <a:solidFill>
+                  <a:schemeClr val="tx1"/>
+                </a:solidFill>
+              </a:rPr>
+              <a:t>к</a:t>
+            </a:r>
+            <a:r>
+              <a:rPr lang="en-US" altLang="en-US" dirty="0">
+                <a:solidFill>
+                  <a:schemeClr val="tx1"/>
+                </a:solidFill>
+              </a:rPr>
+              <a:t>атегорії користувачів</a:t>
+            </a:r>
+            <a:r>
+              <a:rPr lang="uk-UA" altLang="en-US" dirty="0">
+                <a:solidFill>
+                  <a:schemeClr val="tx1"/>
+                </a:solidFill>
+              </a:rPr>
+              <a:t>,</a:t>
+            </a:r>
+            <a:r>
+              <a:rPr lang="en-US" altLang="en-US" dirty="0">
+                <a:solidFill>
+                  <a:schemeClr val="tx1"/>
+                </a:solidFill>
+              </a:rPr>
+              <a:t> </a:t>
+            </a:r>
+            <a:r>
+              <a:rPr lang="uk-UA" altLang="en-US" dirty="0">
+                <a:solidFill>
+                  <a:schemeClr val="tx1"/>
+                </a:solidFill>
+              </a:rPr>
+              <a:t>в</a:t>
+            </a:r>
+            <a:r>
+              <a:rPr lang="en-US" altLang="en-US" dirty="0">
+                <a:solidFill>
+                  <a:schemeClr val="tx1"/>
+                </a:solidFill>
+              </a:rPr>
+              <a:t>изначають різні рівні прав доступу до функціоналу програми (наприклад, BasicUser </a:t>
+            </a:r>
+            <a:r>
+              <a:rPr lang="en-US" dirty="0">
+                <a:solidFill>
+                  <a:schemeClr val="tx1"/>
+                </a:solidFill>
+                <a:sym typeface="+mn-ea"/>
+              </a:rPr>
+              <a:t> – </a:t>
+            </a:r>
+            <a:r>
+              <a:rPr lang="en-US" altLang="en-US" dirty="0">
+                <a:solidFill>
+                  <a:schemeClr val="tx1"/>
+                </a:solidFill>
+              </a:rPr>
+              <a:t> Касир, Admin </a:t>
+            </a:r>
+            <a:r>
+              <a:rPr lang="en-US" dirty="0">
+                <a:solidFill>
+                  <a:schemeClr val="tx1"/>
+                </a:solidFill>
+                <a:sym typeface="+mn-ea"/>
+              </a:rPr>
+              <a:t> – </a:t>
+            </a:r>
+            <a:r>
+              <a:rPr lang="en-US" altLang="en-US" dirty="0">
+                <a:solidFill>
+                  <a:schemeClr val="tx1"/>
+                </a:solidFill>
+              </a:rPr>
+              <a:t> Управління).</a:t>
+            </a:r>
+            <a:endParaRPr lang="en-US" altLang="en-US" dirty="0">
+              <a:solidFill>
+                <a:schemeClr val="tx1"/>
+              </a:solidFill>
+            </a:endParaRPr>
+          </a:p>
+          <a:p>
+            <a:pPr marL="457200" lvl="0" indent="-457200" algn="l">
+              <a:buFont typeface="Arial" panose="020B0604020202020204" pitchFamily="34" charset="0"/>
+              <a:buChar char="•"/>
+            </a:pPr>
+            <a:r>
+              <a:rPr lang="en-US" altLang="en-US" dirty="0">
+                <a:solidFill>
+                  <a:schemeClr val="tx1"/>
+                </a:solidFill>
+              </a:rPr>
+              <a:t>AuthManager </a:t>
+            </a:r>
+            <a:r>
+              <a:rPr lang="en-US" dirty="0">
+                <a:solidFill>
+                  <a:schemeClr val="tx1"/>
+                </a:solidFill>
+                <a:sym typeface="+mn-ea"/>
+              </a:rPr>
+              <a:t> – </a:t>
+            </a:r>
+            <a:r>
+              <a:rPr lang="uk-UA" altLang="en-US" dirty="0">
+                <a:solidFill>
+                  <a:schemeClr val="tx1"/>
+                </a:solidFill>
+                <a:sym typeface="+mn-ea"/>
+              </a:rPr>
+              <a:t>у</a:t>
+            </a:r>
+            <a:r>
+              <a:rPr lang="en-US" altLang="en-US" dirty="0">
+                <a:solidFill>
+                  <a:schemeClr val="tx1"/>
+                </a:solidFill>
+              </a:rPr>
+              <a:t>правління авторизацією</a:t>
+            </a:r>
+            <a:r>
+              <a:rPr lang="uk-UA" altLang="en-US" dirty="0">
+                <a:solidFill>
+                  <a:schemeClr val="tx1"/>
+                </a:solidFill>
+              </a:rPr>
+              <a:t>,</a:t>
+            </a:r>
+            <a:r>
+              <a:rPr lang="en-US" altLang="en-US" dirty="0">
+                <a:solidFill>
+                  <a:schemeClr val="tx1"/>
+                </a:solidFill>
+              </a:rPr>
+              <a:t> </a:t>
+            </a:r>
+            <a:r>
+              <a:rPr lang="uk-UA" altLang="en-US" dirty="0">
+                <a:solidFill>
+                  <a:schemeClr val="tx1"/>
+                </a:solidFill>
+              </a:rPr>
+              <a:t>к</a:t>
+            </a:r>
+            <a:r>
+              <a:rPr lang="en-US" altLang="en-US" dirty="0">
+                <a:solidFill>
+                  <a:schemeClr val="tx1"/>
+                </a:solidFill>
+              </a:rPr>
+              <a:t>ерує процесом входу, перевіряє облікові дані та визначає права доступу користувача.</a:t>
+            </a:r>
+            <a:endParaRPr lang="en-US" altLang="en-US" dirty="0">
+              <a:solidFill>
+                <a:schemeClr val="tx1"/>
+              </a:solidFill>
+            </a:endParaRPr>
+          </a:p>
+          <a:p>
+            <a:pPr marL="457200" lvl="0" indent="-457200" algn="l">
+              <a:buFont typeface="Arial" panose="020B0604020202020204" pitchFamily="34" charset="0"/>
+              <a:buChar char="•"/>
+            </a:pPr>
+            <a:r>
+              <a:rPr lang="en-US" altLang="en-US" dirty="0">
+                <a:solidFill>
+                  <a:schemeClr val="tx1"/>
+                </a:solidFill>
+              </a:rPr>
+              <a:t>Receipt</a:t>
+            </a:r>
+            <a:r>
+              <a:rPr lang="uk-UA" altLang="en-US" dirty="0">
+                <a:solidFill>
+                  <a:schemeClr val="tx1"/>
+                </a:solidFill>
+              </a:rPr>
+              <a:t> </a:t>
+            </a:r>
+            <a:r>
+              <a:rPr lang="en-US" dirty="0">
+                <a:solidFill>
+                  <a:schemeClr val="tx1"/>
+                </a:solidFill>
+                <a:sym typeface="+mn-ea"/>
+              </a:rPr>
+              <a:t> –</a:t>
+            </a:r>
+            <a:r>
+              <a:rPr lang="uk-UA" altLang="en-US" dirty="0">
+                <a:solidFill>
+                  <a:schemeClr val="tx1"/>
+                </a:solidFill>
+                <a:sym typeface="+mn-ea"/>
+              </a:rPr>
+              <a:t> ф</a:t>
+            </a:r>
+            <a:r>
+              <a:rPr lang="en-US" altLang="en-US" dirty="0">
+                <a:solidFill>
+                  <a:schemeClr val="tx1"/>
+                </a:solidFill>
+                <a:sym typeface="+mn-ea"/>
+              </a:rPr>
+              <a:t>іскальний чек / Квитанція</a:t>
+            </a:r>
+            <a:r>
+              <a:rPr lang="uk-UA" altLang="en-US" dirty="0">
+                <a:solidFill>
+                  <a:schemeClr val="tx1"/>
+                </a:solidFill>
+                <a:sym typeface="+mn-ea"/>
+              </a:rPr>
+              <a:t>,</a:t>
+            </a:r>
+            <a:r>
+              <a:rPr lang="en-US" altLang="en-US" dirty="0">
+                <a:solidFill>
+                  <a:schemeClr val="tx1"/>
+                </a:solidFill>
+                <a:sym typeface="+mn-ea"/>
+              </a:rPr>
+              <a:t> </a:t>
+            </a:r>
+            <a:r>
+              <a:rPr lang="uk-UA" altLang="en-US" dirty="0">
+                <a:solidFill>
+                  <a:schemeClr val="tx1"/>
+                </a:solidFill>
+                <a:sym typeface="+mn-ea"/>
+              </a:rPr>
+              <a:t>к</a:t>
+            </a:r>
+            <a:r>
+              <a:rPr lang="en-US" altLang="en-US" dirty="0">
+                <a:solidFill>
+                  <a:schemeClr val="tx1"/>
+                </a:solidFill>
+                <a:sym typeface="+mn-ea"/>
+              </a:rPr>
+              <a:t>лас для моделювання одиниці продажу (транзакції) та фіксації куплених товарів.</a:t>
+            </a:r>
+            <a:endParaRPr lang="en-US" altLang="en-US" dirty="0">
+              <a:solidFill>
+                <a:schemeClr val="tx1"/>
+              </a:solidFill>
+              <a:sym typeface="+mn-ea"/>
+            </a:endParaRPr>
+          </a:p>
+          <a:p>
+            <a:pPr marL="457200" lvl="0" indent="-457200" algn="l">
+              <a:buFont typeface="Arial" panose="020B0604020202020204" pitchFamily="34" charset="0"/>
+              <a:buChar char="•"/>
+            </a:pPr>
+            <a:r>
+              <a:rPr lang="en-US" altLang="en-US" dirty="0">
+                <a:solidFill>
+                  <a:schemeClr val="tx1"/>
+                </a:solidFill>
+                <a:sym typeface="+mn-ea"/>
+              </a:rPr>
+              <a:t>SaleProcessor</a:t>
+            </a:r>
+            <a:r>
+              <a:rPr lang="uk-UA" altLang="en-US" dirty="0">
+                <a:solidFill>
+                  <a:schemeClr val="tx1"/>
+                </a:solidFill>
+                <a:sym typeface="+mn-ea"/>
+              </a:rPr>
+              <a:t> </a:t>
+            </a:r>
+            <a:r>
+              <a:rPr lang="en-US" dirty="0">
+                <a:solidFill>
+                  <a:schemeClr val="tx1"/>
+                </a:solidFill>
+                <a:sym typeface="+mn-ea"/>
+              </a:rPr>
+              <a:t>–</a:t>
+            </a:r>
+            <a:r>
+              <a:rPr lang="uk-UA" altLang="en-US" dirty="0">
+                <a:solidFill>
+                  <a:schemeClr val="tx1"/>
+                </a:solidFill>
+                <a:sym typeface="+mn-ea"/>
+              </a:rPr>
+              <a:t> </a:t>
+            </a:r>
+            <a:r>
+              <a:rPr lang="en-US" altLang="en-US" dirty="0">
+                <a:solidFill>
+                  <a:schemeClr val="tx1"/>
+                </a:solidFill>
+                <a:sym typeface="+mn-ea"/>
+              </a:rPr>
+              <a:t>Обробка продажів</a:t>
+            </a:r>
+            <a:r>
+              <a:rPr lang="uk-UA" altLang="en-US" dirty="0">
+                <a:solidFill>
+                  <a:schemeClr val="tx1"/>
+                </a:solidFill>
+                <a:sym typeface="+mn-ea"/>
+              </a:rPr>
+              <a:t>,</a:t>
+            </a:r>
+            <a:r>
+              <a:rPr lang="en-US" altLang="en-US" dirty="0">
+                <a:solidFill>
+                  <a:schemeClr val="tx1"/>
+                </a:solidFill>
+                <a:sym typeface="+mn-ea"/>
+              </a:rPr>
+              <a:t> </a:t>
+            </a:r>
+            <a:r>
+              <a:rPr lang="uk-UA" altLang="en-US" dirty="0">
+                <a:solidFill>
+                  <a:schemeClr val="tx1"/>
+                </a:solidFill>
+                <a:sym typeface="+mn-ea"/>
+              </a:rPr>
+              <a:t>м</a:t>
+            </a:r>
+            <a:r>
+              <a:rPr lang="en-US" altLang="en-US" dirty="0">
+                <a:solidFill>
+                  <a:schemeClr val="tx1"/>
+                </a:solidFill>
+                <a:sym typeface="+mn-ea"/>
+              </a:rPr>
+              <a:t>істить логіку оформлення покупки (продажу) та керує створенням об'єктів Receipt</a:t>
+            </a:r>
+            <a:r>
+              <a:rPr lang="uk-UA" altLang="en-US" dirty="0">
+                <a:solidFill>
+                  <a:schemeClr val="tx1"/>
+                </a:solidFill>
+                <a:sym typeface="+mn-ea"/>
+              </a:rPr>
+              <a:t>.</a:t>
+            </a:r>
+            <a:endParaRPr lang="en-US" altLang="en-US" dirty="0">
+              <a:solidFill>
+                <a:schemeClr val="tx1"/>
+              </a:solidFill>
+              <a:sym typeface="+mn-ea"/>
+            </a:endParaRPr>
+          </a:p>
+          <a:p>
+            <a:pPr marL="457200" lvl="0" indent="-457200" algn="l">
+              <a:buFont typeface="Arial" panose="020B0604020202020204" pitchFamily="34" charset="0"/>
+              <a:buChar char="•"/>
+            </a:pPr>
+            <a:r>
+              <a:rPr lang="en-US" altLang="en-US" dirty="0">
+                <a:solidFill>
+                  <a:schemeClr val="tx1"/>
+                </a:solidFill>
+                <a:sym typeface="+mn-ea"/>
+              </a:rPr>
+              <a:t>Logger</a:t>
+            </a:r>
+            <a:r>
+              <a:rPr lang="uk-UA" altLang="en-US" dirty="0">
+                <a:solidFill>
+                  <a:schemeClr val="tx1"/>
+                </a:solidFill>
+                <a:sym typeface="+mn-ea"/>
+              </a:rPr>
+              <a:t> </a:t>
+            </a:r>
+            <a:r>
+              <a:rPr lang="en-US" dirty="0">
+                <a:solidFill>
+                  <a:schemeClr val="tx1"/>
+                </a:solidFill>
+                <a:sym typeface="+mn-ea"/>
+              </a:rPr>
+              <a:t> –</a:t>
+            </a:r>
+            <a:r>
+              <a:rPr lang="uk-UA" altLang="en-US" dirty="0">
+                <a:solidFill>
+                  <a:schemeClr val="tx1"/>
+                </a:solidFill>
+                <a:sym typeface="+mn-ea"/>
+              </a:rPr>
+              <a:t> </a:t>
+            </a:r>
+            <a:r>
+              <a:rPr lang="en-US" altLang="en-US" dirty="0">
+                <a:solidFill>
+                  <a:schemeClr val="tx1"/>
+                </a:solidFill>
+                <a:sym typeface="+mn-ea"/>
+              </a:rPr>
+              <a:t>Журналювання подій</a:t>
+            </a:r>
+            <a:r>
+              <a:rPr lang="uk-UA" altLang="en-US" dirty="0">
+                <a:solidFill>
+                  <a:schemeClr val="tx1"/>
+                </a:solidFill>
+                <a:sym typeface="+mn-ea"/>
+              </a:rPr>
+              <a:t>, в</a:t>
+            </a:r>
+            <a:r>
+              <a:rPr lang="en-US" altLang="en-US" dirty="0">
+                <a:solidFill>
+                  <a:schemeClr val="tx1"/>
+                </a:solidFill>
+                <a:sym typeface="+mn-ea"/>
+              </a:rPr>
+              <a:t>икористовується для запису важливих операцій або помилок програми</a:t>
+            </a:r>
+            <a:r>
+              <a:rPr lang="uk-UA" altLang="en-US" dirty="0">
+                <a:solidFill>
+                  <a:schemeClr val="tx1"/>
+                </a:solidFill>
+                <a:sym typeface="+mn-ea"/>
+              </a:rPr>
+              <a:t>.</a:t>
+            </a:r>
+            <a:endParaRPr lang="uk-UA" altLang="en-US" dirty="0">
+              <a:solidFill>
+                <a:schemeClr val="tx1"/>
+              </a:solidFill>
+              <a:sym typeface="+mn-ea"/>
+            </a:endParaRPr>
+          </a:p>
+          <a:p>
+            <a:pPr marL="457200" lvl="0" indent="-457200" algn="l">
+              <a:buFont typeface="Arial" panose="020B0604020202020204" pitchFamily="34" charset="0"/>
+              <a:buChar char="•"/>
+            </a:pPr>
+            <a:r>
+              <a:rPr lang="en-US" altLang="en-US" dirty="0">
+                <a:solidFill>
+                  <a:schemeClr val="tx1"/>
+                </a:solidFill>
+                <a:sym typeface="+mn-ea"/>
+              </a:rPr>
+              <a:t>Configuration</a:t>
+            </a:r>
+            <a:r>
+              <a:rPr lang="uk-UA" altLang="en-US" dirty="0">
+                <a:solidFill>
+                  <a:schemeClr val="tx1"/>
+                </a:solidFill>
+                <a:sym typeface="+mn-ea"/>
+              </a:rPr>
+              <a:t> </a:t>
+            </a:r>
+            <a:r>
+              <a:rPr lang="en-US" dirty="0">
+                <a:solidFill>
+                  <a:schemeClr val="tx1"/>
+                </a:solidFill>
+                <a:sym typeface="+mn-ea"/>
+              </a:rPr>
+              <a:t> –</a:t>
+            </a:r>
+            <a:r>
+              <a:rPr lang="uk-UA" altLang="en-US" dirty="0">
+                <a:solidFill>
+                  <a:schemeClr val="tx1"/>
+                </a:solidFill>
+                <a:sym typeface="+mn-ea"/>
+              </a:rPr>
+              <a:t> </a:t>
+            </a:r>
+            <a:r>
+              <a:rPr lang="en-US" altLang="en-US" dirty="0">
+                <a:solidFill>
+                  <a:schemeClr val="tx1"/>
+                </a:solidFill>
+                <a:sym typeface="+mn-ea"/>
+              </a:rPr>
+              <a:t>Налаштування програми</a:t>
+            </a:r>
+            <a:r>
+              <a:rPr lang="uk-UA" altLang="en-US" dirty="0">
+                <a:solidFill>
+                  <a:schemeClr val="tx1"/>
+                </a:solidFill>
+                <a:sym typeface="+mn-ea"/>
+              </a:rPr>
+              <a:t>,</a:t>
+            </a:r>
+            <a:r>
+              <a:rPr lang="en-US" altLang="en-US" dirty="0">
+                <a:solidFill>
+                  <a:schemeClr val="tx1"/>
+                </a:solidFill>
+                <a:sym typeface="+mn-ea"/>
+              </a:rPr>
+              <a:t> </a:t>
+            </a:r>
+            <a:r>
+              <a:rPr lang="uk-UA" altLang="en-US" dirty="0">
+                <a:solidFill>
+                  <a:schemeClr val="tx1"/>
+                </a:solidFill>
+                <a:sym typeface="+mn-ea"/>
+              </a:rPr>
+              <a:t>м</a:t>
+            </a:r>
+            <a:r>
+              <a:rPr lang="en-US" altLang="en-US" dirty="0">
+                <a:solidFill>
+                  <a:schemeClr val="tx1"/>
+                </a:solidFill>
+                <a:sym typeface="+mn-ea"/>
+              </a:rPr>
+              <a:t>істить конфігураційні параметри, які можуть бути універсальними для Windows та Linux</a:t>
+            </a:r>
+            <a:r>
+              <a:rPr lang="uk-UA" altLang="en-US" dirty="0">
+                <a:solidFill>
+                  <a:schemeClr val="tx1"/>
+                </a:solidFill>
+                <a:sym typeface="+mn-ea"/>
+              </a:rPr>
+              <a:t>.</a:t>
+            </a:r>
+            <a:endParaRPr lang="uk-UA" altLang="en-US" dirty="0">
+              <a:solidFill>
+                <a:schemeClr val="tx1"/>
+              </a:solidFill>
+              <a:sym typeface="+mn-ea"/>
+            </a:endParaRPr>
+          </a:p>
+          <a:p>
+            <a:pPr marL="457200" lvl="0" indent="-457200" algn="l">
+              <a:buFont typeface="Arial" panose="020B0604020202020204" pitchFamily="34" charset="0"/>
+              <a:buChar char="•"/>
+            </a:pPr>
+            <a:r>
+              <a:rPr lang="en-US" altLang="en-US" dirty="0">
+                <a:solidFill>
+                  <a:schemeClr val="tx1"/>
+                </a:solidFill>
+                <a:sym typeface="+mn-ea"/>
+              </a:rPr>
+              <a:t>main.cpp</a:t>
+            </a:r>
+            <a:r>
+              <a:rPr lang="uk-UA" altLang="en-US" dirty="0">
+                <a:solidFill>
+                  <a:schemeClr val="tx1"/>
+                </a:solidFill>
+                <a:sym typeface="+mn-ea"/>
+              </a:rPr>
+              <a:t> </a:t>
+            </a:r>
+            <a:r>
+              <a:rPr lang="en-US" dirty="0">
+                <a:solidFill>
+                  <a:schemeClr val="tx1"/>
+                </a:solidFill>
+                <a:sym typeface="+mn-ea"/>
+              </a:rPr>
+              <a:t>–</a:t>
+            </a:r>
+            <a:r>
+              <a:rPr lang="uk-UA" altLang="en-US" dirty="0">
+                <a:solidFill>
+                  <a:schemeClr val="tx1"/>
+                </a:solidFill>
+                <a:sym typeface="+mn-ea"/>
+              </a:rPr>
+              <a:t> </a:t>
+            </a:r>
+            <a:r>
+              <a:rPr lang="en-US" altLang="en-US" dirty="0">
+                <a:solidFill>
+                  <a:schemeClr val="tx1"/>
+                </a:solidFill>
+                <a:sym typeface="+mn-ea"/>
+              </a:rPr>
+              <a:t>Точка входу</a:t>
+            </a:r>
+            <a:r>
+              <a:rPr lang="uk-UA" altLang="en-US" dirty="0">
+                <a:solidFill>
+                  <a:schemeClr val="tx1"/>
+                </a:solidFill>
+                <a:sym typeface="+mn-ea"/>
+              </a:rPr>
+              <a:t>,</a:t>
+            </a:r>
+            <a:r>
+              <a:rPr lang="en-US" altLang="en-US" dirty="0">
+                <a:solidFill>
+                  <a:schemeClr val="tx1"/>
+                </a:solidFill>
+                <a:sym typeface="+mn-ea"/>
+              </a:rPr>
+              <a:t> </a:t>
+            </a:r>
+            <a:r>
+              <a:rPr lang="uk-UA" altLang="en-US" dirty="0">
+                <a:solidFill>
+                  <a:schemeClr val="tx1"/>
+                </a:solidFill>
+                <a:sym typeface="+mn-ea"/>
+              </a:rPr>
+              <a:t>і</a:t>
+            </a:r>
+            <a:r>
+              <a:rPr lang="en-US" altLang="en-US" dirty="0">
+                <a:solidFill>
+                  <a:schemeClr val="tx1"/>
+                </a:solidFill>
+                <a:sym typeface="+mn-ea"/>
+              </a:rPr>
+              <a:t>ніціалізує програму, завантажує дані, запускає головне меню та обробляє цикл роботи.</a:t>
+            </a:r>
+            <a:endParaRPr lang="en-US" altLang="en-US" dirty="0">
+              <a:solidFill>
+                <a:schemeClr val="tx1"/>
+              </a:solidFill>
+              <a:sym typeface="+mn-ea"/>
+            </a:endParaRPr>
+          </a:p>
+        </p:txBody>
+      </p:sp>
+    </p:spTree>
+  </p:cSld>
+  <p:clrMapOvr>
+    <a:masterClrMapping/>
+  </p:clrMapOvr>
+</p:sld>
+</file>
+
+<file path=ppt/slides/slide12.xml><?xml version="1.0" encoding="utf-8"?>
+<p:sld xmlns:a="http://schemas.openxmlformats.org/drawingml/2006/main" xmlns:r="http://schemas.openxmlformats.org/officeDocument/2006/relationships" xmlns:p="http://schemas.openxmlformats.org/presentationml/2006/main">
+  <p:cSld>
+    <p:spTree>
+      <p:nvGrpSpPr>
+        <p:cNvPr id="1" name=""/>
+        <p:cNvGrpSpPr/>
+        <p:nvPr/>
+      </p:nvGrpSpPr>
+      <p:grpSpPr>
+        <a:xfrm>
+          <a:off x="0" y="0"/>
+          <a:ext cx="0" cy="0"/>
+          <a:chOff x="0" y="0"/>
+          <a:chExt cx="0" cy="0"/>
+        </a:xfrm>
+      </p:grpSpPr>
+      <p:sp>
+        <p:nvSpPr>
+          <p:cNvPr id="2" name="Заголовок 1"/>
+          <p:cNvSpPr>
+            <a:spLocks noGrp="1"/>
+          </p:cNvSpPr>
+          <p:nvPr>
+            <p:ph type="ctrTitle"/>
+          </p:nvPr>
+        </p:nvSpPr>
+        <p:spPr>
+          <a:xfrm>
+            <a:off x="395605" y="1052830"/>
+            <a:ext cx="7780655" cy="756920"/>
+          </a:xfrm>
+        </p:spPr>
+        <p:txBody>
+          <a:bodyPr>
+            <a:normAutofit fontScale="90000"/>
+          </a:bodyPr>
+          <a:lstStyle/>
+          <a:p>
+            <a:r>
+              <a:rPr b="1">
+                <a:latin typeface="Calibri" panose="020F0502020204030204"/>
+                <a:sym typeface="+mn-ea"/>
+              </a:rPr>
+              <a:t>Фу</a:t>
+            </a:r>
+            <a:r>
+              <a:rPr sz="4000" b="1">
+                <a:latin typeface="Calibri" panose="020F0502020204030204"/>
+                <a:sym typeface="+mn-ea"/>
+              </a:rPr>
+              <a:t>нкції </a:t>
+            </a:r>
+            <a:r>
+              <a:rPr b="1">
+                <a:latin typeface="Calibri" panose="020F0502020204030204"/>
+                <a:sym typeface="+mn-ea"/>
+              </a:rPr>
+              <a:t>програми</a:t>
+            </a:r>
+            <a:br>
+              <a:rPr lang="ru-RU" dirty="0"/>
+            </a:br>
+            <a:br>
+              <a:rPr lang="ru-RU" dirty="0"/>
+            </a:br>
+            <a:endParaRPr lang="ru-RU" dirty="0"/>
+          </a:p>
+        </p:txBody>
+      </p:sp>
+      <p:sp>
+        <p:nvSpPr>
+          <p:cNvPr id="3" name="Подзаголовок 2"/>
+          <p:cNvSpPr>
+            <a:spLocks noGrp="1"/>
+          </p:cNvSpPr>
+          <p:nvPr>
+            <p:ph type="subTitle" idx="1"/>
+          </p:nvPr>
+        </p:nvSpPr>
+        <p:spPr>
+          <a:xfrm>
+            <a:off x="252730" y="1557020"/>
+            <a:ext cx="8495665" cy="2891155"/>
+          </a:xfrm>
+        </p:spPr>
+        <p:txBody>
+          <a:bodyPr>
+            <a:noAutofit/>
+          </a:bodyPr>
+          <a:lstStyle/>
+          <a:p>
+            <a:pPr marL="457200" lvl="0" indent="-457200" algn="l" fontAlgn="base">
+              <a:buFont typeface="Arial" panose="020B0604020202020204" pitchFamily="34" charset="0"/>
+              <a:buChar char="•"/>
+            </a:pPr>
+            <a:r>
+              <a:rPr lang="uk-UA" sz="2800" dirty="0">
+                <a:solidFill>
+                  <a:srgbClr val="000000"/>
+                </a:solidFill>
+                <a:latin typeface="Calibri" panose="020F0502020204030204"/>
+                <a:sym typeface="+mn-ea"/>
+              </a:rPr>
+              <a:t>Створення Додавання нових даних або ресурсів.</a:t>
+            </a:r>
+            <a:endParaRPr lang="uk-UA" sz="2800" dirty="0">
+              <a:solidFill>
+                <a:srgbClr val="000000"/>
+              </a:solidFill>
+              <a:latin typeface="Calibri" panose="020F0502020204030204"/>
+            </a:endParaRPr>
+          </a:p>
+          <a:p>
+            <a:pPr marL="457200" lvl="0" indent="-457200" algn="l" fontAlgn="base">
+              <a:buFont typeface="Arial" panose="020B0604020202020204" pitchFamily="34" charset="0"/>
+              <a:buChar char="•"/>
+            </a:pPr>
+            <a:r>
+              <a:rPr lang="uk-UA" sz="2800" dirty="0">
+                <a:solidFill>
+                  <a:srgbClr val="000000"/>
+                </a:solidFill>
+                <a:latin typeface="Calibri" panose="020F0502020204030204"/>
+                <a:sym typeface="+mn-ea"/>
+              </a:rPr>
+              <a:t>Отримання, перегляд або пошук існуючих даних.</a:t>
+            </a:r>
+            <a:endParaRPr lang="uk-UA" sz="2800" dirty="0">
+              <a:solidFill>
+                <a:srgbClr val="000000"/>
+              </a:solidFill>
+              <a:latin typeface="Calibri" panose="020F0502020204030204"/>
+            </a:endParaRPr>
+          </a:p>
+          <a:p>
+            <a:pPr marL="457200" lvl="0" indent="-457200" algn="l" fontAlgn="base">
+              <a:buFont typeface="Arial" panose="020B0604020202020204" pitchFamily="34" charset="0"/>
+              <a:buChar char="•"/>
+            </a:pPr>
+            <a:r>
+              <a:rPr lang="uk-UA" sz="2800" dirty="0">
+                <a:solidFill>
+                  <a:srgbClr val="000000"/>
+                </a:solidFill>
+                <a:latin typeface="Calibri" panose="020F0502020204030204"/>
+                <a:sym typeface="+mn-ea"/>
+              </a:rPr>
+              <a:t>Редагування або зміна наявних даних.</a:t>
+            </a:r>
+            <a:r>
+              <a:rPr lang="en-US" sz="2800" dirty="0">
+                <a:solidFill>
+                  <a:srgbClr val="000000"/>
+                </a:solidFill>
+                <a:latin typeface="Calibri" panose="020F0502020204030204"/>
+                <a:sym typeface="+mn-ea"/>
+              </a:rPr>
+              <a:t> </a:t>
+            </a:r>
+            <a:endParaRPr lang="en-US" sz="2800" dirty="0">
+              <a:solidFill>
+                <a:srgbClr val="000000"/>
+              </a:solidFill>
+              <a:latin typeface="Calibri" panose="020F0502020204030204"/>
+            </a:endParaRPr>
+          </a:p>
+          <a:p>
+            <a:pPr marL="457200" lvl="0" indent="-457200" algn="l" fontAlgn="base">
+              <a:buFont typeface="Arial" panose="020B0604020202020204" pitchFamily="34" charset="0"/>
+              <a:buChar char="•"/>
+            </a:pPr>
+            <a:r>
+              <a:rPr lang="uk-UA" sz="2800" dirty="0">
+                <a:solidFill>
+                  <a:srgbClr val="000000"/>
+                </a:solidFill>
+                <a:latin typeface="Calibri" panose="020F0502020204030204"/>
+                <a:sym typeface="+mn-ea"/>
+              </a:rPr>
+              <a:t>Видалення</a:t>
+            </a:r>
+            <a:endParaRPr lang="en-US" sz="2800" dirty="0">
+              <a:solidFill>
+                <a:srgbClr val="000000"/>
+              </a:solidFill>
+              <a:latin typeface="Calibri" panose="020F0502020204030204"/>
+            </a:endParaRPr>
+          </a:p>
+          <a:p>
+            <a:pPr marL="457200" lvl="0" indent="-457200" algn="l" fontAlgn="base">
+              <a:buFont typeface="Arial" panose="020B0604020202020204" pitchFamily="34" charset="0"/>
+              <a:buChar char="•"/>
+            </a:pPr>
+            <a:r>
+              <a:rPr sz="2800" dirty="0" err="1">
+                <a:solidFill>
+                  <a:srgbClr val="000000"/>
+                </a:solidFill>
+                <a:latin typeface="Calibri" panose="020F0502020204030204"/>
+                <a:sym typeface="+mn-ea"/>
+              </a:rPr>
+              <a:t>Завантаження</a:t>
+            </a:r>
+            <a:r>
+              <a:rPr sz="2800" dirty="0">
+                <a:solidFill>
+                  <a:srgbClr val="000000"/>
+                </a:solidFill>
+                <a:latin typeface="Calibri" panose="020F0502020204030204"/>
+                <a:sym typeface="+mn-ea"/>
+              </a:rPr>
+              <a:t>/</a:t>
+            </a:r>
+            <a:r>
+              <a:rPr sz="2800" dirty="0" err="1">
+                <a:solidFill>
+                  <a:srgbClr val="000000"/>
+                </a:solidFill>
+                <a:latin typeface="Calibri" panose="020F0502020204030204"/>
+                <a:sym typeface="+mn-ea"/>
+              </a:rPr>
+              <a:t>збереження</a:t>
+            </a:r>
+            <a:endParaRPr sz="2800" dirty="0">
+              <a:solidFill>
+                <a:srgbClr val="000000"/>
+              </a:solidFill>
+              <a:latin typeface="Calibri" panose="020F0502020204030204"/>
+            </a:endParaRPr>
+          </a:p>
+          <a:p>
+            <a:pPr marL="457200" lvl="0" indent="-457200" algn="l" fontAlgn="base">
+              <a:buFont typeface="Arial" panose="020B0604020202020204" pitchFamily="34" charset="0"/>
+              <a:buChar char="•"/>
+            </a:pPr>
+            <a:r>
+              <a:rPr sz="2800" dirty="0" err="1">
+                <a:solidFill>
+                  <a:srgbClr val="000000"/>
+                </a:solidFill>
+                <a:latin typeface="Calibri" panose="020F0502020204030204"/>
+                <a:sym typeface="+mn-ea"/>
+              </a:rPr>
+              <a:t>Пошук</a:t>
+            </a:r>
+            <a:r>
+              <a:rPr sz="2800" dirty="0">
+                <a:solidFill>
+                  <a:srgbClr val="000000"/>
+                </a:solidFill>
+                <a:latin typeface="Calibri" panose="020F0502020204030204"/>
+                <a:sym typeface="+mn-ea"/>
+              </a:rPr>
+              <a:t>, </a:t>
+            </a:r>
+            <a:r>
+              <a:rPr sz="2800" dirty="0" err="1">
+                <a:solidFill>
+                  <a:srgbClr val="000000"/>
+                </a:solidFill>
+                <a:latin typeface="Calibri" panose="020F0502020204030204"/>
+                <a:sym typeface="+mn-ea"/>
+              </a:rPr>
+              <a:t>сортування</a:t>
+            </a:r>
+            <a:r>
+              <a:rPr sz="2800" dirty="0">
+                <a:solidFill>
+                  <a:srgbClr val="000000"/>
+                </a:solidFill>
+                <a:latin typeface="Calibri" panose="020F0502020204030204"/>
+                <a:sym typeface="+mn-ea"/>
+              </a:rPr>
+              <a:t>, </a:t>
+            </a:r>
+            <a:r>
+              <a:rPr sz="2800" dirty="0" err="1">
+                <a:solidFill>
+                  <a:srgbClr val="000000"/>
+                </a:solidFill>
+                <a:latin typeface="Calibri" panose="020F0502020204030204"/>
+                <a:sym typeface="+mn-ea"/>
+              </a:rPr>
+              <a:t>фільтрація</a:t>
+            </a:r>
+            <a:endParaRPr sz="2800" dirty="0">
+              <a:solidFill>
+                <a:srgbClr val="000000"/>
+              </a:solidFill>
+              <a:latin typeface="Calibri" panose="020F0502020204030204"/>
+            </a:endParaRPr>
+          </a:p>
+          <a:p>
+            <a:pPr marL="457200" lvl="0" indent="-457200" algn="l" fontAlgn="base">
+              <a:buFont typeface="Arial" panose="020B0604020202020204" pitchFamily="34" charset="0"/>
+              <a:buChar char="•"/>
+            </a:pPr>
+            <a:r>
+              <a:rPr sz="2800" dirty="0" err="1">
+                <a:solidFill>
+                  <a:srgbClr val="000000"/>
+                </a:solidFill>
+                <a:latin typeface="Calibri" panose="020F0502020204030204"/>
+                <a:sym typeface="+mn-ea"/>
+              </a:rPr>
+              <a:t>Авторизація</a:t>
+            </a:r>
+            <a:endParaRPr lang="ru-RU" sz="2800" dirty="0" err="1">
+              <a:solidFill>
+                <a:srgbClr val="000000"/>
+              </a:solidFill>
+              <a:latin typeface="Calibri" panose="020F0502020204030204"/>
+              <a:sym typeface="+mn-ea"/>
+            </a:endParaRPr>
+          </a:p>
+        </p:txBody>
+      </p:sp>
+    </p:spTree>
+  </p:cSld>
+  <p:clrMapOvr>
+    <a:masterClrMapping/>
+  </p:clrMapOvr>
+</p:sld>
+</file>
+
+<file path=ppt/slides/slide13.xml><?xml version="1.0" encoding="utf-8"?>
+<p:sld xmlns:a="http://schemas.openxmlformats.org/drawingml/2006/main" xmlns:r="http://schemas.openxmlformats.org/officeDocument/2006/relationships" xmlns:p="http://schemas.openxmlformats.org/presentationml/2006/main">
+  <p:cSld>
+    <p:spTree>
+      <p:nvGrpSpPr>
+        <p:cNvPr id="1" name=""/>
+        <p:cNvGrpSpPr/>
+        <p:nvPr/>
+      </p:nvGrpSpPr>
+      <p:grpSpPr>
+        <a:xfrm>
+          <a:off x="0" y="0"/>
+          <a:ext cx="0" cy="0"/>
+          <a:chOff x="0" y="0"/>
+          <a:chExt cx="0" cy="0"/>
+        </a:xfrm>
+      </p:grpSpPr>
+      <p:sp>
+        <p:nvSpPr>
+          <p:cNvPr id="2" name="Заголовок 1"/>
+          <p:cNvSpPr>
+            <a:spLocks noGrp="1"/>
+          </p:cNvSpPr>
+          <p:nvPr>
+            <p:ph type="title"/>
+          </p:nvPr>
+        </p:nvSpPr>
+        <p:spPr>
+          <a:xfrm>
+            <a:off x="395536" y="692696"/>
+            <a:ext cx="8229600" cy="1143000"/>
+          </a:xfrm>
+        </p:spPr>
+        <p:txBody>
+          <a:bodyPr>
+            <a:normAutofit fontScale="90000"/>
+          </a:bodyPr>
+          <a:lstStyle/>
+          <a:p>
+            <a:r>
+              <a:rPr lang="ru-RU" sz="4000" b="1" dirty="0" err="1"/>
+              <a:t>Опис</a:t>
+            </a:r>
+            <a:r>
+              <a:rPr lang="ru-RU" sz="4000" b="1" dirty="0"/>
+              <a:t> </a:t>
+            </a:r>
+            <a:r>
+              <a:rPr lang="ru-RU" sz="4000" b="1" dirty="0" err="1"/>
+              <a:t>користувацького</a:t>
+            </a:r>
+            <a:r>
+              <a:rPr lang="ru-RU" sz="4000" b="1" dirty="0"/>
+              <a:t> </a:t>
+            </a:r>
+            <a:r>
+              <a:rPr lang="ru-RU" sz="4000" b="1" dirty="0" err="1"/>
+              <a:t>інтерфейсу</a:t>
+            </a:r>
+            <a:br>
+              <a:rPr lang="ru-RU" sz="4000" dirty="0"/>
+            </a:br>
+            <a:br>
+              <a:rPr lang="ru-RU" dirty="0"/>
+            </a:br>
+            <a:endParaRPr lang="ru-RU" dirty="0"/>
+          </a:p>
+        </p:txBody>
+      </p:sp>
+      <p:sp>
+        <p:nvSpPr>
+          <p:cNvPr id="6" name="TextBox 5"/>
+          <p:cNvSpPr txBox="1"/>
+          <p:nvPr/>
+        </p:nvSpPr>
+        <p:spPr>
+          <a:xfrm>
+            <a:off x="2843599" y="4077335"/>
+            <a:ext cx="4038600" cy="645160"/>
+          </a:xfrm>
+          <a:prstGeom prst="rect">
+            <a:avLst/>
+          </a:prstGeom>
+          <a:noFill/>
+        </p:spPr>
+        <p:txBody>
+          <a:bodyPr wrap="square" rtlCol="0">
+            <a:spAutoFit/>
+          </a:bodyPr>
+          <a:lstStyle/>
+          <a:p>
+            <a:endParaRPr lang="uk-UA" dirty="0"/>
+          </a:p>
+          <a:p>
+            <a:r>
+              <a:rPr lang="uk-UA" dirty="0"/>
+              <a:t>Рисунок 5 – меню адміністратора</a:t>
+            </a:r>
+            <a:endParaRPr lang="uk-UA" dirty="0"/>
+          </a:p>
+        </p:txBody>
+      </p:sp>
+      <p:pic>
+        <p:nvPicPr>
+          <p:cNvPr id="4" name="Content Placeholder 3"/>
+          <p:cNvPicPr>
+            <a:picLocks noChangeAspect="1"/>
+          </p:cNvPicPr>
+          <p:nvPr>
+            <p:ph sz="half" idx="1"/>
+          </p:nvPr>
+        </p:nvPicPr>
+        <p:blipFill>
+          <a:blip r:embed="rId1"/>
+          <a:stretch>
+            <a:fillRect/>
+          </a:stretch>
+        </p:blipFill>
+        <p:spPr>
+          <a:xfrm>
+            <a:off x="3134995" y="1268730"/>
+            <a:ext cx="2880360" cy="2644140"/>
+          </a:xfrm>
+          <a:prstGeom prst="rect">
+            <a:avLst/>
+          </a:prstGeom>
+        </p:spPr>
+      </p:pic>
+    </p:spTree>
+  </p:cSld>
+  <p:clrMapOvr>
+    <a:masterClrMapping/>
+  </p:clrMapOvr>
+</p:sld>
+</file>
+
+<file path=ppt/slides/slide14.xml><?xml version="1.0" encoding="utf-8"?>
+<p:sld xmlns:a="http://schemas.openxmlformats.org/drawingml/2006/main" xmlns:r="http://schemas.openxmlformats.org/officeDocument/2006/relationships" xmlns:p="http://schemas.openxmlformats.org/presentationml/2006/main">
+  <p:cSld>
+    <p:spTree>
+      <p:nvGrpSpPr>
+        <p:cNvPr id="1" name=""/>
+        <p:cNvGrpSpPr/>
+        <p:nvPr/>
+      </p:nvGrpSpPr>
+      <p:grpSpPr>
+        <a:xfrm>
+          <a:off x="0" y="0"/>
+          <a:ext cx="0" cy="0"/>
+          <a:chOff x="0" y="0"/>
+          <a:chExt cx="0" cy="0"/>
+        </a:xfrm>
+      </p:grpSpPr>
+      <p:sp>
+        <p:nvSpPr>
           <p:cNvPr id="4" name="TextBox 3"/>
           <p:cNvSpPr txBox="1"/>
           <p:nvPr/>
@@ -3983,7 +5426,7 @@
 </p:sld>
 </file>
 
-<file path=ppt/slides/slide12.xml><?xml version="1.0" encoding="utf-8"?>
+<file path=ppt/slides/slide15.xml><?xml version="1.0" encoding="utf-8"?>
 <p:sld xmlns:a="http://schemas.openxmlformats.org/drawingml/2006/main" xmlns:r="http://schemas.openxmlformats.org/officeDocument/2006/relationships" xmlns:p="http://schemas.openxmlformats.org/presentationml/2006/main">
   <p:cSld>
     <p:spTree>
@@ -4199,362 +5642,6 @@
 </p:sld>
 </file>
 
-<file path=ppt/slides/slide13.xml><?xml version="1.0" encoding="utf-8"?>
-<p:sld xmlns:a="http://schemas.openxmlformats.org/drawingml/2006/main" xmlns:r="http://schemas.openxmlformats.org/officeDocument/2006/relationships" xmlns:p="http://schemas.openxmlformats.org/presentationml/2006/main">
-  <p:cSld>
-    <p:spTree>
-      <p:nvGrpSpPr>
-        <p:cNvPr id="1" name=""/>
-        <p:cNvGrpSpPr/>
-        <p:nvPr/>
-      </p:nvGrpSpPr>
-      <p:grpSpPr>
-        <a:xfrm>
-          <a:off x="0" y="0"/>
-          <a:ext cx="0" cy="0"/>
-          <a:chOff x="0" y="0"/>
-          <a:chExt cx="0" cy="0"/>
-        </a:xfrm>
-      </p:grpSpPr>
-      <p:sp>
-        <p:nvSpPr>
-          <p:cNvPr id="4" name="TextBox 3"/>
-          <p:cNvSpPr txBox="1"/>
-          <p:nvPr/>
-        </p:nvSpPr>
-        <p:spPr>
-          <a:xfrm>
-            <a:off x="179705" y="1197292"/>
-            <a:ext cx="7200800" cy="645160"/>
-          </a:xfrm>
-          <a:prstGeom prst="rect">
-            <a:avLst/>
-          </a:prstGeom>
-          <a:noFill/>
-        </p:spPr>
-        <p:txBody>
-          <a:bodyPr wrap="square" rtlCol="0">
-            <a:spAutoFit/>
-          </a:bodyPr>
-          <a:lstStyle/>
-          <a:p>
-            <a:r>
-              <a:rPr lang="uk-UA" dirty="0"/>
-              <a:t>Рисунок 11 – пошук товару</a:t>
-            </a:r>
-            <a:endParaRPr lang="uk-UA" dirty="0"/>
-          </a:p>
-          <a:p>
-            <a:endParaRPr lang="uk-UA" dirty="0"/>
-          </a:p>
-        </p:txBody>
-      </p:sp>
-      <p:sp>
-        <p:nvSpPr>
-          <p:cNvPr id="10" name="TextBox 9"/>
-          <p:cNvSpPr txBox="1"/>
-          <p:nvPr/>
-        </p:nvSpPr>
-        <p:spPr>
-          <a:xfrm>
-            <a:off x="179705" y="2421286"/>
-            <a:ext cx="7200800" cy="368300"/>
-          </a:xfrm>
-          <a:prstGeom prst="rect">
-            <a:avLst/>
-          </a:prstGeom>
-          <a:noFill/>
-        </p:spPr>
-        <p:txBody>
-          <a:bodyPr wrap="square" rtlCol="0">
-            <a:spAutoFit/>
-          </a:bodyPr>
-          <a:lstStyle/>
-          <a:p>
-            <a:r>
-              <a:rPr lang="uk-UA" dirty="0"/>
-              <a:t>Рисунок 12 – сортування товару</a:t>
-            </a:r>
-            <a:endParaRPr lang="uk-UA" dirty="0"/>
-          </a:p>
-        </p:txBody>
-      </p:sp>
-      <p:sp>
-        <p:nvSpPr>
-          <p:cNvPr id="13" name="TextBox 12"/>
-          <p:cNvSpPr txBox="1"/>
-          <p:nvPr/>
-        </p:nvSpPr>
-        <p:spPr>
-          <a:xfrm>
-            <a:off x="251471" y="5156664"/>
-            <a:ext cx="7200800" cy="368300"/>
-          </a:xfrm>
-          <a:prstGeom prst="rect">
-            <a:avLst/>
-          </a:prstGeom>
-          <a:noFill/>
-        </p:spPr>
-        <p:txBody>
-          <a:bodyPr wrap="square" rtlCol="0">
-            <a:spAutoFit/>
-          </a:bodyPr>
-          <a:lstStyle/>
-          <a:p>
-            <a:r>
-              <a:rPr lang="uk-UA" dirty="0"/>
-              <a:t>Рисунок 13 – фільтрування товару</a:t>
-            </a:r>
-            <a:endParaRPr lang="uk-UA" dirty="0"/>
-          </a:p>
-        </p:txBody>
-      </p:sp>
-      <p:pic>
-        <p:nvPicPr>
-          <p:cNvPr id="2" name="Picture 1"/>
-          <p:cNvPicPr>
-            <a:picLocks noChangeAspect="1"/>
-          </p:cNvPicPr>
-          <p:nvPr/>
-        </p:nvPicPr>
-        <p:blipFill>
-          <a:blip r:embed="rId1"/>
-          <a:stretch>
-            <a:fillRect/>
-          </a:stretch>
-        </p:blipFill>
-        <p:spPr>
-          <a:xfrm>
-            <a:off x="179705" y="188595"/>
-            <a:ext cx="6332220" cy="685800"/>
-          </a:xfrm>
-          <a:prstGeom prst="rect">
-            <a:avLst/>
-          </a:prstGeom>
-        </p:spPr>
-      </p:pic>
-      <p:pic>
-        <p:nvPicPr>
-          <p:cNvPr id="5" name="Picture 4"/>
-          <p:cNvPicPr>
-            <a:picLocks noChangeAspect="1"/>
-          </p:cNvPicPr>
-          <p:nvPr/>
-        </p:nvPicPr>
-        <p:blipFill>
-          <a:blip r:embed="rId2"/>
-          <a:stretch>
-            <a:fillRect/>
-          </a:stretch>
-        </p:blipFill>
-        <p:spPr>
-          <a:xfrm>
-            <a:off x="179705" y="1701165"/>
-            <a:ext cx="5196840" cy="464820"/>
-          </a:xfrm>
-          <a:prstGeom prst="rect">
-            <a:avLst/>
-          </a:prstGeom>
-        </p:spPr>
-      </p:pic>
-      <p:pic>
-        <p:nvPicPr>
-          <p:cNvPr id="7" name="Picture 6"/>
-          <p:cNvPicPr>
-            <a:picLocks noChangeAspect="1"/>
-          </p:cNvPicPr>
-          <p:nvPr/>
-        </p:nvPicPr>
-        <p:blipFill>
-          <a:blip r:embed="rId3"/>
-          <a:stretch>
-            <a:fillRect/>
-          </a:stretch>
-        </p:blipFill>
-        <p:spPr>
-          <a:xfrm>
-            <a:off x="179070" y="2853055"/>
-            <a:ext cx="6324600" cy="1996440"/>
-          </a:xfrm>
-          <a:prstGeom prst="rect">
-            <a:avLst/>
-          </a:prstGeom>
-        </p:spPr>
-      </p:pic>
-    </p:spTree>
-  </p:cSld>
-  <p:clrMapOvr>
-    <a:masterClrMapping/>
-  </p:clrMapOvr>
-</p:sld>
-</file>
-
-<file path=ppt/slides/slide14.xml><?xml version="1.0" encoding="utf-8"?>
-<p:sld xmlns:a="http://schemas.openxmlformats.org/drawingml/2006/main" xmlns:r="http://schemas.openxmlformats.org/officeDocument/2006/relationships" xmlns:p="http://schemas.openxmlformats.org/presentationml/2006/main">
-  <p:cSld>
-    <p:spTree>
-      <p:nvGrpSpPr>
-        <p:cNvPr id="1" name=""/>
-        <p:cNvGrpSpPr/>
-        <p:nvPr/>
-      </p:nvGrpSpPr>
-      <p:grpSpPr>
-        <a:xfrm>
-          <a:off x="0" y="0"/>
-          <a:ext cx="0" cy="0"/>
-          <a:chOff x="0" y="0"/>
-          <a:chExt cx="0" cy="0"/>
-        </a:xfrm>
-      </p:grpSpPr>
-      <p:sp>
-        <p:nvSpPr>
-          <p:cNvPr id="4" name="TextBox 3"/>
-          <p:cNvSpPr txBox="1"/>
-          <p:nvPr/>
-        </p:nvSpPr>
-        <p:spPr>
-          <a:xfrm>
-            <a:off x="251266" y="4581366"/>
-            <a:ext cx="7211431" cy="368300"/>
-          </a:xfrm>
-          <a:prstGeom prst="rect">
-            <a:avLst/>
-          </a:prstGeom>
-          <a:noFill/>
-        </p:spPr>
-        <p:txBody>
-          <a:bodyPr wrap="square" rtlCol="0">
-            <a:spAutoFit/>
-          </a:bodyPr>
-          <a:lstStyle/>
-          <a:p>
-            <a:r>
-              <a:rPr lang="uk-UA" dirty="0"/>
-              <a:t>Рисунок 15 – інвентаризація залишків</a:t>
-            </a:r>
-            <a:endParaRPr lang="uk-UA" dirty="0"/>
-          </a:p>
-        </p:txBody>
-      </p:sp>
-      <p:pic>
-        <p:nvPicPr>
-          <p:cNvPr id="2" name="Picture 1"/>
-          <p:cNvPicPr>
-            <a:picLocks noChangeAspect="1"/>
-          </p:cNvPicPr>
-          <p:nvPr/>
-        </p:nvPicPr>
-        <p:blipFill>
-          <a:blip r:embed="rId1"/>
-          <a:stretch>
-            <a:fillRect/>
-          </a:stretch>
-        </p:blipFill>
-        <p:spPr>
-          <a:xfrm>
-            <a:off x="251460" y="260985"/>
-            <a:ext cx="6217920" cy="3947160"/>
-          </a:xfrm>
-          <a:prstGeom prst="rect">
-            <a:avLst/>
-          </a:prstGeom>
-        </p:spPr>
-      </p:pic>
-    </p:spTree>
-  </p:cSld>
-  <p:clrMapOvr>
-    <a:masterClrMapping/>
-  </p:clrMapOvr>
-</p:sld>
-</file>
-
-<file path=ppt/slides/slide15.xml><?xml version="1.0" encoding="utf-8"?>
-<p:sld xmlns:a="http://schemas.openxmlformats.org/drawingml/2006/main" xmlns:r="http://schemas.openxmlformats.org/officeDocument/2006/relationships" xmlns:p="http://schemas.openxmlformats.org/presentationml/2006/main">
-  <p:cSld>
-    <p:spTree>
-      <p:nvGrpSpPr>
-        <p:cNvPr id="1" name=""/>
-        <p:cNvGrpSpPr/>
-        <p:nvPr/>
-      </p:nvGrpSpPr>
-      <p:grpSpPr>
-        <a:xfrm>
-          <a:off x="0" y="0"/>
-          <a:ext cx="0" cy="0"/>
-          <a:chOff x="0" y="0"/>
-          <a:chExt cx="0" cy="0"/>
-        </a:xfrm>
-      </p:grpSpPr>
-      <p:sp>
-        <p:nvSpPr>
-          <p:cNvPr id="4" name="TextBox 3"/>
-          <p:cNvSpPr txBox="1"/>
-          <p:nvPr/>
-        </p:nvSpPr>
-        <p:spPr>
-          <a:xfrm>
-            <a:off x="251649" y="1844546"/>
-            <a:ext cx="5112568" cy="645160"/>
-          </a:xfrm>
-          <a:prstGeom prst="rect">
-            <a:avLst/>
-          </a:prstGeom>
-          <a:noFill/>
-        </p:spPr>
-        <p:txBody>
-          <a:bodyPr wrap="square" rtlCol="0">
-            <a:spAutoFit/>
-          </a:bodyPr>
-          <a:lstStyle/>
-          <a:p>
-            <a:r>
-              <a:rPr lang="uk-UA" dirty="0"/>
-              <a:t>Рисунок 1</a:t>
-            </a:r>
-            <a:r>
-              <a:rPr lang="en-US" altLang="uk-UA" dirty="0"/>
-              <a:t>6</a:t>
-            </a:r>
-            <a:r>
-              <a:rPr lang="uk-UA" dirty="0"/>
-              <a:t> – меню користувача без прав адміністратора</a:t>
-            </a:r>
-            <a:endParaRPr lang="uk-UA" dirty="0"/>
-          </a:p>
-        </p:txBody>
-      </p:sp>
-      <p:pic>
-        <p:nvPicPr>
-          <p:cNvPr id="2" name="Picture 1"/>
-          <p:cNvPicPr>
-            <a:picLocks noChangeAspect="1"/>
-          </p:cNvPicPr>
-          <p:nvPr/>
-        </p:nvPicPr>
-        <p:blipFill>
-          <a:blip r:embed="rId1"/>
-          <a:stretch>
-            <a:fillRect/>
-          </a:stretch>
-        </p:blipFill>
-        <p:spPr>
-          <a:xfrm>
-            <a:off x="251460" y="260985"/>
-            <a:ext cx="3802380" cy="1272540"/>
-          </a:xfrm>
-          <a:prstGeom prst="rect">
-            <a:avLst/>
-          </a:prstGeom>
-        </p:spPr>
-      </p:pic>
-    </p:spTree>
-  </p:cSld>
-  <p:clrMapOvr>
-    <a:masterClrMapping/>
-  </p:clrMapOvr>
-</p:sld>
-</file>
-
 <file path=ppt/slides/slide16.xml><?xml version="1.0" encoding="utf-8"?>
 <p:sld xmlns:a="http://schemas.openxmlformats.org/drawingml/2006/main" xmlns:r="http://schemas.openxmlformats.org/officeDocument/2006/relationships" xmlns:p="http://schemas.openxmlformats.org/presentationml/2006/main">
   <p:cSld>
@@ -4574,6 +5661,362 @@
       </p:grpSpPr>
       <p:sp>
         <p:nvSpPr>
+          <p:cNvPr id="4" name="TextBox 3"/>
+          <p:cNvSpPr txBox="1"/>
+          <p:nvPr/>
+        </p:nvSpPr>
+        <p:spPr>
+          <a:xfrm>
+            <a:off x="179705" y="1197292"/>
+            <a:ext cx="7200800" cy="645160"/>
+          </a:xfrm>
+          <a:prstGeom prst="rect">
+            <a:avLst/>
+          </a:prstGeom>
+          <a:noFill/>
+        </p:spPr>
+        <p:txBody>
+          <a:bodyPr wrap="square" rtlCol="0">
+            <a:spAutoFit/>
+          </a:bodyPr>
+          <a:lstStyle/>
+          <a:p>
+            <a:r>
+              <a:rPr lang="uk-UA" dirty="0"/>
+              <a:t>Рисунок 11 – пошук товару</a:t>
+            </a:r>
+            <a:endParaRPr lang="uk-UA" dirty="0"/>
+          </a:p>
+          <a:p>
+            <a:endParaRPr lang="uk-UA" dirty="0"/>
+          </a:p>
+        </p:txBody>
+      </p:sp>
+      <p:sp>
+        <p:nvSpPr>
+          <p:cNvPr id="10" name="TextBox 9"/>
+          <p:cNvSpPr txBox="1"/>
+          <p:nvPr/>
+        </p:nvSpPr>
+        <p:spPr>
+          <a:xfrm>
+            <a:off x="179705" y="2421286"/>
+            <a:ext cx="7200800" cy="368300"/>
+          </a:xfrm>
+          <a:prstGeom prst="rect">
+            <a:avLst/>
+          </a:prstGeom>
+          <a:noFill/>
+        </p:spPr>
+        <p:txBody>
+          <a:bodyPr wrap="square" rtlCol="0">
+            <a:spAutoFit/>
+          </a:bodyPr>
+          <a:lstStyle/>
+          <a:p>
+            <a:r>
+              <a:rPr lang="uk-UA" dirty="0"/>
+              <a:t>Рисунок 12 – сортування товару</a:t>
+            </a:r>
+            <a:endParaRPr lang="uk-UA" dirty="0"/>
+          </a:p>
+        </p:txBody>
+      </p:sp>
+      <p:sp>
+        <p:nvSpPr>
+          <p:cNvPr id="13" name="TextBox 12"/>
+          <p:cNvSpPr txBox="1"/>
+          <p:nvPr/>
+        </p:nvSpPr>
+        <p:spPr>
+          <a:xfrm>
+            <a:off x="251471" y="5156664"/>
+            <a:ext cx="7200800" cy="368300"/>
+          </a:xfrm>
+          <a:prstGeom prst="rect">
+            <a:avLst/>
+          </a:prstGeom>
+          <a:noFill/>
+        </p:spPr>
+        <p:txBody>
+          <a:bodyPr wrap="square" rtlCol="0">
+            <a:spAutoFit/>
+          </a:bodyPr>
+          <a:lstStyle/>
+          <a:p>
+            <a:r>
+              <a:rPr lang="uk-UA" dirty="0"/>
+              <a:t>Рисунок 13 – фільтрування товару</a:t>
+            </a:r>
+            <a:endParaRPr lang="uk-UA" dirty="0"/>
+          </a:p>
+        </p:txBody>
+      </p:sp>
+      <p:pic>
+        <p:nvPicPr>
+          <p:cNvPr id="2" name="Picture 1"/>
+          <p:cNvPicPr>
+            <a:picLocks noChangeAspect="1"/>
+          </p:cNvPicPr>
+          <p:nvPr/>
+        </p:nvPicPr>
+        <p:blipFill>
+          <a:blip r:embed="rId1"/>
+          <a:stretch>
+            <a:fillRect/>
+          </a:stretch>
+        </p:blipFill>
+        <p:spPr>
+          <a:xfrm>
+            <a:off x="179705" y="188595"/>
+            <a:ext cx="6332220" cy="685800"/>
+          </a:xfrm>
+          <a:prstGeom prst="rect">
+            <a:avLst/>
+          </a:prstGeom>
+        </p:spPr>
+      </p:pic>
+      <p:pic>
+        <p:nvPicPr>
+          <p:cNvPr id="5" name="Picture 4"/>
+          <p:cNvPicPr>
+            <a:picLocks noChangeAspect="1"/>
+          </p:cNvPicPr>
+          <p:nvPr/>
+        </p:nvPicPr>
+        <p:blipFill>
+          <a:blip r:embed="rId2"/>
+          <a:stretch>
+            <a:fillRect/>
+          </a:stretch>
+        </p:blipFill>
+        <p:spPr>
+          <a:xfrm>
+            <a:off x="179705" y="1701165"/>
+            <a:ext cx="5196840" cy="464820"/>
+          </a:xfrm>
+          <a:prstGeom prst="rect">
+            <a:avLst/>
+          </a:prstGeom>
+        </p:spPr>
+      </p:pic>
+      <p:pic>
+        <p:nvPicPr>
+          <p:cNvPr id="7" name="Picture 6"/>
+          <p:cNvPicPr>
+            <a:picLocks noChangeAspect="1"/>
+          </p:cNvPicPr>
+          <p:nvPr/>
+        </p:nvPicPr>
+        <p:blipFill>
+          <a:blip r:embed="rId3"/>
+          <a:stretch>
+            <a:fillRect/>
+          </a:stretch>
+        </p:blipFill>
+        <p:spPr>
+          <a:xfrm>
+            <a:off x="179070" y="2853055"/>
+            <a:ext cx="6324600" cy="1996440"/>
+          </a:xfrm>
+          <a:prstGeom prst="rect">
+            <a:avLst/>
+          </a:prstGeom>
+        </p:spPr>
+      </p:pic>
+    </p:spTree>
+  </p:cSld>
+  <p:clrMapOvr>
+    <a:masterClrMapping/>
+  </p:clrMapOvr>
+</p:sld>
+</file>
+
+<file path=ppt/slides/slide17.xml><?xml version="1.0" encoding="utf-8"?>
+<p:sld xmlns:a="http://schemas.openxmlformats.org/drawingml/2006/main" xmlns:r="http://schemas.openxmlformats.org/officeDocument/2006/relationships" xmlns:p="http://schemas.openxmlformats.org/presentationml/2006/main">
+  <p:cSld>
+    <p:spTree>
+      <p:nvGrpSpPr>
+        <p:cNvPr id="1" name=""/>
+        <p:cNvGrpSpPr/>
+        <p:nvPr/>
+      </p:nvGrpSpPr>
+      <p:grpSpPr>
+        <a:xfrm>
+          <a:off x="0" y="0"/>
+          <a:ext cx="0" cy="0"/>
+          <a:chOff x="0" y="0"/>
+          <a:chExt cx="0" cy="0"/>
+        </a:xfrm>
+      </p:grpSpPr>
+      <p:sp>
+        <p:nvSpPr>
+          <p:cNvPr id="4" name="TextBox 3"/>
+          <p:cNvSpPr txBox="1"/>
+          <p:nvPr/>
+        </p:nvSpPr>
+        <p:spPr>
+          <a:xfrm>
+            <a:off x="251266" y="4581366"/>
+            <a:ext cx="7211431" cy="368300"/>
+          </a:xfrm>
+          <a:prstGeom prst="rect">
+            <a:avLst/>
+          </a:prstGeom>
+          <a:noFill/>
+        </p:spPr>
+        <p:txBody>
+          <a:bodyPr wrap="square" rtlCol="0">
+            <a:spAutoFit/>
+          </a:bodyPr>
+          <a:lstStyle/>
+          <a:p>
+            <a:r>
+              <a:rPr lang="uk-UA" dirty="0"/>
+              <a:t>Рисунок 15 – інвентаризація залишків</a:t>
+            </a:r>
+            <a:endParaRPr lang="uk-UA" dirty="0"/>
+          </a:p>
+        </p:txBody>
+      </p:sp>
+      <p:pic>
+        <p:nvPicPr>
+          <p:cNvPr id="2" name="Picture 1"/>
+          <p:cNvPicPr>
+            <a:picLocks noChangeAspect="1"/>
+          </p:cNvPicPr>
+          <p:nvPr/>
+        </p:nvPicPr>
+        <p:blipFill>
+          <a:blip r:embed="rId1"/>
+          <a:stretch>
+            <a:fillRect/>
+          </a:stretch>
+        </p:blipFill>
+        <p:spPr>
+          <a:xfrm>
+            <a:off x="251460" y="260985"/>
+            <a:ext cx="6217920" cy="3947160"/>
+          </a:xfrm>
+          <a:prstGeom prst="rect">
+            <a:avLst/>
+          </a:prstGeom>
+        </p:spPr>
+      </p:pic>
+    </p:spTree>
+  </p:cSld>
+  <p:clrMapOvr>
+    <a:masterClrMapping/>
+  </p:clrMapOvr>
+</p:sld>
+</file>
+
+<file path=ppt/slides/slide18.xml><?xml version="1.0" encoding="utf-8"?>
+<p:sld xmlns:a="http://schemas.openxmlformats.org/drawingml/2006/main" xmlns:r="http://schemas.openxmlformats.org/officeDocument/2006/relationships" xmlns:p="http://schemas.openxmlformats.org/presentationml/2006/main">
+  <p:cSld>
+    <p:spTree>
+      <p:nvGrpSpPr>
+        <p:cNvPr id="1" name=""/>
+        <p:cNvGrpSpPr/>
+        <p:nvPr/>
+      </p:nvGrpSpPr>
+      <p:grpSpPr>
+        <a:xfrm>
+          <a:off x="0" y="0"/>
+          <a:ext cx="0" cy="0"/>
+          <a:chOff x="0" y="0"/>
+          <a:chExt cx="0" cy="0"/>
+        </a:xfrm>
+      </p:grpSpPr>
+      <p:sp>
+        <p:nvSpPr>
+          <p:cNvPr id="4" name="TextBox 3"/>
+          <p:cNvSpPr txBox="1"/>
+          <p:nvPr/>
+        </p:nvSpPr>
+        <p:spPr>
+          <a:xfrm>
+            <a:off x="251649" y="1844546"/>
+            <a:ext cx="5112568" cy="645160"/>
+          </a:xfrm>
+          <a:prstGeom prst="rect">
+            <a:avLst/>
+          </a:prstGeom>
+          <a:noFill/>
+        </p:spPr>
+        <p:txBody>
+          <a:bodyPr wrap="square" rtlCol="0">
+            <a:spAutoFit/>
+          </a:bodyPr>
+          <a:lstStyle/>
+          <a:p>
+            <a:r>
+              <a:rPr lang="uk-UA" dirty="0"/>
+              <a:t>Рисунок 1</a:t>
+            </a:r>
+            <a:r>
+              <a:rPr lang="en-US" altLang="uk-UA" dirty="0"/>
+              <a:t>6</a:t>
+            </a:r>
+            <a:r>
+              <a:rPr lang="uk-UA" dirty="0"/>
+              <a:t> – меню користувача без прав адміністратора</a:t>
+            </a:r>
+            <a:endParaRPr lang="uk-UA" dirty="0"/>
+          </a:p>
+        </p:txBody>
+      </p:sp>
+      <p:pic>
+        <p:nvPicPr>
+          <p:cNvPr id="2" name="Picture 1"/>
+          <p:cNvPicPr>
+            <a:picLocks noChangeAspect="1"/>
+          </p:cNvPicPr>
+          <p:nvPr/>
+        </p:nvPicPr>
+        <p:blipFill>
+          <a:blip r:embed="rId1"/>
+          <a:stretch>
+            <a:fillRect/>
+          </a:stretch>
+        </p:blipFill>
+        <p:spPr>
+          <a:xfrm>
+            <a:off x="251460" y="260985"/>
+            <a:ext cx="3802380" cy="1272540"/>
+          </a:xfrm>
+          <a:prstGeom prst="rect">
+            <a:avLst/>
+          </a:prstGeom>
+        </p:spPr>
+      </p:pic>
+    </p:spTree>
+  </p:cSld>
+  <p:clrMapOvr>
+    <a:masterClrMapping/>
+  </p:clrMapOvr>
+</p:sld>
+</file>
+
+<file path=ppt/slides/slide19.xml><?xml version="1.0" encoding="utf-8"?>
+<p:sld xmlns:a="http://schemas.openxmlformats.org/drawingml/2006/main" xmlns:r="http://schemas.openxmlformats.org/officeDocument/2006/relationships" xmlns:p="http://schemas.openxmlformats.org/presentationml/2006/main">
+  <p:cSld>
+    <p:spTree>
+      <p:nvGrpSpPr>
+        <p:cNvPr id="1" name=""/>
+        <p:cNvGrpSpPr/>
+        <p:nvPr/>
+      </p:nvGrpSpPr>
+      <p:grpSpPr>
+        <a:xfrm>
+          <a:off x="0" y="0"/>
+          <a:ext cx="0" cy="0"/>
+          <a:chOff x="0" y="0"/>
+          <a:chExt cx="0" cy="0"/>
+        </a:xfrm>
+      </p:grpSpPr>
+      <p:sp>
+        <p:nvSpPr>
           <p:cNvPr id="2" name="Заголовок 1"/>
           <p:cNvSpPr>
             <a:spLocks noGrp="1"/>
@@ -4593,10 +6036,10 @@
           <a:lstStyle/>
           <a:p>
             <a:r>
-              <a:rPr lang="uk-UA" b="1" dirty="0"/>
+              <a:rPr lang="uk-UA" sz="3600" b="1" dirty="0"/>
               <a:t>Висновок:</a:t>
             </a:r>
-            <a:endParaRPr lang="ru-RU" b="1" dirty="0"/>
+            <a:endParaRPr lang="ru-RU" sz="3600" b="1" dirty="0"/>
           </a:p>
         </p:txBody>
       </p:sp>
@@ -4624,14 +6067,14 @@
           <a:p>
             <a:pPr algn="l"/>
             <a:r>
-              <a:rPr lang="en-US" altLang="en-US" sz="1800" dirty="0">
+              <a:rPr lang="en-US" altLang="en-US" sz="1400" dirty="0">
                 <a:solidFill>
                   <a:schemeClr val="tx1"/>
                 </a:solidFill>
               </a:rPr>
               <a:t>У результаті виконання курсового проєкту розроблена система управління базою автомобілів для комп’ютерів, які працюють під керуванням ОС Windows.</a:t>
             </a:r>
-            <a:endParaRPr lang="en-US" altLang="en-US" sz="1800" dirty="0">
+            <a:endParaRPr lang="en-US" altLang="en-US" sz="1400" dirty="0">
               <a:solidFill>
                 <a:schemeClr val="tx1"/>
               </a:solidFill>
@@ -4640,7 +6083,7 @@
           <a:p>
             <a:pPr algn="l"/>
             <a:r>
-              <a:rPr lang="en-US" altLang="en-US" sz="1800" dirty="0">
+              <a:rPr lang="en-US" altLang="en-US" sz="1400" dirty="0">
                 <a:solidFill>
                   <a:schemeClr val="tx1"/>
                 </a:solidFill>
@@ -4648,14 +6091,14 @@
               <a:t>У розробленому </a:t>
             </a:r>
             <a:r>
-              <a:rPr lang="en-US" altLang="en-US" sz="1800" dirty="0">
+              <a:rPr lang="en-US" altLang="en-US" sz="1400" dirty="0">
                 <a:solidFill>
                   <a:schemeClr val="tx1"/>
                 </a:solidFill>
               </a:rPr>
               <a:t>програмному забезпечені передбачено:</a:t>
             </a:r>
-            <a:endParaRPr lang="en-US" altLang="en-US" sz="1800" dirty="0">
+            <a:endParaRPr lang="en-US" altLang="en-US" sz="1400" dirty="0">
               <a:solidFill>
                 <a:schemeClr val="tx1"/>
               </a:solidFill>
@@ -4667,14 +6110,14 @@
               <a:buChar char="•"/>
             </a:pPr>
             <a:r>
-              <a:rPr lang="en-US" altLang="en-US" sz="1800" dirty="0">
+              <a:rPr lang="en-US" altLang="en-US" sz="1400" dirty="0">
                 <a:solidFill>
                   <a:schemeClr val="tx1"/>
                 </a:solidFill>
               </a:rPr>
               <a:t>Подання даних користувачем у консолі.</a:t>
             </a:r>
-            <a:endParaRPr lang="en-US" altLang="en-US" sz="1800" dirty="0">
+            <a:endParaRPr lang="en-US" altLang="en-US" sz="1400" dirty="0">
               <a:solidFill>
                 <a:schemeClr val="tx1"/>
               </a:solidFill>
@@ -4686,7 +6129,7 @@
               <a:buChar char="•"/>
             </a:pPr>
             <a:r>
-              <a:rPr lang="en-US" altLang="en-US" sz="1800" dirty="0">
+              <a:rPr lang="en-US" altLang="en-US" sz="1400" dirty="0">
                 <a:solidFill>
                   <a:schemeClr val="tx1"/>
                 </a:solidFill>
@@ -4694,7 +6137,7 @@
               </a:rPr>
               <a:t>Збереження даних у файл.</a:t>
             </a:r>
-            <a:endParaRPr lang="en-US" altLang="en-US" sz="1800" dirty="0">
+            <a:endParaRPr lang="en-US" altLang="en-US" sz="1400" dirty="0">
               <a:solidFill>
                 <a:schemeClr val="tx1"/>
               </a:solidFill>
@@ -4707,7 +6150,7 @@
               <a:buChar char="•"/>
             </a:pPr>
             <a:r>
-              <a:rPr lang="uk-UA" altLang="en-US" sz="1800" dirty="0">
+              <a:rPr lang="uk-UA" altLang="en-US" sz="1400" dirty="0">
                 <a:solidFill>
                   <a:schemeClr val="tx1"/>
                 </a:solidFill>
@@ -4716,7 +6159,7 @@
               <a:t> </a:t>
             </a:r>
             <a:r>
-              <a:rPr lang="en-US" altLang="en-US" sz="1800" dirty="0">
+              <a:rPr lang="en-US" altLang="en-US" sz="1400" dirty="0">
                 <a:solidFill>
                   <a:schemeClr val="tx1"/>
                 </a:solidFill>
@@ -4724,7 +6167,7 @@
               </a:rPr>
               <a:t>Зчитування даних з файлу.</a:t>
             </a:r>
-            <a:endParaRPr lang="en-US" altLang="en-US" sz="1800" dirty="0">
+            <a:endParaRPr lang="en-US" altLang="en-US" sz="1400" dirty="0">
               <a:solidFill>
                 <a:schemeClr val="tx1"/>
               </a:solidFill>
@@ -4737,7 +6180,7 @@
               <a:buChar char="•"/>
             </a:pPr>
             <a:r>
-              <a:rPr lang="en-US" altLang="en-US" sz="1800" dirty="0">
+              <a:rPr lang="en-US" altLang="en-US" sz="1400" dirty="0">
                 <a:solidFill>
                   <a:schemeClr val="tx1"/>
                 </a:solidFill>
@@ -4745,7 +6188,7 @@
               </a:rPr>
               <a:t>Додавання нових товарів.</a:t>
             </a:r>
-            <a:endParaRPr lang="en-US" altLang="en-US" sz="1800" dirty="0">
+            <a:endParaRPr lang="en-US" altLang="en-US" sz="1400" dirty="0">
               <a:solidFill>
                 <a:schemeClr val="tx1"/>
               </a:solidFill>
@@ -4758,7 +6201,7 @@
               <a:buChar char="•"/>
             </a:pPr>
             <a:r>
-              <a:rPr lang="en-US" altLang="en-US" sz="1800" dirty="0">
+              <a:rPr lang="en-US" altLang="en-US" sz="1400" dirty="0">
                 <a:solidFill>
                   <a:schemeClr val="tx1"/>
                 </a:solidFill>
@@ -4766,7 +6209,7 @@
               </a:rPr>
               <a:t>Редагування доданих товарів.</a:t>
             </a:r>
-            <a:endParaRPr lang="en-US" altLang="en-US" sz="1800" dirty="0">
+            <a:endParaRPr lang="en-US" altLang="en-US" sz="1400" dirty="0">
               <a:solidFill>
                 <a:schemeClr val="tx1"/>
               </a:solidFill>
@@ -4779,7 +6222,7 @@
               <a:buChar char="•"/>
             </a:pPr>
             <a:r>
-              <a:rPr lang="en-US" altLang="en-US" sz="1800" dirty="0">
+              <a:rPr lang="en-US" altLang="en-US" sz="1400" dirty="0">
                 <a:solidFill>
                   <a:schemeClr val="tx1"/>
                 </a:solidFill>
@@ -4787,7 +6230,7 @@
               </a:rPr>
               <a:t>Видалення товарів.</a:t>
             </a:r>
-            <a:endParaRPr lang="en-US" altLang="en-US" sz="1800" dirty="0">
+            <a:endParaRPr lang="en-US" altLang="en-US" sz="1400" dirty="0">
               <a:solidFill>
                 <a:schemeClr val="tx1"/>
               </a:solidFill>
@@ -4800,7 +6243,7 @@
               <a:buChar char="•"/>
             </a:pPr>
             <a:r>
-              <a:rPr lang="en-US" altLang="en-US" sz="1800" dirty="0">
+              <a:rPr lang="en-US" altLang="en-US" sz="1400" dirty="0">
                 <a:solidFill>
                   <a:schemeClr val="tx1"/>
                 </a:solidFill>
@@ -4808,7 +6251,7 @@
               </a:rPr>
               <a:t>Перегляд всіх товарів.</a:t>
             </a:r>
-            <a:endParaRPr lang="en-US" altLang="en-US" sz="1800" dirty="0">
+            <a:endParaRPr lang="en-US" altLang="en-US" sz="1400" dirty="0">
               <a:solidFill>
                 <a:schemeClr val="tx1"/>
               </a:solidFill>
@@ -4821,7 +6264,7 @@
               <a:buChar char="•"/>
             </a:pPr>
             <a:r>
-              <a:rPr lang="en-US" altLang="en-US" sz="1800" dirty="0">
+              <a:rPr lang="en-US" altLang="en-US" sz="1400" dirty="0">
                 <a:solidFill>
                   <a:schemeClr val="tx1"/>
                 </a:solidFill>
@@ -4829,7 +6272,7 @@
               </a:rPr>
               <a:t>Пошук товарів.</a:t>
             </a:r>
-            <a:endParaRPr lang="en-US" altLang="en-US" sz="1800" dirty="0">
+            <a:endParaRPr lang="en-US" altLang="en-US" sz="1400" dirty="0">
               <a:solidFill>
                 <a:schemeClr val="tx1"/>
               </a:solidFill>
@@ -4842,7 +6285,7 @@
               <a:buChar char="•"/>
             </a:pPr>
             <a:r>
-              <a:rPr lang="en-US" altLang="en-US" sz="1800" dirty="0">
+              <a:rPr lang="en-US" altLang="en-US" sz="1400" dirty="0">
                 <a:solidFill>
                   <a:schemeClr val="tx1"/>
                 </a:solidFill>
@@ -4850,7 +6293,7 @@
               </a:rPr>
               <a:t>Сортування товарів.</a:t>
             </a:r>
-            <a:endParaRPr lang="en-US" altLang="en-US" sz="1800" dirty="0">
+            <a:endParaRPr lang="en-US" altLang="en-US" sz="1400" dirty="0">
               <a:solidFill>
                 <a:schemeClr val="tx1"/>
               </a:solidFill>
@@ -4863,7 +6306,7 @@
               <a:buChar char="•"/>
             </a:pPr>
             <a:r>
-              <a:rPr lang="en-US" altLang="en-US" sz="1800" dirty="0">
+              <a:rPr lang="en-US" altLang="en-US" sz="1400" dirty="0">
                 <a:solidFill>
                   <a:schemeClr val="tx1"/>
                 </a:solidFill>
@@ -4872,7 +6315,7 @@
               <a:t>Фільтрування товарів</a:t>
             </a:r>
             <a:r>
-              <a:rPr lang="uk-UA" altLang="en-US" sz="1800" dirty="0">
+              <a:rPr lang="uk-UA" altLang="en-US" sz="1400" dirty="0">
                 <a:solidFill>
                   <a:schemeClr val="tx1"/>
                 </a:solidFill>
@@ -4880,7 +6323,7 @@
               </a:rPr>
               <a:t>.</a:t>
             </a:r>
-            <a:endParaRPr lang="uk-UA" altLang="en-US" sz="1800" dirty="0">
+            <a:endParaRPr lang="uk-UA" altLang="en-US" sz="1400" dirty="0">
               <a:solidFill>
                 <a:schemeClr val="tx1"/>
               </a:solidFill>
@@ -4893,7 +6336,7 @@
               <a:buChar char="•"/>
             </a:pPr>
             <a:r>
-              <a:rPr lang="en-US" altLang="en-US" sz="1800" dirty="0">
+              <a:rPr lang="en-US" altLang="en-US" sz="1400" dirty="0">
                 <a:solidFill>
                   <a:schemeClr val="tx1"/>
                 </a:solidFill>
@@ -4901,7 +6344,7 @@
               </a:rPr>
               <a:t>Оформлення покупки.</a:t>
             </a:r>
-            <a:endParaRPr lang="en-US" altLang="en-US" sz="1800" dirty="0">
+            <a:endParaRPr lang="en-US" altLang="en-US" sz="1400" dirty="0">
               <a:solidFill>
                 <a:schemeClr val="tx1"/>
               </a:solidFill>
@@ -4914,7 +6357,7 @@
               <a:buChar char="•"/>
             </a:pPr>
             <a:r>
-              <a:rPr lang="en-US" altLang="en-US" sz="1800" dirty="0">
+              <a:rPr lang="en-US" altLang="en-US" sz="1400" dirty="0">
                 <a:solidFill>
                   <a:schemeClr val="tx1"/>
                 </a:solidFill>
@@ -4922,7 +6365,7 @@
               </a:rPr>
               <a:t>Виведення інструкції (Help).</a:t>
             </a:r>
-            <a:endParaRPr lang="en-US" altLang="en-US" sz="1800" dirty="0">
+            <a:endParaRPr lang="en-US" altLang="en-US" sz="1400" dirty="0">
               <a:solidFill>
                 <a:schemeClr val="tx1"/>
               </a:solidFill>
@@ -4931,14 +6374,14 @@
           <a:p>
             <a:pPr algn="l"/>
             <a:r>
-              <a:rPr lang="en-US" altLang="en-US" sz="1800" dirty="0">
+              <a:rPr lang="en-US" altLang="en-US" sz="1400" dirty="0">
                 <a:solidFill>
                   <a:schemeClr val="tx1"/>
                 </a:solidFill>
               </a:rPr>
               <a:t>Дана розробка у майбутньому може бути розширена із додаванням нового функціоналу і видозміненою логікою обробки.</a:t>
             </a:r>
-            <a:endParaRPr lang="en-US" altLang="en-US" sz="1800" dirty="0">
+            <a:endParaRPr lang="en-US" altLang="en-US" sz="1400" dirty="0">
               <a:solidFill>
                 <a:schemeClr val="tx1"/>
               </a:solidFill>
@@ -4994,22 +6437,16 @@
           <a:lstStyle/>
           <a:p>
             <a:r>
-              <a:rPr lang="ru-RU" sz="4000" b="1" dirty="0"/>
-              <a:t>Мета </a:t>
-            </a:r>
-            <a:r>
-              <a:rPr lang="ru-RU" sz="4000" b="1" dirty="0" err="1"/>
-              <a:t>роботи</a:t>
-            </a:r>
-            <a:r>
-              <a:rPr lang="ru-RU" sz="4000" b="1" dirty="0"/>
-              <a:t> та постановка </a:t>
-            </a:r>
-            <a:r>
-              <a:rPr lang="ru-RU" sz="4000" b="1" dirty="0" err="1"/>
-              <a:t>задачі</a:t>
-            </a:r>
-            <a:endParaRPr lang="ru-RU" sz="4000" dirty="0"/>
+              <a:rPr lang="uk-UA" altLang="ru-RU" sz="3600" b="1" dirty="0">
+                <a:latin typeface="Calibri" panose="020F0502020204030204" charset="0"/>
+                <a:cs typeface="Calibri" panose="020F0502020204030204" charset="0"/>
+              </a:rPr>
+              <a:t>Мета та завдання</a:t>
+            </a:r>
+            <a:endParaRPr lang="uk-UA" altLang="ru-RU" sz="3600" b="1" dirty="0">
+              <a:latin typeface="Calibri" panose="020F0502020204030204" charset="0"/>
+              <a:cs typeface="Calibri" panose="020F0502020204030204" charset="0"/>
+            </a:endParaRPr>
           </a:p>
         </p:txBody>
       </p:sp>
@@ -5035,129 +6472,109 @@
           </a:bodyPr>
           <a:lstStyle/>
           <a:p>
-            <a:pPr algn="l"/>
+            <a:pPr marL="342900" indent="-342900" algn="l">
+              <a:buFont typeface="Arial" panose="020B0604020202020204" pitchFamily="34" charset="0"/>
+              <a:buChar char="•"/>
+            </a:pPr>
+            <a:r>
+              <a:rPr lang="uk-UA" sz="2800" b="1" dirty="0">
+                <a:solidFill>
+                  <a:schemeClr val="tx1"/>
+                </a:solidFill>
+                <a:latin typeface="Calibri" panose="020F0502020204030204" charset="0"/>
+                <a:cs typeface="Calibri" panose="020F0502020204030204" charset="0"/>
+              </a:rPr>
+              <a:t>Мета:</a:t>
+            </a:r>
             <a:r>
               <a:rPr lang="uk-UA" sz="2000" b="1" dirty="0">
                 <a:solidFill>
                   <a:schemeClr val="tx1"/>
                 </a:solidFill>
-              </a:rPr>
-              <a:t>Мета роботи </a:t>
-            </a:r>
-            <a:r>
-              <a:rPr lang="uk-UA" sz="2000" dirty="0">
-                <a:solidFill>
-                  <a:schemeClr val="tx1"/>
-                </a:solidFill>
+                <a:latin typeface="Calibri" panose="020F0502020204030204" charset="0"/>
+                <a:cs typeface="Calibri" panose="020F0502020204030204" charset="0"/>
+              </a:rPr>
+              <a:t> </a:t>
+            </a:r>
+            <a:r>
+              <a:rPr lang="uk-UA" sz="2400" dirty="0">
+                <a:solidFill>
+                  <a:schemeClr val="tx1"/>
+                </a:solidFill>
+                <a:latin typeface="Calibri" panose="020F0502020204030204" charset="0"/>
+                <a:cs typeface="Calibri" panose="020F0502020204030204" charset="0"/>
               </a:rPr>
               <a:t>полягає у розробці консольного інструмента для електронного кадрового обліку. Демонстрація практичного застосування Обєктно-орієнтованого програмування (ООП та ефективного використання Структур Даних (</a:t>
             </a:r>
             <a:r>
-              <a:rPr lang="en-US" sz="2000" dirty="0">
-                <a:solidFill>
-                  <a:schemeClr val="tx1"/>
-                </a:solidFill>
+              <a:rPr lang="en-US" sz="2400" dirty="0">
+                <a:solidFill>
+                  <a:schemeClr val="tx1"/>
+                </a:solidFill>
+                <a:latin typeface="Calibri" panose="020F0502020204030204" charset="0"/>
+                <a:cs typeface="Calibri" panose="020F0502020204030204" charset="0"/>
               </a:rPr>
               <a:t>STL)</a:t>
             </a:r>
             <a:r>
-              <a:rPr lang="uk-UA" altLang="en-US" sz="2000" dirty="0">
-                <a:solidFill>
-                  <a:schemeClr val="tx1"/>
-                </a:solidFill>
+              <a:rPr lang="uk-UA" altLang="en-US" sz="2400" dirty="0">
+                <a:solidFill>
+                  <a:schemeClr val="tx1"/>
+                </a:solidFill>
+                <a:latin typeface="Calibri" panose="020F0502020204030204" charset="0"/>
+                <a:cs typeface="Calibri" panose="020F0502020204030204" charset="0"/>
               </a:rPr>
               <a:t>.</a:t>
             </a:r>
-            <a:endParaRPr lang="ru-RU" sz="2000" dirty="0">
+            <a:endParaRPr lang="ru-RU" sz="2400" dirty="0">
               <a:solidFill>
                 <a:schemeClr val="tx1"/>
               </a:solidFill>
+              <a:latin typeface="Calibri" panose="020F0502020204030204" charset="0"/>
+              <a:cs typeface="Calibri" panose="020F0502020204030204" charset="0"/>
             </a:endParaRPr>
           </a:p>
           <a:p>
-            <a:pPr algn="l"/>
-            <a:endParaRPr lang="en-US" sz="2000" dirty="0">
+            <a:pPr marL="342900" indent="-342900" algn="l">
+              <a:buFont typeface="Arial" panose="020B0604020202020204" pitchFamily="34" charset="0"/>
+              <a:buChar char="•"/>
+            </a:pPr>
+            <a:r>
+              <a:rPr lang="uk-UA" altLang="ru-RU" sz="2800" b="1" dirty="0">
+                <a:solidFill>
+                  <a:schemeClr val="tx1"/>
+                </a:solidFill>
+                <a:latin typeface="Calibri" panose="020F0502020204030204" charset="0"/>
+                <a:cs typeface="Calibri" panose="020F0502020204030204" charset="0"/>
+              </a:rPr>
+              <a:t>Завдання:</a:t>
+            </a:r>
+            <a:r>
+              <a:rPr lang="uk-UA" altLang="ru-RU" sz="2000" dirty="0">
+                <a:solidFill>
+                  <a:schemeClr val="tx1"/>
+                </a:solidFill>
+                <a:latin typeface="Calibri" panose="020F0502020204030204" charset="0"/>
+                <a:cs typeface="Calibri" panose="020F0502020204030204" charset="0"/>
+              </a:rPr>
+              <a:t> </a:t>
+            </a:r>
+            <a:r>
+              <a:rPr lang="uk-UA" altLang="ru-RU" sz="2400" dirty="0">
+                <a:solidFill>
+                  <a:schemeClr val="tx1"/>
+                </a:solidFill>
+                <a:latin typeface="Calibri" panose="020F0502020204030204" charset="0"/>
+                <a:cs typeface="Calibri" panose="020F0502020204030204" charset="0"/>
+              </a:rPr>
+              <a:t>В базу даних заносяться дані про товар: ціна, залишок, дата завезення. Результати пошуку товару та сортування  та фільтрацію за різними параметри</a:t>
+            </a:r>
+            <a:endParaRPr lang="uk-UA" altLang="ru-RU" sz="2400" dirty="0">
               <a:solidFill>
                 <a:schemeClr val="tx1"/>
               </a:solidFill>
-            </a:endParaRPr>
-          </a:p>
-          <a:p>
-            <a:pPr algn="l"/>
-            <a:r>
-              <a:rPr lang="ru-RU" sz="2000" u="sng" dirty="0">
-                <a:solidFill>
-                  <a:schemeClr val="tx1"/>
-                </a:solidFill>
-              </a:rPr>
-              <a:t>Постановка </a:t>
-            </a:r>
-            <a:r>
-              <a:rPr lang="ru-RU" sz="2000" u="sng" dirty="0" err="1">
-                <a:solidFill>
-                  <a:schemeClr val="tx1"/>
-                </a:solidFill>
-              </a:rPr>
-              <a:t>задачі</a:t>
-            </a:r>
-            <a:r>
-              <a:rPr lang="ru-RU" sz="2000" u="sng" dirty="0">
-                <a:solidFill>
-                  <a:schemeClr val="tx1"/>
-                </a:solidFill>
-              </a:rPr>
-              <a:t>: </a:t>
-            </a:r>
-            <a:endParaRPr lang="ru-RU" sz="2000" dirty="0">
-              <a:solidFill>
-                <a:schemeClr val="tx1"/>
-              </a:solidFill>
-            </a:endParaRPr>
-          </a:p>
-          <a:p>
-            <a:pPr algn="l">
-              <a:buFont typeface="+mj-lt"/>
-            </a:pPr>
-            <a:endParaRPr lang="ru-RU" sz="2000" dirty="0">
-              <a:solidFill>
-                <a:schemeClr val="tx1"/>
-              </a:solidFill>
-            </a:endParaRPr>
-          </a:p>
-          <a:p>
-            <a:pPr algn="l">
-              <a:buFont typeface="+mj-lt"/>
-            </a:pPr>
-            <a:r>
-              <a:rPr lang="uk-UA" altLang="ru-RU" sz="2000" dirty="0">
-                <a:solidFill>
-                  <a:schemeClr val="tx1"/>
-                </a:solidFill>
-              </a:rPr>
-              <a:t>В базу даних заносяться дані про товар: ціна, залишок, дата завезення.</a:t>
-            </a:r>
-            <a:endParaRPr lang="uk-UA" altLang="ru-RU" sz="2000" dirty="0">
-              <a:solidFill>
-                <a:schemeClr val="tx1"/>
-              </a:solidFill>
-            </a:endParaRPr>
-          </a:p>
-          <a:p>
-            <a:pPr algn="l">
-              <a:buFont typeface="+mj-lt"/>
-            </a:pPr>
-            <a:r>
-              <a:rPr lang="uk-UA" altLang="ru-RU" sz="2000" dirty="0">
-                <a:solidFill>
-                  <a:schemeClr val="tx1"/>
-                </a:solidFill>
-              </a:rPr>
-              <a:t>Результати пошуку товару та сортування  та фільтрацію за різними параметрами.</a:t>
-            </a:r>
-            <a:endParaRPr lang="uk-UA" altLang="ru-RU" sz="2000" dirty="0">
-              <a:solidFill>
-                <a:schemeClr val="tx1"/>
-              </a:solidFill>
+              <a:latin typeface="Calibri" panose="020F0502020204030204" charset="0"/>
+              <a:cs typeface="Calibri" panose="020F0502020204030204" charset="0"/>
             </a:endParaRPr>
           </a:p>
         </p:txBody>
@@ -5179,197 +6596,78 @@
         <p:cNvGrpSpPr/>
         <p:nvPr/>
       </p:nvGrpSpPr>
-      <p:grpSpPr>
-        <a:xfrm>
-          <a:off x="0" y="0"/>
-          <a:ext cx="0" cy="0"/>
-          <a:chOff x="0" y="0"/>
-          <a:chExt cx="0" cy="0"/>
-        </a:xfrm>
-      </p:grpSpPr>
-      <p:sp>
-        <p:nvSpPr>
-          <p:cNvPr id="2" name="Заголовок 1"/>
-          <p:cNvSpPr>
-            <a:spLocks noGrp="1"/>
-          </p:cNvSpPr>
-          <p:nvPr>
-            <p:ph type="ctrTitle"/>
-          </p:nvPr>
-        </p:nvSpPr>
-        <p:spPr>
-          <a:xfrm>
-            <a:off x="467544" y="692696"/>
-            <a:ext cx="7772400" cy="1470025"/>
-          </a:xfrm>
-        </p:spPr>
-        <p:txBody>
-          <a:bodyPr>
-            <a:normAutofit fontScale="90000"/>
-          </a:bodyPr>
-          <a:lstStyle/>
-          <a:p>
-            <a:r>
-              <a:rPr lang="ru-RU" b="1" dirty="0" err="1"/>
-              <a:t>Вихідні</a:t>
-            </a:r>
-            <a:r>
-              <a:rPr lang="ru-RU" b="1" dirty="0"/>
-              <a:t> </a:t>
-            </a:r>
-            <a:r>
-              <a:rPr lang="ru-RU" b="1" dirty="0" err="1"/>
-              <a:t>дані</a:t>
-            </a:r>
-            <a:r>
-              <a:rPr lang="ru-RU" b="1" dirty="0"/>
-              <a:t> до </a:t>
-            </a:r>
-            <a:r>
-              <a:rPr lang="ru-RU" b="1" dirty="0" err="1"/>
-              <a:t>проєкту</a:t>
-            </a:r>
-            <a:br>
-              <a:rPr lang="ru-RU" dirty="0"/>
-            </a:br>
-            <a:br>
-              <a:rPr lang="ru-RU" dirty="0"/>
-            </a:br>
-            <a:endParaRPr lang="ru-RU" dirty="0"/>
-          </a:p>
-        </p:txBody>
-      </p:sp>
-      <p:sp>
-        <p:nvSpPr>
-          <p:cNvPr id="3" name="Подзаголовок 2"/>
-          <p:cNvSpPr>
-            <a:spLocks noGrp="1"/>
-          </p:cNvSpPr>
-          <p:nvPr>
-            <p:ph type="subTitle" idx="1"/>
-          </p:nvPr>
-        </p:nvSpPr>
-        <p:spPr>
-          <a:xfrm>
-            <a:off x="251520" y="1772816"/>
-            <a:ext cx="8496944" cy="5688632"/>
-          </a:xfrm>
-        </p:spPr>
-        <p:txBody>
-          <a:bodyPr>
-            <a:normAutofit/>
-          </a:bodyPr>
-          <a:lstStyle/>
-          <a:p>
-            <a:pPr marL="457200" lvl="0" indent="-457200" algn="l" fontAlgn="base">
-              <a:buFont typeface="Arial" panose="020B0604020202020204" pitchFamily="34" charset="0"/>
-              <a:buChar char="•"/>
-            </a:pPr>
-            <a:r>
-              <a:rPr lang="uk-UA" sz="2000" dirty="0">
-                <a:solidFill>
-                  <a:schemeClr val="tx1"/>
-                </a:solidFill>
-              </a:rPr>
-              <a:t>Створити базу даних –</a:t>
-            </a:r>
-            <a:r>
-              <a:rPr lang="en-US" sz="2000" dirty="0">
-                <a:solidFill>
-                  <a:schemeClr val="tx1"/>
-                </a:solidFill>
-              </a:rPr>
-              <a:t>Csv file</a:t>
-            </a:r>
-            <a:r>
-              <a:rPr lang="uk-UA" sz="2000" dirty="0">
-                <a:solidFill>
-                  <a:schemeClr val="tx1"/>
-                </a:solidFill>
-              </a:rPr>
-              <a:t>, в який будуть вноситись дані про авто;</a:t>
-            </a:r>
-            <a:endParaRPr lang="ru-RU" sz="2000" dirty="0">
-              <a:solidFill>
-                <a:schemeClr val="tx1"/>
-              </a:solidFill>
-            </a:endParaRPr>
-          </a:p>
-          <a:p>
-            <a:pPr marL="457200" lvl="0" indent="-457200" algn="l" fontAlgn="base">
-              <a:buFont typeface="Arial" panose="020B0604020202020204" pitchFamily="34" charset="0"/>
-              <a:buChar char="•"/>
-            </a:pPr>
-            <a:r>
-              <a:rPr lang="uk-UA" sz="2000" dirty="0">
-                <a:solidFill>
-                  <a:schemeClr val="tx1"/>
-                </a:solidFill>
-              </a:rPr>
-              <a:t>Передбачити ввід та вивід даних через консоль;</a:t>
-            </a:r>
-            <a:endParaRPr lang="ru-RU" sz="2000" dirty="0">
-              <a:solidFill>
-                <a:schemeClr val="tx1"/>
-              </a:solidFill>
-            </a:endParaRPr>
-          </a:p>
-          <a:p>
-            <a:pPr marL="457200" lvl="0" indent="-457200" algn="l" fontAlgn="base">
-              <a:buFont typeface="Arial" panose="020B0604020202020204" pitchFamily="34" charset="0"/>
-              <a:buChar char="•"/>
-            </a:pPr>
-            <a:r>
-              <a:rPr lang="uk-UA" sz="2000" dirty="0">
-                <a:solidFill>
-                  <a:schemeClr val="tx1"/>
-                </a:solidFill>
-              </a:rPr>
-              <a:t>Розробити консольне меню, для виконання функцій програми (додавання, редагування, видалення, перегляд);</a:t>
-            </a:r>
-            <a:endParaRPr lang="ru-RU" sz="2000" dirty="0">
-              <a:solidFill>
-                <a:schemeClr val="tx1"/>
-              </a:solidFill>
-            </a:endParaRPr>
-          </a:p>
-          <a:p>
-            <a:pPr marL="457200" lvl="0" indent="-457200" algn="l" fontAlgn="base">
-              <a:buFont typeface="Arial" panose="020B0604020202020204" pitchFamily="34" charset="0"/>
-              <a:buChar char="•"/>
-            </a:pPr>
-            <a:r>
-              <a:rPr lang="uk-UA" sz="2000" dirty="0">
-                <a:solidFill>
-                  <a:schemeClr val="tx1"/>
-                </a:solidFill>
-              </a:rPr>
-              <a:t>Передбачити сортування та фільтрацію записів з бази даних;</a:t>
-            </a:r>
-            <a:endParaRPr lang="ru-RU" sz="2000" dirty="0">
-              <a:solidFill>
-                <a:schemeClr val="tx1"/>
-              </a:solidFill>
-            </a:endParaRPr>
-          </a:p>
-          <a:p>
-            <a:pPr marL="457200" indent="-457200" algn="l">
-              <a:buFont typeface="Arial" panose="020B0604020202020204" pitchFamily="34" charset="0"/>
-              <a:buChar char="•"/>
-            </a:pPr>
-            <a:r>
-              <a:rPr lang="uk-UA" sz="2000" dirty="0">
-                <a:solidFill>
-                  <a:schemeClr val="tx1"/>
-                </a:solidFill>
-              </a:rPr>
-              <a:t>Передбачити перевірку коректності вводу даних .</a:t>
-            </a:r>
-            <a:endParaRPr lang="ru-RU" sz="2000" dirty="0">
-              <a:solidFill>
-                <a:schemeClr val="tx1"/>
-              </a:solidFill>
-            </a:endParaRPr>
+      <p:grpSpPr/>
+      <p:sp>
+        <p:nvSpPr>
+          <p:cNvPr id="2" name="Title 1"/>
+          <p:cNvSpPr>
+            <a:spLocks noGrp="1"/>
+          </p:cNvSpPr>
+          <p:nvPr>
+            <p:ph type="title"/>
+          </p:nvPr>
+        </p:nvSpPr>
+        <p:spPr/>
+        <p:txBody>
+          <a:bodyPr/>
+          <a:p>
+            <a:r>
+              <a:rPr lang="uk-UA" altLang="en-US" sz="3600" b="1"/>
+              <a:t>Інструментальні засоби</a:t>
+            </a:r>
+            <a:endParaRPr lang="uk-UA" altLang="en-US" sz="3600" b="1"/>
+          </a:p>
+        </p:txBody>
+      </p:sp>
+      <p:sp>
+        <p:nvSpPr>
+          <p:cNvPr id="3" name="Content Placeholder 2"/>
+          <p:cNvSpPr>
+            <a:spLocks noGrp="1"/>
+          </p:cNvSpPr>
+          <p:nvPr>
+            <p:ph idx="1"/>
+          </p:nvPr>
+        </p:nvSpPr>
+        <p:spPr>
+          <a:xfrm>
+            <a:off x="395605" y="1557020"/>
+            <a:ext cx="3869690" cy="4645025"/>
+          </a:xfrm>
+        </p:spPr>
+        <p:txBody>
+          <a:bodyPr/>
+          <a:p>
+            <a:r>
+              <a:rPr lang="en-US" altLang="uk-UA" sz="2800"/>
+              <a:t>OC Windows</a:t>
+            </a:r>
+            <a:endParaRPr lang="en-US" altLang="uk-UA" sz="2800"/>
+          </a:p>
+          <a:p>
+            <a:r>
+              <a:rPr lang="en-US" altLang="uk-UA" sz="2800"/>
+              <a:t>CSV-</a:t>
+            </a:r>
+            <a:r>
+              <a:rPr lang="uk-UA" altLang="uk-UA" sz="2800"/>
+              <a:t>файл</a:t>
+            </a:r>
+            <a:endParaRPr lang="uk-UA" altLang="uk-UA" sz="2800"/>
+          </a:p>
+          <a:p>
+            <a:r>
+              <a:rPr lang="uk-UA" altLang="uk-UA" sz="2800"/>
+              <a:t>С++</a:t>
+            </a:r>
+            <a:endParaRPr lang="uk-UA" altLang="uk-UA" sz="2800"/>
+          </a:p>
+          <a:p>
+            <a:r>
+              <a:rPr lang="en-US" altLang="uk-UA" sz="2800"/>
+              <a:t>Clion</a:t>
+            </a:r>
+            <a:endParaRPr lang="en-US" altLang="uk-UA" sz="2800"/>
           </a:p>
         </p:txBody>
       </p:sp>
@@ -5390,1017 +6688,130 @@
         <p:cNvGrpSpPr/>
         <p:nvPr/>
       </p:nvGrpSpPr>
-      <p:grpSpPr>
-        <a:xfrm>
-          <a:off x="0" y="0"/>
-          <a:ext cx="0" cy="0"/>
-          <a:chOff x="0" y="0"/>
-          <a:chExt cx="0" cy="0"/>
-        </a:xfrm>
-      </p:grpSpPr>
-      <p:sp>
-        <p:nvSpPr>
-          <p:cNvPr id="2" name="Заголовок 1"/>
-          <p:cNvSpPr>
-            <a:spLocks noGrp="1"/>
-          </p:cNvSpPr>
-          <p:nvPr>
-            <p:ph type="ctrTitle"/>
-          </p:nvPr>
-        </p:nvSpPr>
-        <p:spPr>
-          <a:xfrm>
-            <a:off x="683568" y="476672"/>
-            <a:ext cx="7772400" cy="1470025"/>
-          </a:xfrm>
-        </p:spPr>
-        <p:txBody>
-          <a:bodyPr>
-            <a:normAutofit fontScale="90000"/>
-          </a:bodyPr>
-          <a:lstStyle/>
-          <a:p>
-            <a:r>
-              <a:rPr lang="ru-RU" b="1" dirty="0" err="1"/>
-              <a:t>Модулі</a:t>
-            </a:r>
-            <a:r>
-              <a:rPr lang="ru-RU" b="1" dirty="0"/>
-              <a:t> (</a:t>
-            </a:r>
-            <a:r>
-              <a:rPr lang="ru-RU" b="1" dirty="0" err="1"/>
-              <a:t>класи</a:t>
-            </a:r>
-            <a:r>
-              <a:rPr lang="ru-RU" b="1" dirty="0"/>
-              <a:t>) </a:t>
-            </a:r>
-            <a:r>
-              <a:rPr lang="ru-RU" b="1" dirty="0" err="1"/>
-              <a:t>програми</a:t>
-            </a:r>
-            <a:br>
-              <a:rPr lang="ru-RU" dirty="0"/>
-            </a:br>
-            <a:br>
-              <a:rPr lang="ru-RU" dirty="0"/>
-            </a:br>
-            <a:endParaRPr lang="ru-RU" dirty="0"/>
-          </a:p>
-        </p:txBody>
-      </p:sp>
-      <p:sp>
-        <p:nvSpPr>
-          <p:cNvPr id="3" name="Подзаголовок 2"/>
-          <p:cNvSpPr>
-            <a:spLocks noGrp="1"/>
-          </p:cNvSpPr>
-          <p:nvPr>
-            <p:ph type="subTitle" idx="1"/>
-          </p:nvPr>
-        </p:nvSpPr>
-        <p:spPr>
-          <a:xfrm>
-            <a:off x="323528" y="980728"/>
-            <a:ext cx="8568952" cy="5688632"/>
-          </a:xfrm>
-        </p:spPr>
-        <p:txBody>
-          <a:bodyPr>
-            <a:normAutofit fontScale="50000"/>
-          </a:bodyPr>
-          <a:lstStyle/>
-          <a:p>
-            <a:pPr marL="457200" lvl="0" indent="-457200" algn="l">
-              <a:buFont typeface="Arial" panose="020B0604020202020204" pitchFamily="34" charset="0"/>
-              <a:buChar char="•"/>
-            </a:pPr>
-            <a:r>
-              <a:rPr lang="en-US" dirty="0">
-                <a:solidFill>
-                  <a:schemeClr val="tx1"/>
-                </a:solidFill>
-              </a:rPr>
-              <a:t>	</a:t>
-            </a:r>
-            <a:r>
-              <a:rPr lang="en-US" altLang="en-US" dirty="0">
-                <a:solidFill>
-                  <a:schemeClr val="tx1"/>
-                </a:solidFill>
-              </a:rPr>
-              <a:t>Product / StoreItem</a:t>
-            </a:r>
-            <a:r>
-              <a:rPr lang="uk-UA" altLang="en-US" dirty="0">
-                <a:solidFill>
-                  <a:schemeClr val="tx1"/>
-                </a:solidFill>
-              </a:rPr>
-              <a:t> </a:t>
-            </a:r>
-            <a:r>
-              <a:rPr lang="en-US" dirty="0">
-                <a:solidFill>
-                  <a:schemeClr val="tx1"/>
-                </a:solidFill>
-                <a:sym typeface="+mn-ea"/>
-              </a:rPr>
-              <a:t>–</a:t>
-            </a:r>
-            <a:r>
-              <a:rPr lang="uk-UA" altLang="en-US" dirty="0">
-                <a:solidFill>
-                  <a:schemeClr val="tx1"/>
-                </a:solidFill>
-                <a:sym typeface="+mn-ea"/>
-              </a:rPr>
-              <a:t> б</a:t>
-            </a:r>
-            <a:r>
-              <a:rPr lang="en-US" altLang="en-US" dirty="0">
-                <a:solidFill>
-                  <a:schemeClr val="tx1"/>
-                </a:solidFill>
-              </a:rPr>
-              <a:t>азова сутність. Моделює одиничний товар на складі</a:t>
-            </a:r>
-            <a:r>
-              <a:rPr lang="uk-UA" dirty="0">
-                <a:solidFill>
-                  <a:schemeClr val="tx1"/>
-                </a:solidFill>
-              </a:rPr>
-              <a:t>.</a:t>
-            </a:r>
-            <a:endParaRPr lang="uk-UA" dirty="0">
-              <a:solidFill>
-                <a:schemeClr val="tx1"/>
-              </a:solidFill>
-            </a:endParaRPr>
-          </a:p>
-          <a:p>
-            <a:pPr marL="457200" lvl="0" indent="-457200" algn="l">
-              <a:buFont typeface="Arial" panose="020B0604020202020204" pitchFamily="34" charset="0"/>
-              <a:buChar char="•"/>
-            </a:pPr>
-            <a:r>
-              <a:rPr lang="uk-UA" dirty="0">
-                <a:solidFill>
-                  <a:schemeClr val="tx1"/>
-                </a:solidFill>
-              </a:rPr>
-              <a:t>	</a:t>
-            </a:r>
-            <a:r>
-              <a:rPr lang="en-US" altLang="en-US" dirty="0">
-                <a:solidFill>
-                  <a:schemeClr val="tx1"/>
-                </a:solidFill>
-              </a:rPr>
-              <a:t>StoreManager</a:t>
-            </a:r>
-            <a:r>
-              <a:rPr lang="en-US" dirty="0">
-                <a:solidFill>
-                  <a:schemeClr val="tx1"/>
-                </a:solidFill>
-              </a:rPr>
-              <a:t> – </a:t>
-            </a:r>
-            <a:r>
-              <a:rPr lang="en-US" altLang="en-US" dirty="0">
-                <a:solidFill>
-                  <a:schemeClr val="tx1"/>
-                </a:solidFill>
-              </a:rPr>
-              <a:t>Керування колекцією товарів. Реалізує бізнес-логіку: CRUD-операції, завантаження/збереження, пошук, сортування та фільтрація.</a:t>
-            </a:r>
-            <a:endParaRPr lang="uk-UA" dirty="0">
-              <a:solidFill>
-                <a:schemeClr val="tx1"/>
-              </a:solidFill>
-            </a:endParaRPr>
-          </a:p>
-          <a:p>
-            <a:pPr marL="457200" lvl="0" indent="-457200" algn="l">
-              <a:buFont typeface="Arial" panose="020B0604020202020204" pitchFamily="34" charset="0"/>
-              <a:buChar char="•"/>
-            </a:pPr>
-            <a:r>
-              <a:rPr lang="uk-UA" dirty="0">
-                <a:solidFill>
-                  <a:schemeClr val="tx1"/>
-                </a:solidFill>
-              </a:rPr>
-              <a:t>	</a:t>
-            </a:r>
-            <a:r>
-              <a:rPr lang="en-US" altLang="en-US" dirty="0">
-                <a:solidFill>
-                  <a:schemeClr val="tx1"/>
-                </a:solidFill>
-              </a:rPr>
-              <a:t>IPrintable</a:t>
-            </a:r>
-            <a:r>
-              <a:rPr lang="en-US" dirty="0">
-                <a:solidFill>
-                  <a:schemeClr val="tx1"/>
-                </a:solidFill>
-              </a:rPr>
-              <a:t> – </a:t>
-            </a:r>
-            <a:r>
-              <a:rPr lang="uk-UA" altLang="en-US" dirty="0">
-                <a:solidFill>
-                  <a:schemeClr val="tx1"/>
-                </a:solidFill>
-              </a:rPr>
-              <a:t>і</a:t>
-            </a:r>
-            <a:r>
-              <a:rPr lang="en-US" altLang="en-US" dirty="0">
-                <a:solidFill>
-                  <a:schemeClr val="tx1"/>
-                </a:solidFill>
-              </a:rPr>
-              <a:t>нтерфейс</a:t>
-            </a:r>
-            <a:r>
-              <a:rPr lang="uk-UA" altLang="en-US" dirty="0">
-                <a:solidFill>
-                  <a:schemeClr val="tx1"/>
-                </a:solidFill>
-              </a:rPr>
-              <a:t>, в</a:t>
-            </a:r>
-            <a:r>
-              <a:rPr lang="en-US" altLang="en-US" dirty="0">
-                <a:solidFill>
-                  <a:schemeClr val="tx1"/>
-                </a:solidFill>
-              </a:rPr>
-              <a:t>изначає контракт для поліморфного виводу та запису в БД.</a:t>
-            </a:r>
-            <a:endParaRPr lang="en-US" altLang="en-US" dirty="0">
-              <a:solidFill>
-                <a:schemeClr val="tx1"/>
-              </a:solidFill>
-            </a:endParaRPr>
-          </a:p>
-          <a:p>
-            <a:pPr marL="457200" lvl="0" indent="-457200" algn="l">
-              <a:buFont typeface="Arial" panose="020B0604020202020204" pitchFamily="34" charset="0"/>
-              <a:buChar char="•"/>
-            </a:pPr>
-            <a:r>
-              <a:rPr lang="uk-UA" dirty="0">
-                <a:solidFill>
-                  <a:schemeClr val="tx1"/>
-                </a:solidFill>
-              </a:rPr>
-              <a:t>	</a:t>
-            </a:r>
-            <a:r>
-              <a:rPr lang="en-US" altLang="en-US" dirty="0">
-                <a:solidFill>
-                  <a:schemeClr val="tx1"/>
-                </a:solidFill>
-              </a:rPr>
-              <a:t>User</a:t>
-            </a:r>
-            <a:r>
-              <a:rPr lang="en-US" dirty="0">
-                <a:solidFill>
-                  <a:schemeClr val="tx1"/>
-                </a:solidFill>
-              </a:rPr>
-              <a:t> – </a:t>
-            </a:r>
-            <a:r>
-              <a:rPr lang="uk-UA" altLang="en-US" dirty="0">
-                <a:solidFill>
-                  <a:schemeClr val="tx1"/>
-                </a:solidFill>
-              </a:rPr>
-              <a:t>б</a:t>
-            </a:r>
-            <a:r>
-              <a:rPr lang="en-US" altLang="en-US" dirty="0">
-                <a:solidFill>
-                  <a:schemeClr val="tx1"/>
-                </a:solidFill>
-              </a:rPr>
-              <a:t>азовий клас користувача</a:t>
-            </a:r>
-            <a:r>
-              <a:rPr lang="uk-UA" altLang="en-US" dirty="0">
-                <a:solidFill>
-                  <a:schemeClr val="tx1"/>
-                </a:solidFill>
-              </a:rPr>
-              <a:t>,</a:t>
-            </a:r>
-            <a:r>
-              <a:rPr lang="en-US" altLang="en-US" dirty="0">
-                <a:solidFill>
-                  <a:schemeClr val="tx1"/>
-                </a:solidFill>
-              </a:rPr>
-              <a:t> </a:t>
-            </a:r>
-            <a:r>
-              <a:rPr lang="uk-UA" altLang="en-US" dirty="0">
-                <a:solidFill>
-                  <a:schemeClr val="tx1"/>
-                </a:solidFill>
-              </a:rPr>
-              <a:t>м</a:t>
-            </a:r>
-            <a:r>
-              <a:rPr lang="en-US" altLang="en-US" dirty="0">
-                <a:solidFill>
-                  <a:schemeClr val="tx1"/>
-                </a:solidFill>
-              </a:rPr>
-              <a:t>істить загальні атрибути та, ймовірно, методи авторизації.</a:t>
-            </a:r>
-            <a:endParaRPr lang="en-US" altLang="en-US" dirty="0">
-              <a:solidFill>
-                <a:schemeClr val="tx1"/>
-              </a:solidFill>
-            </a:endParaRPr>
-          </a:p>
-          <a:p>
-            <a:pPr marL="457200" lvl="0" indent="-457200" algn="l">
-              <a:buFont typeface="Arial" panose="020B0604020202020204" pitchFamily="34" charset="0"/>
-              <a:buChar char="•"/>
-            </a:pPr>
-            <a:r>
-              <a:rPr lang="uk-UA" dirty="0">
-                <a:solidFill>
-                  <a:schemeClr val="tx1"/>
-                </a:solidFill>
-              </a:rPr>
-              <a:t>	</a:t>
-            </a:r>
-            <a:r>
-              <a:rPr lang="en-US" altLang="en-US" dirty="0">
-                <a:solidFill>
-                  <a:schemeClr val="tx1"/>
-                </a:solidFill>
-              </a:rPr>
-              <a:t>Admin / BasicUser</a:t>
-            </a:r>
-            <a:r>
-              <a:rPr lang="en-US" dirty="0">
-                <a:solidFill>
-                  <a:schemeClr val="tx1"/>
-                </a:solidFill>
-              </a:rPr>
-              <a:t> – </a:t>
-            </a:r>
-            <a:r>
-              <a:rPr lang="uk-UA" altLang="en-US" dirty="0">
-                <a:solidFill>
-                  <a:schemeClr val="tx1"/>
-                </a:solidFill>
-              </a:rPr>
-              <a:t>к</a:t>
-            </a:r>
-            <a:r>
-              <a:rPr lang="en-US" altLang="en-US" dirty="0">
-                <a:solidFill>
-                  <a:schemeClr val="tx1"/>
-                </a:solidFill>
-              </a:rPr>
-              <a:t>атегорії користувачів</a:t>
-            </a:r>
-            <a:r>
-              <a:rPr lang="uk-UA" altLang="en-US" dirty="0">
-                <a:solidFill>
-                  <a:schemeClr val="tx1"/>
-                </a:solidFill>
-              </a:rPr>
-              <a:t>,</a:t>
-            </a:r>
-            <a:r>
-              <a:rPr lang="en-US" altLang="en-US" dirty="0">
-                <a:solidFill>
-                  <a:schemeClr val="tx1"/>
-                </a:solidFill>
-              </a:rPr>
-              <a:t> </a:t>
-            </a:r>
-            <a:r>
-              <a:rPr lang="uk-UA" altLang="en-US" dirty="0">
-                <a:solidFill>
-                  <a:schemeClr val="tx1"/>
-                </a:solidFill>
-              </a:rPr>
-              <a:t>в</a:t>
-            </a:r>
-            <a:r>
-              <a:rPr lang="en-US" altLang="en-US" dirty="0">
-                <a:solidFill>
-                  <a:schemeClr val="tx1"/>
-                </a:solidFill>
-              </a:rPr>
-              <a:t>изначають різні рівні прав доступу до функціоналу програми (наприклад, BasicUser </a:t>
-            </a:r>
-            <a:r>
-              <a:rPr lang="en-US" dirty="0">
-                <a:solidFill>
-                  <a:schemeClr val="tx1"/>
-                </a:solidFill>
-                <a:sym typeface="+mn-ea"/>
-              </a:rPr>
-              <a:t> – </a:t>
-            </a:r>
-            <a:r>
-              <a:rPr lang="en-US" altLang="en-US" dirty="0">
-                <a:solidFill>
-                  <a:schemeClr val="tx1"/>
-                </a:solidFill>
-              </a:rPr>
-              <a:t> Касир, Admin </a:t>
-            </a:r>
-            <a:r>
-              <a:rPr lang="en-US" dirty="0">
-                <a:solidFill>
-                  <a:schemeClr val="tx1"/>
-                </a:solidFill>
-                <a:sym typeface="+mn-ea"/>
-              </a:rPr>
-              <a:t> – </a:t>
-            </a:r>
-            <a:r>
-              <a:rPr lang="en-US" altLang="en-US" dirty="0">
-                <a:solidFill>
-                  <a:schemeClr val="tx1"/>
-                </a:solidFill>
-              </a:rPr>
-              <a:t> Управління).</a:t>
-            </a:r>
-            <a:endParaRPr lang="en-US" altLang="en-US" dirty="0">
-              <a:solidFill>
-                <a:schemeClr val="tx1"/>
-              </a:solidFill>
-            </a:endParaRPr>
-          </a:p>
-          <a:p>
-            <a:pPr marL="457200" lvl="0" indent="-457200" algn="l">
-              <a:buFont typeface="Arial" panose="020B0604020202020204" pitchFamily="34" charset="0"/>
-              <a:buChar char="•"/>
-            </a:pPr>
-            <a:r>
-              <a:rPr lang="en-US" altLang="en-US" dirty="0">
-                <a:solidFill>
-                  <a:schemeClr val="tx1"/>
-                </a:solidFill>
-              </a:rPr>
-              <a:t>AuthManager </a:t>
-            </a:r>
-            <a:r>
-              <a:rPr lang="en-US" dirty="0">
-                <a:solidFill>
-                  <a:schemeClr val="tx1"/>
-                </a:solidFill>
-                <a:sym typeface="+mn-ea"/>
-              </a:rPr>
-              <a:t> – </a:t>
-            </a:r>
-            <a:r>
-              <a:rPr lang="uk-UA" altLang="en-US" dirty="0">
-                <a:solidFill>
-                  <a:schemeClr val="tx1"/>
-                </a:solidFill>
-                <a:sym typeface="+mn-ea"/>
-              </a:rPr>
-              <a:t>у</a:t>
-            </a:r>
-            <a:r>
-              <a:rPr lang="en-US" altLang="en-US" dirty="0">
-                <a:solidFill>
-                  <a:schemeClr val="tx1"/>
-                </a:solidFill>
-              </a:rPr>
-              <a:t>правління авторизацією</a:t>
-            </a:r>
-            <a:r>
-              <a:rPr lang="uk-UA" altLang="en-US" dirty="0">
-                <a:solidFill>
-                  <a:schemeClr val="tx1"/>
-                </a:solidFill>
-              </a:rPr>
-              <a:t>,</a:t>
-            </a:r>
-            <a:r>
-              <a:rPr lang="en-US" altLang="en-US" dirty="0">
-                <a:solidFill>
-                  <a:schemeClr val="tx1"/>
-                </a:solidFill>
-              </a:rPr>
-              <a:t> </a:t>
-            </a:r>
-            <a:r>
-              <a:rPr lang="uk-UA" altLang="en-US" dirty="0">
-                <a:solidFill>
-                  <a:schemeClr val="tx1"/>
-                </a:solidFill>
-              </a:rPr>
-              <a:t>к</a:t>
-            </a:r>
-            <a:r>
-              <a:rPr lang="en-US" altLang="en-US" dirty="0">
-                <a:solidFill>
-                  <a:schemeClr val="tx1"/>
-                </a:solidFill>
-              </a:rPr>
-              <a:t>ерує процесом входу, перевіряє облікові дані та визначає права доступу користувача.</a:t>
-            </a:r>
-            <a:endParaRPr lang="en-US" altLang="en-US" dirty="0">
-              <a:solidFill>
-                <a:schemeClr val="tx1"/>
-              </a:solidFill>
-            </a:endParaRPr>
-          </a:p>
-          <a:p>
-            <a:pPr marL="457200" lvl="0" indent="-457200" algn="l">
-              <a:buFont typeface="Arial" panose="020B0604020202020204" pitchFamily="34" charset="0"/>
-              <a:buChar char="•"/>
-            </a:pPr>
-            <a:r>
-              <a:rPr lang="en-US" altLang="en-US" dirty="0">
-                <a:solidFill>
-                  <a:schemeClr val="tx1"/>
-                </a:solidFill>
-              </a:rPr>
-              <a:t>Receipt</a:t>
-            </a:r>
-            <a:r>
-              <a:rPr lang="uk-UA" altLang="en-US" dirty="0">
-                <a:solidFill>
-                  <a:schemeClr val="tx1"/>
-                </a:solidFill>
-              </a:rPr>
-              <a:t> </a:t>
-            </a:r>
-            <a:r>
-              <a:rPr lang="en-US" dirty="0">
-                <a:solidFill>
-                  <a:schemeClr val="tx1"/>
-                </a:solidFill>
-                <a:sym typeface="+mn-ea"/>
-              </a:rPr>
-              <a:t> –</a:t>
-            </a:r>
-            <a:r>
-              <a:rPr lang="uk-UA" altLang="en-US" dirty="0">
-                <a:solidFill>
-                  <a:schemeClr val="tx1"/>
-                </a:solidFill>
-                <a:sym typeface="+mn-ea"/>
-              </a:rPr>
-              <a:t> ф</a:t>
-            </a:r>
-            <a:r>
-              <a:rPr lang="en-US" altLang="en-US" dirty="0">
-                <a:solidFill>
-                  <a:schemeClr val="tx1"/>
-                </a:solidFill>
-                <a:sym typeface="+mn-ea"/>
-              </a:rPr>
-              <a:t>іскальний чек / Квитанція</a:t>
-            </a:r>
-            <a:r>
-              <a:rPr lang="uk-UA" altLang="en-US" dirty="0">
-                <a:solidFill>
-                  <a:schemeClr val="tx1"/>
-                </a:solidFill>
-                <a:sym typeface="+mn-ea"/>
-              </a:rPr>
-              <a:t>,</a:t>
-            </a:r>
-            <a:r>
-              <a:rPr lang="en-US" altLang="en-US" dirty="0">
-                <a:solidFill>
-                  <a:schemeClr val="tx1"/>
-                </a:solidFill>
-                <a:sym typeface="+mn-ea"/>
-              </a:rPr>
-              <a:t> </a:t>
-            </a:r>
-            <a:r>
-              <a:rPr lang="uk-UA" altLang="en-US" dirty="0">
-                <a:solidFill>
-                  <a:schemeClr val="tx1"/>
-                </a:solidFill>
-                <a:sym typeface="+mn-ea"/>
-              </a:rPr>
-              <a:t>к</a:t>
-            </a:r>
-            <a:r>
-              <a:rPr lang="en-US" altLang="en-US" dirty="0">
-                <a:solidFill>
-                  <a:schemeClr val="tx1"/>
-                </a:solidFill>
-                <a:sym typeface="+mn-ea"/>
-              </a:rPr>
-              <a:t>лас для моделювання одиниці продажу (транзакції) та фіксації куплених товарів.</a:t>
-            </a:r>
-            <a:endParaRPr lang="en-US" altLang="en-US" dirty="0">
-              <a:solidFill>
-                <a:schemeClr val="tx1"/>
-              </a:solidFill>
-              <a:sym typeface="+mn-ea"/>
-            </a:endParaRPr>
-          </a:p>
-          <a:p>
-            <a:pPr marL="457200" lvl="0" indent="-457200" algn="l">
-              <a:buFont typeface="Arial" panose="020B0604020202020204" pitchFamily="34" charset="0"/>
-              <a:buChar char="•"/>
-            </a:pPr>
-            <a:r>
-              <a:rPr lang="en-US" altLang="en-US" dirty="0">
-                <a:solidFill>
-                  <a:schemeClr val="tx1"/>
-                </a:solidFill>
-                <a:sym typeface="+mn-ea"/>
-              </a:rPr>
-              <a:t>SaleProcessor</a:t>
-            </a:r>
-            <a:r>
-              <a:rPr lang="uk-UA" altLang="en-US" dirty="0">
-                <a:solidFill>
-                  <a:schemeClr val="tx1"/>
-                </a:solidFill>
-                <a:sym typeface="+mn-ea"/>
-              </a:rPr>
-              <a:t> </a:t>
-            </a:r>
-            <a:r>
-              <a:rPr lang="en-US" dirty="0">
-                <a:solidFill>
-                  <a:schemeClr val="tx1"/>
-                </a:solidFill>
-                <a:sym typeface="+mn-ea"/>
-              </a:rPr>
-              <a:t>–</a:t>
-            </a:r>
-            <a:r>
-              <a:rPr lang="uk-UA" altLang="en-US" dirty="0">
-                <a:solidFill>
-                  <a:schemeClr val="tx1"/>
-                </a:solidFill>
-                <a:sym typeface="+mn-ea"/>
-              </a:rPr>
-              <a:t> </a:t>
-            </a:r>
-            <a:r>
-              <a:rPr lang="en-US" altLang="en-US" dirty="0">
-                <a:solidFill>
-                  <a:schemeClr val="tx1"/>
-                </a:solidFill>
-                <a:sym typeface="+mn-ea"/>
-              </a:rPr>
-              <a:t>Обробка продажів</a:t>
-            </a:r>
-            <a:r>
-              <a:rPr lang="uk-UA" altLang="en-US" dirty="0">
-                <a:solidFill>
-                  <a:schemeClr val="tx1"/>
-                </a:solidFill>
-                <a:sym typeface="+mn-ea"/>
-              </a:rPr>
-              <a:t>,</a:t>
-            </a:r>
-            <a:r>
-              <a:rPr lang="en-US" altLang="en-US" dirty="0">
-                <a:solidFill>
-                  <a:schemeClr val="tx1"/>
-                </a:solidFill>
-                <a:sym typeface="+mn-ea"/>
-              </a:rPr>
-              <a:t> </a:t>
-            </a:r>
-            <a:r>
-              <a:rPr lang="uk-UA" altLang="en-US" dirty="0">
-                <a:solidFill>
-                  <a:schemeClr val="tx1"/>
-                </a:solidFill>
-                <a:sym typeface="+mn-ea"/>
-              </a:rPr>
-              <a:t>м</a:t>
-            </a:r>
-            <a:r>
-              <a:rPr lang="en-US" altLang="en-US" dirty="0">
-                <a:solidFill>
-                  <a:schemeClr val="tx1"/>
-                </a:solidFill>
-                <a:sym typeface="+mn-ea"/>
-              </a:rPr>
-              <a:t>істить логіку оформлення покупки (продажу) та керує створенням об'єктів Receipt</a:t>
-            </a:r>
-            <a:r>
-              <a:rPr lang="uk-UA" altLang="en-US" dirty="0">
-                <a:solidFill>
-                  <a:schemeClr val="tx1"/>
-                </a:solidFill>
-                <a:sym typeface="+mn-ea"/>
-              </a:rPr>
-              <a:t>.</a:t>
-            </a:r>
-            <a:endParaRPr lang="en-US" altLang="en-US" dirty="0">
-              <a:solidFill>
-                <a:schemeClr val="tx1"/>
-              </a:solidFill>
-              <a:sym typeface="+mn-ea"/>
-            </a:endParaRPr>
-          </a:p>
-          <a:p>
-            <a:pPr marL="457200" lvl="0" indent="-457200" algn="l">
-              <a:buFont typeface="Arial" panose="020B0604020202020204" pitchFamily="34" charset="0"/>
-              <a:buChar char="•"/>
-            </a:pPr>
-            <a:r>
-              <a:rPr lang="en-US" altLang="en-US" dirty="0">
-                <a:solidFill>
-                  <a:schemeClr val="tx1"/>
-                </a:solidFill>
-                <a:sym typeface="+mn-ea"/>
-              </a:rPr>
-              <a:t>Logger</a:t>
-            </a:r>
-            <a:r>
-              <a:rPr lang="uk-UA" altLang="en-US" dirty="0">
-                <a:solidFill>
-                  <a:schemeClr val="tx1"/>
-                </a:solidFill>
-                <a:sym typeface="+mn-ea"/>
-              </a:rPr>
-              <a:t> </a:t>
-            </a:r>
-            <a:r>
-              <a:rPr lang="en-US" dirty="0">
-                <a:solidFill>
-                  <a:schemeClr val="tx1"/>
-                </a:solidFill>
-                <a:sym typeface="+mn-ea"/>
-              </a:rPr>
-              <a:t> –</a:t>
-            </a:r>
-            <a:r>
-              <a:rPr lang="uk-UA" altLang="en-US" dirty="0">
-                <a:solidFill>
-                  <a:schemeClr val="tx1"/>
-                </a:solidFill>
-                <a:sym typeface="+mn-ea"/>
-              </a:rPr>
-              <a:t> </a:t>
-            </a:r>
-            <a:r>
-              <a:rPr lang="en-US" altLang="en-US" dirty="0">
-                <a:solidFill>
-                  <a:schemeClr val="tx1"/>
-                </a:solidFill>
-                <a:sym typeface="+mn-ea"/>
-              </a:rPr>
-              <a:t>Журналювання подій</a:t>
-            </a:r>
-            <a:r>
-              <a:rPr lang="uk-UA" altLang="en-US" dirty="0">
-                <a:solidFill>
-                  <a:schemeClr val="tx1"/>
-                </a:solidFill>
-                <a:sym typeface="+mn-ea"/>
-              </a:rPr>
-              <a:t>, в</a:t>
-            </a:r>
-            <a:r>
-              <a:rPr lang="en-US" altLang="en-US" dirty="0">
-                <a:solidFill>
-                  <a:schemeClr val="tx1"/>
-                </a:solidFill>
-                <a:sym typeface="+mn-ea"/>
-              </a:rPr>
-              <a:t>икористовується для запису важливих операцій або помилок програми</a:t>
-            </a:r>
-            <a:r>
-              <a:rPr lang="uk-UA" altLang="en-US" dirty="0">
-                <a:solidFill>
-                  <a:schemeClr val="tx1"/>
-                </a:solidFill>
-                <a:sym typeface="+mn-ea"/>
-              </a:rPr>
-              <a:t>.</a:t>
-            </a:r>
-            <a:endParaRPr lang="uk-UA" altLang="en-US" dirty="0">
-              <a:solidFill>
-                <a:schemeClr val="tx1"/>
-              </a:solidFill>
-              <a:sym typeface="+mn-ea"/>
-            </a:endParaRPr>
-          </a:p>
-          <a:p>
-            <a:pPr marL="457200" lvl="0" indent="-457200" algn="l">
-              <a:buFont typeface="Arial" panose="020B0604020202020204" pitchFamily="34" charset="0"/>
-              <a:buChar char="•"/>
-            </a:pPr>
-            <a:r>
-              <a:rPr lang="en-US" altLang="en-US" dirty="0">
-                <a:solidFill>
-                  <a:schemeClr val="tx1"/>
-                </a:solidFill>
-                <a:sym typeface="+mn-ea"/>
-              </a:rPr>
-              <a:t>Configuration</a:t>
-            </a:r>
-            <a:r>
-              <a:rPr lang="uk-UA" altLang="en-US" dirty="0">
-                <a:solidFill>
-                  <a:schemeClr val="tx1"/>
-                </a:solidFill>
-                <a:sym typeface="+mn-ea"/>
-              </a:rPr>
-              <a:t> </a:t>
-            </a:r>
-            <a:r>
-              <a:rPr lang="en-US" dirty="0">
-                <a:solidFill>
-                  <a:schemeClr val="tx1"/>
-                </a:solidFill>
-                <a:sym typeface="+mn-ea"/>
-              </a:rPr>
-              <a:t> –</a:t>
-            </a:r>
-            <a:r>
-              <a:rPr lang="uk-UA" altLang="en-US" dirty="0">
-                <a:solidFill>
-                  <a:schemeClr val="tx1"/>
-                </a:solidFill>
-                <a:sym typeface="+mn-ea"/>
-              </a:rPr>
-              <a:t> </a:t>
-            </a:r>
-            <a:r>
-              <a:rPr lang="en-US" altLang="en-US" dirty="0">
-                <a:solidFill>
-                  <a:schemeClr val="tx1"/>
-                </a:solidFill>
-                <a:sym typeface="+mn-ea"/>
-              </a:rPr>
-              <a:t>Налаштування програми</a:t>
-            </a:r>
-            <a:r>
-              <a:rPr lang="uk-UA" altLang="en-US" dirty="0">
-                <a:solidFill>
-                  <a:schemeClr val="tx1"/>
-                </a:solidFill>
-                <a:sym typeface="+mn-ea"/>
-              </a:rPr>
-              <a:t>,</a:t>
-            </a:r>
-            <a:r>
-              <a:rPr lang="en-US" altLang="en-US" dirty="0">
-                <a:solidFill>
-                  <a:schemeClr val="tx1"/>
-                </a:solidFill>
-                <a:sym typeface="+mn-ea"/>
-              </a:rPr>
-              <a:t> </a:t>
-            </a:r>
-            <a:r>
-              <a:rPr lang="uk-UA" altLang="en-US" dirty="0">
-                <a:solidFill>
-                  <a:schemeClr val="tx1"/>
-                </a:solidFill>
-                <a:sym typeface="+mn-ea"/>
-              </a:rPr>
-              <a:t>м</a:t>
-            </a:r>
-            <a:r>
-              <a:rPr lang="en-US" altLang="en-US" dirty="0">
-                <a:solidFill>
-                  <a:schemeClr val="tx1"/>
-                </a:solidFill>
-                <a:sym typeface="+mn-ea"/>
-              </a:rPr>
-              <a:t>істить конфігураційні параметри, які можуть бути універсальними для Windows та Linux</a:t>
-            </a:r>
-            <a:r>
-              <a:rPr lang="uk-UA" altLang="en-US" dirty="0">
-                <a:solidFill>
-                  <a:schemeClr val="tx1"/>
-                </a:solidFill>
-                <a:sym typeface="+mn-ea"/>
-              </a:rPr>
-              <a:t>.</a:t>
-            </a:r>
-            <a:endParaRPr lang="uk-UA" altLang="en-US" dirty="0">
-              <a:solidFill>
-                <a:schemeClr val="tx1"/>
-              </a:solidFill>
-              <a:sym typeface="+mn-ea"/>
-            </a:endParaRPr>
-          </a:p>
-          <a:p>
-            <a:pPr marL="457200" lvl="0" indent="-457200" algn="l">
-              <a:buFont typeface="Arial" panose="020B0604020202020204" pitchFamily="34" charset="0"/>
-              <a:buChar char="•"/>
-            </a:pPr>
-            <a:r>
-              <a:rPr lang="en-US" altLang="en-US" dirty="0">
-                <a:solidFill>
-                  <a:schemeClr val="tx1"/>
-                </a:solidFill>
-                <a:sym typeface="+mn-ea"/>
-              </a:rPr>
-              <a:t>main.cpp</a:t>
-            </a:r>
-            <a:r>
-              <a:rPr lang="uk-UA" altLang="en-US" dirty="0">
-                <a:solidFill>
-                  <a:schemeClr val="tx1"/>
-                </a:solidFill>
-                <a:sym typeface="+mn-ea"/>
-              </a:rPr>
-              <a:t> </a:t>
-            </a:r>
-            <a:r>
-              <a:rPr lang="en-US" dirty="0">
-                <a:solidFill>
-                  <a:schemeClr val="tx1"/>
-                </a:solidFill>
-                <a:sym typeface="+mn-ea"/>
-              </a:rPr>
-              <a:t>–</a:t>
-            </a:r>
-            <a:r>
-              <a:rPr lang="uk-UA" altLang="en-US" dirty="0">
-                <a:solidFill>
-                  <a:schemeClr val="tx1"/>
-                </a:solidFill>
-                <a:sym typeface="+mn-ea"/>
-              </a:rPr>
-              <a:t> </a:t>
-            </a:r>
-            <a:r>
-              <a:rPr lang="en-US" altLang="en-US" dirty="0">
-                <a:solidFill>
-                  <a:schemeClr val="tx1"/>
-                </a:solidFill>
-                <a:sym typeface="+mn-ea"/>
-              </a:rPr>
-              <a:t>Точка входу</a:t>
-            </a:r>
-            <a:r>
-              <a:rPr lang="uk-UA" altLang="en-US" dirty="0">
-                <a:solidFill>
-                  <a:schemeClr val="tx1"/>
-                </a:solidFill>
-                <a:sym typeface="+mn-ea"/>
-              </a:rPr>
-              <a:t>,</a:t>
-            </a:r>
-            <a:r>
-              <a:rPr lang="en-US" altLang="en-US" dirty="0">
-                <a:solidFill>
-                  <a:schemeClr val="tx1"/>
-                </a:solidFill>
-                <a:sym typeface="+mn-ea"/>
-              </a:rPr>
-              <a:t> </a:t>
-            </a:r>
-            <a:r>
-              <a:rPr lang="uk-UA" altLang="en-US" dirty="0">
-                <a:solidFill>
-                  <a:schemeClr val="tx1"/>
-                </a:solidFill>
-                <a:sym typeface="+mn-ea"/>
-              </a:rPr>
-              <a:t>і</a:t>
-            </a:r>
-            <a:r>
-              <a:rPr lang="en-US" altLang="en-US" dirty="0">
-                <a:solidFill>
-                  <a:schemeClr val="tx1"/>
-                </a:solidFill>
-                <a:sym typeface="+mn-ea"/>
-              </a:rPr>
-              <a:t>ніціалізує програму, завантажує дані, запускає головне меню та обробляє цикл роботи.</a:t>
-            </a:r>
-            <a:endParaRPr lang="en-US" altLang="en-US" dirty="0">
-              <a:solidFill>
-                <a:schemeClr val="tx1"/>
-              </a:solidFill>
-              <a:sym typeface="+mn-ea"/>
-            </a:endParaRPr>
-          </a:p>
-        </p:txBody>
-      </p:sp>
+      <p:grpSpPr/>
+      <p:sp>
+        <p:nvSpPr>
+          <p:cNvPr id="2" name="Title 1"/>
+          <p:cNvSpPr>
+            <a:spLocks noGrp="1"/>
+          </p:cNvSpPr>
+          <p:nvPr>
+            <p:ph type="title"/>
+          </p:nvPr>
+        </p:nvSpPr>
+        <p:spPr>
+          <a:xfrm>
+            <a:off x="457200" y="-27305"/>
+            <a:ext cx="8229600" cy="707390"/>
+          </a:xfrm>
+        </p:spPr>
+        <p:txBody>
+          <a:bodyPr/>
+          <a:p>
+            <a:r>
+              <a:rPr lang="uk-UA" sz="3600" b="1"/>
+              <a:t>Сценарій використання</a:t>
+            </a:r>
+            <a:endParaRPr lang="uk-UA" sz="3600" b="1"/>
+          </a:p>
+        </p:txBody>
+      </p:sp>
+      <p:pic>
+        <p:nvPicPr>
+          <p:cNvPr id="4" name="Picture 3"/>
+          <p:cNvPicPr>
+            <a:picLocks noChangeAspect="1"/>
+          </p:cNvPicPr>
+          <p:nvPr/>
+        </p:nvPicPr>
+        <p:blipFill>
+          <a:blip r:embed="rId1"/>
+          <a:stretch>
+            <a:fillRect/>
+          </a:stretch>
+        </p:blipFill>
+        <p:spPr>
+          <a:xfrm>
+            <a:off x="35560" y="620395"/>
+            <a:ext cx="4446270" cy="2354580"/>
+          </a:xfrm>
+          <a:prstGeom prst="rect">
+            <a:avLst/>
+          </a:prstGeom>
+        </p:spPr>
+      </p:pic>
+      <p:pic>
+        <p:nvPicPr>
+          <p:cNvPr id="5" name="Picture 4"/>
+          <p:cNvPicPr>
+            <a:picLocks noChangeAspect="1"/>
+          </p:cNvPicPr>
+          <p:nvPr/>
+        </p:nvPicPr>
+        <p:blipFill>
+          <a:blip r:embed="rId2"/>
+          <a:stretch>
+            <a:fillRect/>
+          </a:stretch>
+        </p:blipFill>
+        <p:spPr>
+          <a:xfrm>
+            <a:off x="4643755" y="620395"/>
+            <a:ext cx="4329430" cy="2343150"/>
+          </a:xfrm>
+          <a:prstGeom prst="rect">
+            <a:avLst/>
+          </a:prstGeom>
+        </p:spPr>
+      </p:pic>
+      <p:pic>
+        <p:nvPicPr>
+          <p:cNvPr id="6" name="Picture 5"/>
+          <p:cNvPicPr>
+            <a:picLocks noChangeAspect="1"/>
+          </p:cNvPicPr>
+          <p:nvPr/>
+        </p:nvPicPr>
+        <p:blipFill>
+          <a:blip r:embed="rId3"/>
+          <a:stretch>
+            <a:fillRect/>
+          </a:stretch>
+        </p:blipFill>
+        <p:spPr>
+          <a:xfrm>
+            <a:off x="35560" y="3284855"/>
+            <a:ext cx="4377055" cy="2734945"/>
+          </a:xfrm>
+          <a:prstGeom prst="rect">
+            <a:avLst/>
+          </a:prstGeom>
+        </p:spPr>
+      </p:pic>
+      <p:pic>
+        <p:nvPicPr>
+          <p:cNvPr id="8" name="Picture 7"/>
+          <p:cNvPicPr>
+            <a:picLocks noChangeAspect="1"/>
+          </p:cNvPicPr>
+          <p:nvPr/>
+        </p:nvPicPr>
+        <p:blipFill>
+          <a:blip r:embed="rId4"/>
+          <a:stretch>
+            <a:fillRect/>
+          </a:stretch>
+        </p:blipFill>
+        <p:spPr>
+          <a:xfrm>
+            <a:off x="4643755" y="3284855"/>
+            <a:ext cx="4329430" cy="2734945"/>
+          </a:xfrm>
+          <a:prstGeom prst="rect">
+            <a:avLst/>
+          </a:prstGeom>
+        </p:spPr>
+      </p:pic>
     </p:spTree>
   </p:cSld>
   <p:clrMapOvr>
@@ -6418,135 +6829,10 @@
         <p:cNvGrpSpPr/>
         <p:nvPr/>
       </p:nvGrpSpPr>
-      <p:grpSpPr>
-        <a:xfrm>
-          <a:off x="0" y="0"/>
-          <a:ext cx="0" cy="0"/>
-          <a:chOff x="0" y="0"/>
-          <a:chExt cx="0" cy="0"/>
-        </a:xfrm>
-      </p:grpSpPr>
-      <p:sp>
-        <p:nvSpPr>
-          <p:cNvPr id="2" name="Заголовок 1"/>
-          <p:cNvSpPr>
-            <a:spLocks noGrp="1"/>
-          </p:cNvSpPr>
-          <p:nvPr>
-            <p:ph type="title"/>
-          </p:nvPr>
-        </p:nvSpPr>
-        <p:spPr>
-          <a:xfrm>
-            <a:off x="395536" y="548680"/>
-            <a:ext cx="8229600" cy="1143000"/>
-          </a:xfrm>
-        </p:spPr>
-        <p:txBody>
-          <a:bodyPr>
-            <a:normAutofit fontScale="90000"/>
-          </a:bodyPr>
-          <a:lstStyle/>
-          <a:p>
-            <a:r>
-              <a:rPr lang="ru-RU" b="1" dirty="0" err="1"/>
-              <a:t>Алгоритми</a:t>
-            </a:r>
-            <a:r>
-              <a:rPr lang="ru-RU" b="1" dirty="0"/>
-              <a:t> </a:t>
-            </a:r>
-            <a:r>
-              <a:rPr lang="ru-RU" b="1" dirty="0" err="1"/>
-              <a:t>роботи</a:t>
-            </a:r>
-            <a:r>
-              <a:rPr lang="ru-RU" b="1" dirty="0"/>
-              <a:t> </a:t>
-            </a:r>
-            <a:r>
-              <a:rPr lang="ru-RU" b="1" dirty="0" err="1"/>
-              <a:t>програми</a:t>
-            </a:r>
-            <a:br>
-              <a:rPr lang="ru-RU" dirty="0"/>
-            </a:br>
-            <a:br>
-              <a:rPr lang="ru-RU" dirty="0"/>
-            </a:br>
-            <a:endParaRPr lang="ru-RU" dirty="0"/>
-          </a:p>
-        </p:txBody>
-      </p:sp>
-      <p:sp>
-        <p:nvSpPr>
-          <p:cNvPr id="3" name="Объект 2"/>
-          <p:cNvSpPr>
-            <a:spLocks noGrp="1"/>
-          </p:cNvSpPr>
-          <p:nvPr>
-            <p:ph sz="half" idx="1"/>
-          </p:nvPr>
-        </p:nvSpPr>
-        <p:spPr>
-          <a:xfrm>
-            <a:off x="323528" y="980728"/>
-            <a:ext cx="4038600" cy="4525963"/>
-          </a:xfrm>
-        </p:spPr>
-        <p:txBody>
-          <a:bodyPr>
-            <a:normAutofit/>
-          </a:bodyPr>
-          <a:lstStyle/>
-          <a:p>
-            <a:r>
-              <a:rPr lang="uk-UA" sz="1600" dirty="0"/>
-              <a:t>Рисунок 1 – Узагальнена блок-схема алгоритму додавання  об’єкту</a:t>
-            </a:r>
-            <a:endParaRPr lang="uk-UA" sz="1600" dirty="0"/>
-          </a:p>
-          <a:p>
-            <a:endParaRPr lang="ru-RU" sz="1600" dirty="0"/>
-          </a:p>
-        </p:txBody>
-      </p:sp>
-      <p:sp>
-        <p:nvSpPr>
-          <p:cNvPr id="4" name="Объект 3"/>
-          <p:cNvSpPr>
-            <a:spLocks noGrp="1"/>
-          </p:cNvSpPr>
-          <p:nvPr>
-            <p:ph sz="half" idx="2"/>
-          </p:nvPr>
-        </p:nvSpPr>
-        <p:spPr>
-          <a:xfrm>
-            <a:off x="4499992" y="980728"/>
-            <a:ext cx="4038600" cy="4525963"/>
-          </a:xfrm>
-        </p:spPr>
-        <p:txBody>
-          <a:bodyPr>
-            <a:normAutofit/>
-          </a:bodyPr>
-          <a:lstStyle/>
-          <a:p>
-            <a:r>
-              <a:rPr lang="uk-UA" sz="1600" dirty="0"/>
-              <a:t>Рисунок 2 – Узагальнена блок-схема алгоритму редагування об’єкту</a:t>
-            </a:r>
-            <a:endParaRPr lang="uk-UA" sz="1600" dirty="0"/>
-          </a:p>
-          <a:p>
-            <a:endParaRPr lang="ru-RU" sz="1600" dirty="0"/>
-          </a:p>
-        </p:txBody>
-      </p:sp>
+      <p:grpSpPr/>
       <p:pic>
         <p:nvPicPr>
-          <p:cNvPr id="12" name="Picture 4"/>
+          <p:cNvPr id="4" name="Picture 3"/>
           <p:cNvPicPr>
             <a:picLocks noChangeAspect="1"/>
           </p:cNvPicPr>
@@ -6560,21 +6846,17 @@
         </p:blipFill>
         <p:spPr>
           <a:xfrm>
-            <a:off x="1188085" y="1772285"/>
-            <a:ext cx="1814830" cy="4204970"/>
+            <a:off x="179705" y="260350"/>
+            <a:ext cx="4160520" cy="2657475"/>
           </a:xfrm>
           <a:prstGeom prst="rect">
             <a:avLst/>
           </a:prstGeom>
-          <a:noFill/>
-          <a:ln>
-            <a:noFill/>
-          </a:ln>
         </p:spPr>
       </p:pic>
       <p:pic>
         <p:nvPicPr>
-          <p:cNvPr id="7" name="Picture 1"/>
+          <p:cNvPr id="5" name="Picture 4"/>
           <p:cNvPicPr>
             <a:picLocks noChangeAspect="1"/>
           </p:cNvPicPr>
@@ -6588,16 +6870,60 @@
         </p:blipFill>
         <p:spPr>
           <a:xfrm>
-            <a:off x="5507990" y="1916430"/>
-            <a:ext cx="1898015" cy="4339590"/>
+            <a:off x="4500245" y="260350"/>
+            <a:ext cx="4394835" cy="2657475"/>
           </a:xfrm>
           <a:prstGeom prst="rect">
             <a:avLst/>
           </a:prstGeom>
-          <a:noFill/>
-          <a:ln>
-            <a:noFill/>
-          </a:ln>
+        </p:spPr>
+      </p:pic>
+      <p:pic>
+        <p:nvPicPr>
+          <p:cNvPr id="6" name="Picture 5"/>
+          <p:cNvPicPr>
+            <a:picLocks noChangeAspect="1"/>
+          </p:cNvPicPr>
+          <p:nvPr/>
+        </p:nvPicPr>
+        <p:blipFill>
+          <a:blip r:embed="rId3"/>
+          <a:stretch>
+            <a:fillRect/>
+          </a:stretch>
+        </p:blipFill>
+        <p:spPr>
+          <a:xfrm>
+            <a:off x="179705" y="3284855"/>
+            <a:ext cx="4126865" cy="3012440"/>
+          </a:xfrm>
+          <a:prstGeom prst="rect">
+            <a:avLst/>
+          </a:prstGeom>
+        </p:spPr>
+      </p:pic>
+      <p:pic>
+        <p:nvPicPr>
+          <p:cNvPr id="7" name="Picture 6"/>
+          <p:cNvPicPr>
+            <a:picLocks noChangeAspect="1"/>
+          </p:cNvPicPr>
+          <p:nvPr/>
+        </p:nvPicPr>
+        <p:blipFill>
+          <a:blip r:embed="rId4"/>
+          <a:stretch>
+            <a:fillRect/>
+          </a:stretch>
+        </p:blipFill>
+        <p:spPr>
+          <a:xfrm>
+            <a:off x="4500245" y="3284855"/>
+            <a:ext cx="4394200" cy="3013075"/>
+          </a:xfrm>
+          <a:prstGeom prst="rect">
+            <a:avLst/>
+          </a:prstGeom>
         </p:spPr>
       </p:pic>
     </p:spTree>
@@ -6617,85 +6943,10 @@
         <p:cNvGrpSpPr/>
         <p:nvPr/>
       </p:nvGrpSpPr>
-      <p:grpSpPr>
-        <a:xfrm>
-          <a:off x="0" y="0"/>
-          <a:ext cx="0" cy="0"/>
-          <a:chOff x="0" y="0"/>
-          <a:chExt cx="0" cy="0"/>
-        </a:xfrm>
-      </p:grpSpPr>
-      <p:sp>
-        <p:nvSpPr>
-          <p:cNvPr id="3" name="Объект 2"/>
-          <p:cNvSpPr>
-            <a:spLocks noGrp="1"/>
-          </p:cNvSpPr>
-          <p:nvPr>
-            <p:ph sz="half" idx="1"/>
-          </p:nvPr>
-        </p:nvSpPr>
-        <p:spPr>
-          <a:xfrm>
-            <a:off x="530860" y="404495"/>
-            <a:ext cx="3830955" cy="673100"/>
-          </a:xfrm>
-        </p:spPr>
-        <p:txBody>
-          <a:bodyPr/>
-          <a:lstStyle/>
-          <a:p>
-            <a:r>
-              <a:rPr lang="uk-UA" sz="1600" dirty="0"/>
-              <a:t>Рисунок 3 – Узагальнена блок-схема алгоритму видалення об’єкта</a:t>
-            </a:r>
-            <a:endParaRPr lang="ru-RU" sz="1600" dirty="0"/>
-          </a:p>
-          <a:p>
-            <a:pPr marL="0" indent="0">
-              <a:buNone/>
-            </a:pPr>
-            <a:endParaRPr lang="ru-RU" dirty="0"/>
-          </a:p>
-        </p:txBody>
-      </p:sp>
-      <p:sp>
-        <p:nvSpPr>
-          <p:cNvPr id="4" name="Объект 3"/>
-          <p:cNvSpPr>
-            <a:spLocks noGrp="1"/>
-          </p:cNvSpPr>
-          <p:nvPr>
-            <p:ph sz="half" idx="2"/>
-          </p:nvPr>
-        </p:nvSpPr>
-        <p:spPr>
-          <a:xfrm>
-            <a:off x="4572000" y="404495"/>
-            <a:ext cx="4038600" cy="826135"/>
-          </a:xfrm>
-        </p:spPr>
-        <p:txBody>
-          <a:bodyPr/>
-          <a:lstStyle/>
-          <a:p>
-            <a:r>
-              <a:rPr lang="uk-UA" sz="1600" dirty="0"/>
-              <a:t>Рисунок 4 – Узагальнена блок-схема алгоритму перегляду доданих об’єктів та їх сортування</a:t>
-            </a:r>
-            <a:endParaRPr lang="ru-RU" sz="1600" dirty="0"/>
-          </a:p>
-          <a:p>
-            <a:pPr marL="0" indent="0">
-              <a:buNone/>
-            </a:pPr>
-            <a:endParaRPr lang="ru-RU" dirty="0"/>
-          </a:p>
-        </p:txBody>
-      </p:sp>
+      <p:grpSpPr/>
       <p:pic>
         <p:nvPicPr>
-          <p:cNvPr id="18" name="Picture 2"/>
+          <p:cNvPr id="4" name="Picture 3"/>
           <p:cNvPicPr>
             <a:picLocks noChangeAspect="1"/>
           </p:cNvPicPr>
@@ -6709,21 +6960,17 @@
         </p:blipFill>
         <p:spPr>
           <a:xfrm>
-            <a:off x="1184275" y="1484630"/>
-            <a:ext cx="2523490" cy="4320540"/>
+            <a:off x="179705" y="260350"/>
+            <a:ext cx="4184015" cy="2983230"/>
           </a:xfrm>
           <a:prstGeom prst="rect">
             <a:avLst/>
           </a:prstGeom>
-          <a:noFill/>
-          <a:ln>
-            <a:noFill/>
-          </a:ln>
         </p:spPr>
       </p:pic>
       <p:pic>
         <p:nvPicPr>
-          <p:cNvPr id="21" name="Picture 3"/>
+          <p:cNvPr id="5" name="Picture 4"/>
           <p:cNvPicPr>
             <a:picLocks noChangeAspect="1"/>
           </p:cNvPicPr>
@@ -6737,16 +6984,60 @@
         </p:blipFill>
         <p:spPr>
           <a:xfrm>
-            <a:off x="5175885" y="1340485"/>
-            <a:ext cx="2831465" cy="4744720"/>
+            <a:off x="4714240" y="320040"/>
+            <a:ext cx="4148455" cy="2922905"/>
           </a:xfrm>
           <a:prstGeom prst="rect">
             <a:avLst/>
           </a:prstGeom>
-          <a:noFill/>
-          <a:ln>
-            <a:noFill/>
-          </a:ln>
+        </p:spPr>
+      </p:pic>
+      <p:pic>
+        <p:nvPicPr>
+          <p:cNvPr id="6" name="Picture 5"/>
+          <p:cNvPicPr>
+            <a:picLocks noChangeAspect="1"/>
+          </p:cNvPicPr>
+          <p:nvPr/>
+        </p:nvPicPr>
+        <p:blipFill>
+          <a:blip r:embed="rId3"/>
+          <a:stretch>
+            <a:fillRect/>
+          </a:stretch>
+        </p:blipFill>
+        <p:spPr>
+          <a:xfrm>
+            <a:off x="179705" y="3644900"/>
+            <a:ext cx="4184015" cy="2838450"/>
+          </a:xfrm>
+          <a:prstGeom prst="rect">
+            <a:avLst/>
+          </a:prstGeom>
+        </p:spPr>
+      </p:pic>
+      <p:pic>
+        <p:nvPicPr>
+          <p:cNvPr id="7" name="Picture 6"/>
+          <p:cNvPicPr>
+            <a:picLocks noChangeAspect="1"/>
+          </p:cNvPicPr>
+          <p:nvPr/>
+        </p:nvPicPr>
+        <p:blipFill>
+          <a:blip r:embed="rId4"/>
+          <a:stretch>
+            <a:fillRect/>
+          </a:stretch>
+        </p:blipFill>
+        <p:spPr>
+          <a:xfrm>
+            <a:off x="4714240" y="3644900"/>
+            <a:ext cx="4137660" cy="2839085"/>
+          </a:xfrm>
+          <a:prstGeom prst="rect">
+            <a:avLst/>
+          </a:prstGeom>
         </p:spPr>
       </p:pic>
     </p:spTree>
@@ -6767,62 +7058,9 @@
         <p:nvPr/>
       </p:nvGrpSpPr>
       <p:grpSpPr/>
-      <p:sp>
-        <p:nvSpPr>
-          <p:cNvPr id="3" name="Content Placeholder 2"/>
-          <p:cNvSpPr>
-            <a:spLocks noGrp="1"/>
-          </p:cNvSpPr>
-          <p:nvPr>
-            <p:ph sz="half" idx="1"/>
-          </p:nvPr>
-        </p:nvSpPr>
-        <p:spPr>
-          <a:xfrm>
-            <a:off x="2287270" y="332740"/>
-            <a:ext cx="3991610" cy="812800"/>
-          </a:xfrm>
-        </p:spPr>
-        <p:txBody>
-          <a:bodyPr>
-            <a:normAutofit lnSpcReduction="10000"/>
-          </a:bodyPr>
-          <a:p>
-            <a:r>
-              <a:rPr lang="en-US" altLang="en-US" sz="1600"/>
-              <a:t>Рисунок</a:t>
-            </a:r>
-            <a:r>
-              <a:rPr lang="" altLang="en-US" sz="1600"/>
-              <a:t> </a:t>
-            </a:r>
-            <a:r>
-              <a:rPr lang="en-US" altLang="en-US" sz="1600"/>
-              <a:t>5</a:t>
-            </a:r>
-            <a:r>
-              <a:rPr lang="" altLang="en-US" sz="1600"/>
-              <a:t> </a:t>
-            </a:r>
-            <a:r>
-              <a:rPr lang="en-US" altLang="en-US" sz="1600"/>
-              <a:t>– Узагальнена блок-схема алгоритму перегляду доданих об’єктів та їх</a:t>
-            </a:r>
-            <a:r>
-              <a:rPr lang="" altLang="en-US" sz="1600"/>
-              <a:t> </a:t>
-            </a:r>
-            <a:r>
-              <a:rPr lang="en-US" altLang="en-US" sz="1600"/>
-              <a:t>пошуку</a:t>
-            </a:r>
-            <a:endParaRPr lang="en-US" altLang="en-US" sz="1600"/>
-          </a:p>
-        </p:txBody>
-      </p:sp>
       <p:pic>
         <p:nvPicPr>
-          <p:cNvPr id="5" name="Picture 1"/>
+          <p:cNvPr id="4" name="Picture 3"/>
           <p:cNvPicPr>
             <a:picLocks noChangeAspect="1"/>
           </p:cNvPicPr>
@@ -6836,16 +7074,12 @@
         </p:blipFill>
         <p:spPr>
           <a:xfrm>
-            <a:off x="2915920" y="1145540"/>
-            <a:ext cx="3024505" cy="5497830"/>
+            <a:off x="251460" y="404495"/>
+            <a:ext cx="4488180" cy="2705735"/>
           </a:xfrm>
           <a:prstGeom prst="rect">
             <a:avLst/>
           </a:prstGeom>
-          <a:noFill/>
-          <a:ln>
-            <a:noFill/>
-          </a:ln>
         </p:spPr>
       </p:pic>
     </p:spTree>
@@ -6880,13 +7114,13 @@
             <a:spLocks noGrp="1"/>
           </p:cNvSpPr>
           <p:nvPr>
-            <p:ph type="ctrTitle"/>
-          </p:nvPr>
-        </p:nvSpPr>
-        <p:spPr>
-          <a:xfrm>
-            <a:off x="107504" y="116633"/>
-            <a:ext cx="8856984" cy="1368151"/>
+            <p:ph type="title"/>
+          </p:nvPr>
+        </p:nvSpPr>
+        <p:spPr>
+          <a:xfrm>
+            <a:off x="395536" y="548680"/>
+            <a:ext cx="8229600" cy="1143000"/>
           </a:xfrm>
         </p:spPr>
         <p:txBody>
@@ -6896,27 +7130,49 @@
           <a:lstStyle/>
           <a:p>
             <a:r>
-              <a:rPr lang="uk-UA" b="1" dirty="0"/>
-              <a:t>Вимоги до консольного інтерфейсу користувача</a:t>
-            </a:r>
-            <a:endParaRPr lang="ru-RU" b="1" dirty="0"/>
-          </a:p>
-        </p:txBody>
-      </p:sp>
-      <p:sp>
-        <p:nvSpPr>
-          <p:cNvPr id="3" name="Подзаголовок 2"/>
-          <p:cNvSpPr>
-            <a:spLocks noGrp="1"/>
-          </p:cNvSpPr>
-          <p:nvPr>
-            <p:ph type="subTitle" idx="1"/>
-          </p:nvPr>
-        </p:nvSpPr>
-        <p:spPr>
-          <a:xfrm>
-            <a:off x="251520" y="1412776"/>
-            <a:ext cx="8568952" cy="5184576"/>
+              <a:rPr lang="ru-RU" b="1" dirty="0" err="1"/>
+              <a:t>Алгоритми</a:t>
+            </a:r>
+            <a:r>
+              <a:rPr lang="ru-RU" b="1" dirty="0"/>
+              <a:t> </a:t>
+            </a:r>
+            <a:r>
+              <a:rPr lang="ru-RU" b="1" dirty="0" err="1"/>
+              <a:t>роботи</a:t>
+            </a:r>
+            <a:r>
+              <a:rPr lang="ru-RU" b="1" dirty="0"/>
+              <a:t> </a:t>
+            </a:r>
+            <a:r>
+              <a:rPr lang="ru-RU" b="1" dirty="0" err="1"/>
+              <a:t>програми</a:t>
+            </a:r>
+            <a:br>
+              <a:rPr lang="ru-RU" dirty="0"/>
+            </a:br>
+            <a:br>
+              <a:rPr lang="ru-RU" dirty="0"/>
+            </a:br>
+            <a:endParaRPr lang="ru-RU" dirty="0"/>
+          </a:p>
+        </p:txBody>
+      </p:sp>
+      <p:sp>
+        <p:nvSpPr>
+          <p:cNvPr id="3" name="Объект 2"/>
+          <p:cNvSpPr>
+            <a:spLocks noGrp="1"/>
+          </p:cNvSpPr>
+          <p:nvPr>
+            <p:ph sz="half" idx="1"/>
+          </p:nvPr>
+        </p:nvSpPr>
+        <p:spPr>
+          <a:xfrm>
+            <a:off x="323528" y="980728"/>
+            <a:ext cx="4038600" cy="4525963"/>
           </a:xfrm>
         </p:spPr>
         <p:txBody>
@@ -6925,134 +7181,106 @@
           </a:bodyPr>
           <a:lstStyle/>
           <a:p>
-            <a:pPr marL="342900" lvl="0" indent="-342900" algn="l">
-              <a:buFont typeface="Arial" panose="020B0604020202020204" pitchFamily="34" charset="0"/>
-              <a:buChar char="•"/>
-            </a:pPr>
-            <a:r>
-              <a:rPr lang="uk-UA" sz="2000" dirty="0">
-                <a:solidFill>
-                  <a:schemeClr val="tx1"/>
-                </a:solidFill>
-              </a:rPr>
-              <a:t>Робоча мова інтерфейсу – українська.</a:t>
-            </a:r>
-            <a:endParaRPr lang="uk-UA" sz="2000" dirty="0">
-              <a:solidFill>
-                <a:schemeClr val="tx1"/>
-              </a:solidFill>
-            </a:endParaRPr>
-          </a:p>
-          <a:p>
-            <a:pPr lvl="0" algn="l"/>
-            <a:endParaRPr lang="ru-RU" sz="2000" dirty="0">
-              <a:solidFill>
-                <a:schemeClr val="tx1"/>
-              </a:solidFill>
-            </a:endParaRPr>
-          </a:p>
-          <a:p>
-            <a:pPr marL="342900" lvl="0" indent="-342900" algn="l">
-              <a:buFont typeface="Arial" panose="020B0604020202020204" pitchFamily="34" charset="0"/>
-              <a:buChar char="•"/>
-            </a:pPr>
-            <a:r>
-              <a:rPr lang="uk-UA" sz="2000" dirty="0">
-                <a:solidFill>
-                  <a:schemeClr val="tx1"/>
-                </a:solidFill>
-              </a:rPr>
-              <a:t>Використання термінів, зрозумілих користувачеві. </a:t>
-            </a:r>
-            <a:endParaRPr lang="uk-UA" sz="2000" dirty="0">
-              <a:solidFill>
-                <a:schemeClr val="tx1"/>
-              </a:solidFill>
-            </a:endParaRPr>
-          </a:p>
-          <a:p>
-            <a:pPr lvl="0" algn="l"/>
-            <a:endParaRPr lang="ru-RU" sz="2000" dirty="0">
-              <a:solidFill>
-                <a:schemeClr val="tx1"/>
-              </a:solidFill>
-            </a:endParaRPr>
-          </a:p>
-          <a:p>
-            <a:pPr marL="342900" lvl="0" indent="-342900" algn="l">
-              <a:buFont typeface="Arial" panose="020B0604020202020204" pitchFamily="34" charset="0"/>
-              <a:buChar char="•"/>
-            </a:pPr>
-            <a:r>
-              <a:rPr lang="uk-UA" sz="2000" dirty="0">
-                <a:solidFill>
-                  <a:schemeClr val="tx1"/>
-                </a:solidFill>
-              </a:rPr>
-              <a:t>Навігаційна панель (меню), яка забезпечує перегляд, редагування, додавання та зчитування даних.</a:t>
-            </a:r>
-            <a:endParaRPr lang="uk-UA" sz="2000" dirty="0">
-              <a:solidFill>
-                <a:schemeClr val="tx1"/>
-              </a:solidFill>
-            </a:endParaRPr>
-          </a:p>
-          <a:p>
-            <a:pPr lvl="0" algn="l"/>
-            <a:endParaRPr lang="ru-RU" sz="2000" dirty="0">
-              <a:solidFill>
-                <a:schemeClr val="tx1"/>
-              </a:solidFill>
-            </a:endParaRPr>
-          </a:p>
-          <a:p>
-            <a:pPr marL="342900" lvl="0" indent="-342900" algn="l">
-              <a:buFont typeface="Arial" panose="020B0604020202020204" pitchFamily="34" charset="0"/>
-              <a:buChar char="•"/>
-            </a:pPr>
-            <a:r>
-              <a:rPr lang="uk-UA" sz="2000" dirty="0">
-                <a:solidFill>
-                  <a:schemeClr val="tx1"/>
-                </a:solidFill>
-              </a:rPr>
-              <a:t>«Посібник користувача», що містить інструкції з використання програми.</a:t>
-            </a:r>
-            <a:endParaRPr lang="uk-UA" sz="2000" dirty="0">
-              <a:solidFill>
-                <a:schemeClr val="tx1"/>
-              </a:solidFill>
-            </a:endParaRPr>
-          </a:p>
-          <a:p>
-            <a:pPr lvl="0" algn="l"/>
-            <a:endParaRPr lang="ru-RU" sz="2000" dirty="0">
-              <a:solidFill>
-                <a:schemeClr val="tx1"/>
-              </a:solidFill>
-            </a:endParaRPr>
-          </a:p>
-          <a:p>
-            <a:pPr marL="342900" indent="-342900" algn="l">
-              <a:buFont typeface="Arial" panose="020B0604020202020204" pitchFamily="34" charset="0"/>
-              <a:buChar char="•"/>
-            </a:pPr>
-            <a:r>
-              <a:rPr lang="uk-UA" sz="2000" dirty="0">
-                <a:solidFill>
-                  <a:schemeClr val="tx1"/>
-                </a:solidFill>
-              </a:rPr>
-              <a:t>Повідомлення про некоректно введені дані</a:t>
-            </a:r>
-            <a:endParaRPr lang="ru-RU" sz="2000" dirty="0">
-              <a:solidFill>
-                <a:schemeClr val="tx1"/>
-              </a:solidFill>
-            </a:endParaRPr>
-          </a:p>
-        </p:txBody>
-      </p:sp>
+            <a:r>
+              <a:rPr lang="uk-UA" sz="1600" dirty="0"/>
+              <a:t>Рисунок 1 – Узагальнена блок-схема алгоритму додавання  об’єкту</a:t>
+            </a:r>
+            <a:endParaRPr lang="uk-UA" sz="1600" dirty="0"/>
+          </a:p>
+          <a:p>
+            <a:endParaRPr lang="ru-RU" sz="1600" dirty="0"/>
+          </a:p>
+        </p:txBody>
+      </p:sp>
+      <p:sp>
+        <p:nvSpPr>
+          <p:cNvPr id="4" name="Объект 3"/>
+          <p:cNvSpPr>
+            <a:spLocks noGrp="1"/>
+          </p:cNvSpPr>
+          <p:nvPr>
+            <p:ph sz="half" idx="2"/>
+          </p:nvPr>
+        </p:nvSpPr>
+        <p:spPr>
+          <a:xfrm>
+            <a:off x="4499992" y="980728"/>
+            <a:ext cx="4038600" cy="4525963"/>
+          </a:xfrm>
+        </p:spPr>
+        <p:txBody>
+          <a:bodyPr>
+            <a:normAutofit/>
+          </a:bodyPr>
+          <a:lstStyle/>
+          <a:p>
+            <a:r>
+              <a:rPr lang="uk-UA" sz="1600" dirty="0"/>
+              <a:t>Рисунок 2 – Узагальнена блок-схема алгоритму редагування об’єкту</a:t>
+            </a:r>
+            <a:endParaRPr lang="uk-UA" sz="1600" dirty="0"/>
+          </a:p>
+          <a:p>
+            <a:endParaRPr lang="ru-RU" sz="1600" dirty="0"/>
+          </a:p>
+        </p:txBody>
+      </p:sp>
+      <p:pic>
+        <p:nvPicPr>
+          <p:cNvPr id="12" name="Picture 4"/>
+          <p:cNvPicPr>
+            <a:picLocks noChangeAspect="1"/>
+          </p:cNvPicPr>
+          <p:nvPr/>
+        </p:nvPicPr>
+        <p:blipFill>
+          <a:blip r:embed="rId1"/>
+          <a:stretch>
+            <a:fillRect/>
+          </a:stretch>
+        </p:blipFill>
+        <p:spPr>
+          <a:xfrm>
+            <a:off x="1188085" y="1772285"/>
+            <a:ext cx="1814830" cy="4204970"/>
+          </a:xfrm>
+          <a:prstGeom prst="rect">
+            <a:avLst/>
+          </a:prstGeom>
+          <a:noFill/>
+          <a:ln>
+            <a:noFill/>
+          </a:ln>
+        </p:spPr>
+      </p:pic>
+      <p:pic>
+        <p:nvPicPr>
+          <p:cNvPr id="7" name="Picture 1"/>
+          <p:cNvPicPr>
+            <a:picLocks noChangeAspect="1"/>
+          </p:cNvPicPr>
+          <p:nvPr/>
+        </p:nvPicPr>
+        <p:blipFill>
+          <a:blip r:embed="rId2"/>
+          <a:stretch>
+            <a:fillRect/>
+          </a:stretch>
+        </p:blipFill>
+        <p:spPr>
+          <a:xfrm>
+            <a:off x="5507990" y="1916430"/>
+            <a:ext cx="1898015" cy="4339590"/>
+          </a:xfrm>
+          <a:prstGeom prst="rect">
+            <a:avLst/>
+          </a:prstGeom>
+          <a:noFill/>
+          <a:ln>
+            <a:noFill/>
+          </a:ln>
+        </p:spPr>
+      </p:pic>
     </p:spTree>
   </p:cSld>
   <p:clrMapOvr>
@@ -7080,171 +7308,128 @@
       </p:grpSpPr>
       <p:sp>
         <p:nvSpPr>
-          <p:cNvPr id="2" name="Заголовок 1"/>
-          <p:cNvSpPr>
-            <a:spLocks noGrp="1"/>
-          </p:cNvSpPr>
-          <p:nvPr>
-            <p:ph type="ctrTitle"/>
-          </p:nvPr>
-        </p:nvSpPr>
-        <p:spPr>
-          <a:xfrm>
-            <a:off x="755576" y="260648"/>
-            <a:ext cx="7772400" cy="1470025"/>
-          </a:xfrm>
-        </p:spPr>
-        <p:txBody>
-          <a:bodyPr>
-            <a:normAutofit fontScale="90000"/>
-          </a:bodyPr>
+          <p:cNvPr id="3" name="Объект 2"/>
+          <p:cNvSpPr>
+            <a:spLocks noGrp="1"/>
+          </p:cNvSpPr>
+          <p:nvPr>
+            <p:ph sz="half" idx="1"/>
+          </p:nvPr>
+        </p:nvSpPr>
+        <p:spPr>
+          <a:xfrm>
+            <a:off x="530860" y="404495"/>
+            <a:ext cx="3830955" cy="673100"/>
+          </a:xfrm>
+        </p:spPr>
+        <p:txBody>
+          <a:bodyPr/>
           <a:lstStyle/>
           <a:p>
             <a:r>
-              <a:rPr lang="ru-RU" b="1" dirty="0" err="1"/>
-              <a:t>Опис</a:t>
-            </a:r>
-            <a:r>
-              <a:rPr lang="ru-RU" b="1" dirty="0"/>
-              <a:t> </a:t>
-            </a:r>
-            <a:r>
-              <a:rPr lang="ru-RU" b="1" dirty="0" err="1"/>
-              <a:t>користувацького</a:t>
-            </a:r>
-            <a:r>
-              <a:rPr lang="ru-RU" b="1" dirty="0"/>
-              <a:t> </a:t>
-            </a:r>
-            <a:r>
-              <a:rPr lang="ru-RU" b="1" dirty="0" err="1"/>
-              <a:t>інтерфейсу</a:t>
-            </a:r>
-            <a:br>
-              <a:rPr lang="ru-RU" dirty="0"/>
-            </a:br>
-            <a:br>
-              <a:rPr lang="ru-RU" dirty="0"/>
-            </a:br>
+              <a:rPr lang="uk-UA" sz="1600" dirty="0"/>
+              <a:t>Рисунок 3 – Узагальнена блок-схема алгоритму видалення об’єкта</a:t>
+            </a:r>
+            <a:endParaRPr lang="ru-RU" sz="1600" dirty="0"/>
+          </a:p>
+          <a:p>
+            <a:pPr marL="0" indent="0">
+              <a:buNone/>
+            </a:pPr>
             <a:endParaRPr lang="ru-RU" dirty="0"/>
           </a:p>
         </p:txBody>
       </p:sp>
       <p:sp>
         <p:nvSpPr>
-          <p:cNvPr id="3" name="Подзаголовок 2"/>
-          <p:cNvSpPr>
-            <a:spLocks noGrp="1"/>
-          </p:cNvSpPr>
-          <p:nvPr>
-            <p:ph type="subTitle" idx="1"/>
-          </p:nvPr>
-        </p:nvSpPr>
-        <p:spPr>
-          <a:xfrm>
-            <a:off x="323528" y="764704"/>
-            <a:ext cx="8568952" cy="5904656"/>
-          </a:xfrm>
-        </p:spPr>
-        <p:txBody>
-          <a:bodyPr>
-            <a:normAutofit/>
-          </a:bodyPr>
+          <p:cNvPr id="4" name="Объект 3"/>
+          <p:cNvSpPr>
+            <a:spLocks noGrp="1"/>
+          </p:cNvSpPr>
+          <p:nvPr>
+            <p:ph sz="half" idx="2"/>
+          </p:nvPr>
+        </p:nvSpPr>
+        <p:spPr>
+          <a:xfrm>
+            <a:off x="4572000" y="404495"/>
+            <a:ext cx="4038600" cy="826135"/>
+          </a:xfrm>
+        </p:spPr>
+        <p:txBody>
+          <a:bodyPr/>
           <a:lstStyle/>
           <a:p>
-            <a:pPr algn="l"/>
-            <a:r>
-              <a:rPr lang="uk-UA" sz="2400" dirty="0">
-                <a:solidFill>
-                  <a:schemeClr val="tx1"/>
-                </a:solidFill>
-              </a:rPr>
-              <a:t>Після авторизації як адміністратор, в консоль виводитися меню, що складається з 10 пунктів. В якому адміністратор може додавати, редагувати, видаляти, переглядати, шукати, сортувати, фільтрувати товар, керувати обліковими записами, вийти з облікового запису.</a:t>
-            </a:r>
-            <a:endParaRPr lang="uk-UA" sz="2400" dirty="0">
-              <a:solidFill>
-                <a:schemeClr val="tx1"/>
-              </a:solidFill>
-            </a:endParaRPr>
-          </a:p>
-          <a:p>
-            <a:pPr algn="l"/>
-            <a:r>
-              <a:rPr lang="uk-UA" sz="2400" dirty="0">
-                <a:solidFill>
-                  <a:schemeClr val="tx1"/>
-                </a:solidFill>
-              </a:rPr>
-              <a:t>Після виборо пункту 9 адміністратора перекидую у меню керування обліковими записами. В якому адміністратор може переглянути, створити, видалити коростувача.</a:t>
-            </a:r>
-            <a:endParaRPr lang="uk-UA" sz="2400" dirty="0">
-              <a:solidFill>
-                <a:schemeClr val="tx1"/>
-              </a:solidFill>
-            </a:endParaRPr>
-          </a:p>
-          <a:p>
-            <a:pPr algn="l"/>
-            <a:r>
-              <a:rPr lang="uk-UA" sz="2400" dirty="0">
-                <a:solidFill>
-                  <a:schemeClr val="tx1"/>
-                </a:solidFill>
-              </a:rPr>
-              <a:t>Якщо ми авторизуємось як користувач</a:t>
-            </a:r>
-            <a:r>
-              <a:rPr lang="en-US" sz="2400" dirty="0">
-                <a:solidFill>
-                  <a:schemeClr val="tx1"/>
-                </a:solidFill>
-              </a:rPr>
-              <a:t> </a:t>
-            </a:r>
-            <a:r>
-              <a:rPr lang="uk-UA" altLang="en-US" sz="2400" dirty="0">
-                <a:solidFill>
-                  <a:schemeClr val="tx1"/>
-                </a:solidFill>
-              </a:rPr>
-              <a:t>консоль нам виведить меню касира у якому користувач може оформити покупку, переглянути всі товари і пошук товарів.</a:t>
-            </a:r>
-            <a:r>
-              <a:rPr lang="uk-UA" sz="2400" dirty="0">
-                <a:solidFill>
-                  <a:schemeClr val="tx1"/>
-                </a:solidFill>
-              </a:rPr>
-              <a:t> Також у користувача є окремий пункт з описом як працювати з програмаю.</a:t>
-            </a:r>
-            <a:endParaRPr lang="uk-UA" sz="2400" dirty="0">
-              <a:solidFill>
-                <a:schemeClr val="tx1"/>
-              </a:solidFill>
-            </a:endParaRPr>
-          </a:p>
-          <a:p>
-            <a:pPr algn="l"/>
-            <a:endParaRPr lang="uk-UA" sz="2400" dirty="0">
-              <a:solidFill>
-                <a:schemeClr val="tx1"/>
-              </a:solidFill>
-            </a:endParaRPr>
-          </a:p>
-          <a:p>
-            <a:pPr algn="l"/>
-            <a:r>
-              <a:rPr lang="uk-UA" sz="2400" dirty="0">
-                <a:solidFill>
-                  <a:schemeClr val="tx1"/>
-                </a:solidFill>
-              </a:rPr>
-              <a:t>  </a:t>
-            </a:r>
+            <a:r>
+              <a:rPr lang="uk-UA" sz="1600" dirty="0"/>
+              <a:t>Рисунок 4 – Узагальнена блок-схема алгоритму перегляду доданих об’єктів та їх сортування</a:t>
+            </a:r>
+            <a:endParaRPr lang="ru-RU" sz="1600" dirty="0"/>
+          </a:p>
+          <a:p>
+            <a:pPr marL="0" indent="0">
+              <a:buNone/>
+            </a:pPr>
             <a:endParaRPr lang="ru-RU" dirty="0"/>
           </a:p>
         </p:txBody>
       </p:sp>
+      <p:pic>
+        <p:nvPicPr>
+          <p:cNvPr id="18" name="Picture 2"/>
+          <p:cNvPicPr>
+            <a:picLocks noChangeAspect="1"/>
+          </p:cNvPicPr>
+          <p:nvPr/>
+        </p:nvPicPr>
+        <p:blipFill>
+          <a:blip r:embed="rId1"/>
+          <a:stretch>
+            <a:fillRect/>
+          </a:stretch>
+        </p:blipFill>
+        <p:spPr>
+          <a:xfrm>
+            <a:off x="1184275" y="1484630"/>
+            <a:ext cx="2523490" cy="4320540"/>
+          </a:xfrm>
+          <a:prstGeom prst="rect">
+            <a:avLst/>
+          </a:prstGeom>
+          <a:noFill/>
+          <a:ln>
+            <a:noFill/>
+          </a:ln>
+        </p:spPr>
+      </p:pic>
+      <p:pic>
+        <p:nvPicPr>
+          <p:cNvPr id="21" name="Picture 3"/>
+          <p:cNvPicPr>
+            <a:picLocks noChangeAspect="1"/>
+          </p:cNvPicPr>
+          <p:nvPr/>
+        </p:nvPicPr>
+        <p:blipFill>
+          <a:blip r:embed="rId2"/>
+          <a:stretch>
+            <a:fillRect/>
+          </a:stretch>
+        </p:blipFill>
+        <p:spPr>
+          <a:xfrm>
+            <a:off x="5175885" y="1340485"/>
+            <a:ext cx="2831465" cy="4744720"/>
+          </a:xfrm>
+          <a:prstGeom prst="rect">
+            <a:avLst/>
+          </a:prstGeom>
+          <a:noFill/>
+          <a:ln>
+            <a:noFill/>
+          </a:ln>
+        </p:spPr>
+      </p:pic>
     </p:spTree>
   </p:cSld>
   <p:clrMapOvr>
